--- a/Patrones de conducción.pptx
+++ b/Patrones de conducción.pptx
@@ -28,7 +28,8 @@
     <p:sldId id="278" r:id="rId22"/>
     <p:sldId id="279" r:id="rId23"/>
     <p:sldId id="280" r:id="rId24"/>
-    <p:sldId id="261" r:id="rId25"/>
+    <p:sldId id="281" r:id="rId25"/>
+    <p:sldId id="261" r:id="rId26"/>
   </p:sldIdLst>
   <p:sldSz cx="12192000" cy="6858000"/>
   <p:notesSz cx="6858000" cy="9144000"/>
@@ -284,7 +285,7 @@
           <a:p>
             <a:fld id="{42C3E431-2848-40F4-896C-F54C9A07EAB9}" type="datetimeFigureOut">
               <a:rPr lang="es-CO" smtClean="0"/>
-              <a:t>10/11/2025</a:t>
+              <a:t>19/11/2025</a:t>
             </a:fld>
             <a:endParaRPr lang="es-CO"/>
           </a:p>
@@ -484,7 +485,7 @@
           <a:p>
             <a:fld id="{42C3E431-2848-40F4-896C-F54C9A07EAB9}" type="datetimeFigureOut">
               <a:rPr lang="es-CO" smtClean="0"/>
-              <a:t>10/11/2025</a:t>
+              <a:t>19/11/2025</a:t>
             </a:fld>
             <a:endParaRPr lang="es-CO"/>
           </a:p>
@@ -694,7 +695,7 @@
           <a:p>
             <a:fld id="{42C3E431-2848-40F4-896C-F54C9A07EAB9}" type="datetimeFigureOut">
               <a:rPr lang="es-CO" smtClean="0"/>
-              <a:t>10/11/2025</a:t>
+              <a:t>19/11/2025</a:t>
             </a:fld>
             <a:endParaRPr lang="es-CO"/>
           </a:p>
@@ -894,7 +895,7 @@
           <a:p>
             <a:fld id="{42C3E431-2848-40F4-896C-F54C9A07EAB9}" type="datetimeFigureOut">
               <a:rPr lang="es-CO" smtClean="0"/>
-              <a:t>10/11/2025</a:t>
+              <a:t>19/11/2025</a:t>
             </a:fld>
             <a:endParaRPr lang="es-CO"/>
           </a:p>
@@ -1170,7 +1171,7 @@
           <a:p>
             <a:fld id="{42C3E431-2848-40F4-896C-F54C9A07EAB9}" type="datetimeFigureOut">
               <a:rPr lang="es-CO" smtClean="0"/>
-              <a:t>10/11/2025</a:t>
+              <a:t>19/11/2025</a:t>
             </a:fld>
             <a:endParaRPr lang="es-CO"/>
           </a:p>
@@ -1438,7 +1439,7 @@
           <a:p>
             <a:fld id="{42C3E431-2848-40F4-896C-F54C9A07EAB9}" type="datetimeFigureOut">
               <a:rPr lang="es-CO" smtClean="0"/>
-              <a:t>10/11/2025</a:t>
+              <a:t>19/11/2025</a:t>
             </a:fld>
             <a:endParaRPr lang="es-CO"/>
           </a:p>
@@ -1853,7 +1854,7 @@
           <a:p>
             <a:fld id="{42C3E431-2848-40F4-896C-F54C9A07EAB9}" type="datetimeFigureOut">
               <a:rPr lang="es-CO" smtClean="0"/>
-              <a:t>10/11/2025</a:t>
+              <a:t>19/11/2025</a:t>
             </a:fld>
             <a:endParaRPr lang="es-CO"/>
           </a:p>
@@ -1995,7 +1996,7 @@
           <a:p>
             <a:fld id="{42C3E431-2848-40F4-896C-F54C9A07EAB9}" type="datetimeFigureOut">
               <a:rPr lang="es-CO" smtClean="0"/>
-              <a:t>10/11/2025</a:t>
+              <a:t>19/11/2025</a:t>
             </a:fld>
             <a:endParaRPr lang="es-CO"/>
           </a:p>
@@ -2108,7 +2109,7 @@
           <a:p>
             <a:fld id="{42C3E431-2848-40F4-896C-F54C9A07EAB9}" type="datetimeFigureOut">
               <a:rPr lang="es-CO" smtClean="0"/>
-              <a:t>10/11/2025</a:t>
+              <a:t>19/11/2025</a:t>
             </a:fld>
             <a:endParaRPr lang="es-CO"/>
           </a:p>
@@ -2421,7 +2422,7 @@
           <a:p>
             <a:fld id="{42C3E431-2848-40F4-896C-F54C9A07EAB9}" type="datetimeFigureOut">
               <a:rPr lang="es-CO" smtClean="0"/>
-              <a:t>10/11/2025</a:t>
+              <a:t>19/11/2025</a:t>
             </a:fld>
             <a:endParaRPr lang="es-CO"/>
           </a:p>
@@ -2710,7 +2711,7 @@
           <a:p>
             <a:fld id="{42C3E431-2848-40F4-896C-F54C9A07EAB9}" type="datetimeFigureOut">
               <a:rPr lang="es-CO" smtClean="0"/>
-              <a:t>10/11/2025</a:t>
+              <a:t>19/11/2025</a:t>
             </a:fld>
             <a:endParaRPr lang="es-CO"/>
           </a:p>
@@ -2953,7 +2954,7 @@
           <a:p>
             <a:fld id="{42C3E431-2848-40F4-896C-F54C9A07EAB9}" type="datetimeFigureOut">
               <a:rPr lang="es-CO" smtClean="0"/>
-              <a:t>10/11/2025</a:t>
+              <a:t>19/11/2025</a:t>
             </a:fld>
             <a:endParaRPr lang="es-CO"/>
           </a:p>
@@ -6801,6 +6802,134 @@
           <p:cNvPr id="2" name="Title 1">
             <a:extLst>
               <a:ext uri="{FF2B5EF4-FFF2-40B4-BE49-F238E27FC236}">
+                <a16:creationId xmlns:a16="http://schemas.microsoft.com/office/drawing/2014/main" id="{58C94CFA-E0C5-4665-877C-9E0A5A2A6C92}"/>
+              </a:ext>
+            </a:extLst>
+          </p:cNvPr>
+          <p:cNvSpPr>
+            <a:spLocks noGrp="1"/>
+          </p:cNvSpPr>
+          <p:nvPr>
+            <p:ph type="title"/>
+          </p:nvPr>
+        </p:nvSpPr>
+        <p:spPr/>
+        <p:txBody>
+          <a:bodyPr/>
+          <a:lstStyle/>
+          <a:p>
+            <a:r>
+              <a:rPr lang="es-CO" dirty="0"/>
+              <a:t>Regeneración</a:t>
+            </a:r>
+          </a:p>
+        </p:txBody>
+      </p:sp>
+      <p:sp>
+        <p:nvSpPr>
+          <p:cNvPr id="3" name="Content Placeholder 2">
+            <a:extLst>
+              <a:ext uri="{FF2B5EF4-FFF2-40B4-BE49-F238E27FC236}">
+                <a16:creationId xmlns:a16="http://schemas.microsoft.com/office/drawing/2014/main" id="{AFC7E9D3-0264-44C2-94C1-30CDAFD03CC2}"/>
+              </a:ext>
+            </a:extLst>
+          </p:cNvPr>
+          <p:cNvSpPr>
+            <a:spLocks noGrp="1"/>
+          </p:cNvSpPr>
+          <p:nvPr>
+            <p:ph idx="1"/>
+          </p:nvPr>
+        </p:nvSpPr>
+        <p:spPr>
+          <a:xfrm>
+            <a:off x="838200" y="1825625"/>
+            <a:ext cx="2474343" cy="4351338"/>
+          </a:xfrm>
+        </p:spPr>
+        <p:txBody>
+          <a:bodyPr>
+            <a:normAutofit/>
+          </a:bodyPr>
+          <a:lstStyle/>
+          <a:p>
+            <a:r>
+              <a:rPr lang="es-CO" sz="1800" dirty="0"/>
+              <a:t>Los hombres regeneran un poquito más, en 5 de 6 rutas.</a:t>
+            </a:r>
+          </a:p>
+          <a:p>
+            <a:r>
+              <a:rPr lang="es-CO" sz="1800" dirty="0"/>
+              <a:t>En la ruta de bajada, los hombres regeneran 9% más!</a:t>
+            </a:r>
+          </a:p>
+        </p:txBody>
+      </p:sp>
+      <p:pic>
+        <p:nvPicPr>
+          <p:cNvPr id="5" name="Picture 4">
+            <a:extLst>
+              <a:ext uri="{FF2B5EF4-FFF2-40B4-BE49-F238E27FC236}">
+                <a16:creationId xmlns:a16="http://schemas.microsoft.com/office/drawing/2014/main" id="{6ACB86B9-4E3C-4CE4-A2A0-D5AFCF99DC86}"/>
+              </a:ext>
+            </a:extLst>
+          </p:cNvPr>
+          <p:cNvPicPr>
+            <a:picLocks noChangeAspect="1"/>
+          </p:cNvPicPr>
+          <p:nvPr/>
+        </p:nvPicPr>
+        <p:blipFill rotWithShape="1">
+          <a:blip r:embed="rId2"/>
+          <a:srcRect l="8262" r="8628"/>
+          <a:stretch/>
+        </p:blipFill>
+        <p:spPr>
+          <a:xfrm>
+            <a:off x="3312543" y="1433602"/>
+            <a:ext cx="8462513" cy="4629150"/>
+          </a:xfrm>
+          <a:prstGeom prst="rect">
+            <a:avLst/>
+          </a:prstGeom>
+        </p:spPr>
+      </p:pic>
+    </p:spTree>
+    <p:extLst>
+      <p:ext uri="{BB962C8B-B14F-4D97-AF65-F5344CB8AC3E}">
+        <p14:creationId xmlns:p14="http://schemas.microsoft.com/office/powerpoint/2010/main" val="1964312091"/>
+      </p:ext>
+    </p:extLst>
+  </p:cSld>
+  <p:clrMapOvr>
+    <a:masterClrMapping/>
+  </p:clrMapOvr>
+</p:sld>
+</file>
+
+<file path=ppt/slides/slide25.xml><?xml version="1.0" encoding="utf-8"?>
+<p:sld xmlns:a="http://schemas.openxmlformats.org/drawingml/2006/main" xmlns:r="http://schemas.openxmlformats.org/officeDocument/2006/relationships" xmlns:p="http://schemas.openxmlformats.org/presentationml/2006/main">
+  <p:cSld>
+    <p:spTree>
+      <p:nvGrpSpPr>
+        <p:cNvPr id="1" name=""/>
+        <p:cNvGrpSpPr/>
+        <p:nvPr/>
+      </p:nvGrpSpPr>
+      <p:grpSpPr>
+        <a:xfrm>
+          <a:off x="0" y="0"/>
+          <a:ext cx="0" cy="0"/>
+          <a:chOff x="0" y="0"/>
+          <a:chExt cx="0" cy="0"/>
+        </a:xfrm>
+      </p:grpSpPr>
+      <p:sp>
+        <p:nvSpPr>
+          <p:cNvPr id="2" name="Title 1">
+            <a:extLst>
+              <a:ext uri="{FF2B5EF4-FFF2-40B4-BE49-F238E27FC236}">
                 <a16:creationId xmlns:a16="http://schemas.microsoft.com/office/drawing/2014/main" id="{8988749B-7486-4842-8A1C-899970AF3027}"/>
               </a:ext>
             </a:extLst>

--- a/Patrones de conducción.pptx
+++ b/Patrones de conducción.pptx
@@ -10,26 +10,37 @@
     <p:sldId id="272" r:id="rId4"/>
     <p:sldId id="258" r:id="rId5"/>
     <p:sldId id="259" r:id="rId6"/>
-    <p:sldId id="260" r:id="rId7"/>
-    <p:sldId id="262" r:id="rId8"/>
-    <p:sldId id="266" r:id="rId9"/>
-    <p:sldId id="263" r:id="rId10"/>
-    <p:sldId id="265" r:id="rId11"/>
-    <p:sldId id="268" r:id="rId12"/>
-    <p:sldId id="269" r:id="rId13"/>
-    <p:sldId id="270" r:id="rId14"/>
-    <p:sldId id="274" r:id="rId15"/>
-    <p:sldId id="264" r:id="rId16"/>
-    <p:sldId id="267" r:id="rId17"/>
-    <p:sldId id="271" r:id="rId18"/>
-    <p:sldId id="275" r:id="rId19"/>
-    <p:sldId id="276" r:id="rId20"/>
-    <p:sldId id="277" r:id="rId21"/>
-    <p:sldId id="278" r:id="rId22"/>
-    <p:sldId id="279" r:id="rId23"/>
-    <p:sldId id="280" r:id="rId24"/>
-    <p:sldId id="281" r:id="rId25"/>
-    <p:sldId id="261" r:id="rId26"/>
+    <p:sldId id="282" r:id="rId7"/>
+    <p:sldId id="260" r:id="rId8"/>
+    <p:sldId id="262" r:id="rId9"/>
+    <p:sldId id="283" r:id="rId10"/>
+    <p:sldId id="266" r:id="rId11"/>
+    <p:sldId id="263" r:id="rId12"/>
+    <p:sldId id="265" r:id="rId13"/>
+    <p:sldId id="268" r:id="rId14"/>
+    <p:sldId id="269" r:id="rId15"/>
+    <p:sldId id="270" r:id="rId16"/>
+    <p:sldId id="274" r:id="rId17"/>
+    <p:sldId id="264" r:id="rId18"/>
+    <p:sldId id="267" r:id="rId19"/>
+    <p:sldId id="271" r:id="rId20"/>
+    <p:sldId id="275" r:id="rId21"/>
+    <p:sldId id="276" r:id="rId22"/>
+    <p:sldId id="277" r:id="rId23"/>
+    <p:sldId id="288" r:id="rId24"/>
+    <p:sldId id="284" r:id="rId25"/>
+    <p:sldId id="285" r:id="rId26"/>
+    <p:sldId id="286" r:id="rId27"/>
+    <p:sldId id="287" r:id="rId28"/>
+    <p:sldId id="289" r:id="rId29"/>
+    <p:sldId id="290" r:id="rId30"/>
+    <p:sldId id="292" r:id="rId31"/>
+    <p:sldId id="291" r:id="rId32"/>
+    <p:sldId id="278" r:id="rId33"/>
+    <p:sldId id="279" r:id="rId34"/>
+    <p:sldId id="280" r:id="rId35"/>
+    <p:sldId id="281" r:id="rId36"/>
+    <p:sldId id="261" r:id="rId37"/>
   </p:sldIdLst>
   <p:sldSz cx="12192000" cy="6858000"/>
   <p:notesSz cx="6858000" cy="9144000"/>
@@ -285,7 +296,7 @@
           <a:p>
             <a:fld id="{42C3E431-2848-40F4-896C-F54C9A07EAB9}" type="datetimeFigureOut">
               <a:rPr lang="es-CO" smtClean="0"/>
-              <a:t>19/11/2025</a:t>
+              <a:t>8/12/2025</a:t>
             </a:fld>
             <a:endParaRPr lang="es-CO"/>
           </a:p>
@@ -485,7 +496,7 @@
           <a:p>
             <a:fld id="{42C3E431-2848-40F4-896C-F54C9A07EAB9}" type="datetimeFigureOut">
               <a:rPr lang="es-CO" smtClean="0"/>
-              <a:t>19/11/2025</a:t>
+              <a:t>8/12/2025</a:t>
             </a:fld>
             <a:endParaRPr lang="es-CO"/>
           </a:p>
@@ -695,7 +706,7 @@
           <a:p>
             <a:fld id="{42C3E431-2848-40F4-896C-F54C9A07EAB9}" type="datetimeFigureOut">
               <a:rPr lang="es-CO" smtClean="0"/>
-              <a:t>19/11/2025</a:t>
+              <a:t>8/12/2025</a:t>
             </a:fld>
             <a:endParaRPr lang="es-CO"/>
           </a:p>
@@ -895,7 +906,7 @@
           <a:p>
             <a:fld id="{42C3E431-2848-40F4-896C-F54C9A07EAB9}" type="datetimeFigureOut">
               <a:rPr lang="es-CO" smtClean="0"/>
-              <a:t>19/11/2025</a:t>
+              <a:t>8/12/2025</a:t>
             </a:fld>
             <a:endParaRPr lang="es-CO"/>
           </a:p>
@@ -1171,7 +1182,7 @@
           <a:p>
             <a:fld id="{42C3E431-2848-40F4-896C-F54C9A07EAB9}" type="datetimeFigureOut">
               <a:rPr lang="es-CO" smtClean="0"/>
-              <a:t>19/11/2025</a:t>
+              <a:t>8/12/2025</a:t>
             </a:fld>
             <a:endParaRPr lang="es-CO"/>
           </a:p>
@@ -1439,7 +1450,7 @@
           <a:p>
             <a:fld id="{42C3E431-2848-40F4-896C-F54C9A07EAB9}" type="datetimeFigureOut">
               <a:rPr lang="es-CO" smtClean="0"/>
-              <a:t>19/11/2025</a:t>
+              <a:t>8/12/2025</a:t>
             </a:fld>
             <a:endParaRPr lang="es-CO"/>
           </a:p>
@@ -1854,7 +1865,7 @@
           <a:p>
             <a:fld id="{42C3E431-2848-40F4-896C-F54C9A07EAB9}" type="datetimeFigureOut">
               <a:rPr lang="es-CO" smtClean="0"/>
-              <a:t>19/11/2025</a:t>
+              <a:t>8/12/2025</a:t>
             </a:fld>
             <a:endParaRPr lang="es-CO"/>
           </a:p>
@@ -1996,7 +2007,7 @@
           <a:p>
             <a:fld id="{42C3E431-2848-40F4-896C-F54C9A07EAB9}" type="datetimeFigureOut">
               <a:rPr lang="es-CO" smtClean="0"/>
-              <a:t>19/11/2025</a:t>
+              <a:t>8/12/2025</a:t>
             </a:fld>
             <a:endParaRPr lang="es-CO"/>
           </a:p>
@@ -2109,7 +2120,7 @@
           <a:p>
             <a:fld id="{42C3E431-2848-40F4-896C-F54C9A07EAB9}" type="datetimeFigureOut">
               <a:rPr lang="es-CO" smtClean="0"/>
-              <a:t>19/11/2025</a:t>
+              <a:t>8/12/2025</a:t>
             </a:fld>
             <a:endParaRPr lang="es-CO"/>
           </a:p>
@@ -2422,7 +2433,7 @@
           <a:p>
             <a:fld id="{42C3E431-2848-40F4-896C-F54C9A07EAB9}" type="datetimeFigureOut">
               <a:rPr lang="es-CO" smtClean="0"/>
-              <a:t>19/11/2025</a:t>
+              <a:t>8/12/2025</a:t>
             </a:fld>
             <a:endParaRPr lang="es-CO"/>
           </a:p>
@@ -2711,7 +2722,7 @@
           <a:p>
             <a:fld id="{42C3E431-2848-40F4-896C-F54C9A07EAB9}" type="datetimeFigureOut">
               <a:rPr lang="es-CO" smtClean="0"/>
-              <a:t>19/11/2025</a:t>
+              <a:t>8/12/2025</a:t>
             </a:fld>
             <a:endParaRPr lang="es-CO"/>
           </a:p>
@@ -2954,7 +2965,7 @@
           <a:p>
             <a:fld id="{42C3E431-2848-40F4-896C-F54C9A07EAB9}" type="datetimeFigureOut">
               <a:rPr lang="es-CO" smtClean="0"/>
-              <a:t>19/11/2025</a:t>
+              <a:t>8/12/2025</a:t>
             </a:fld>
             <a:endParaRPr lang="es-CO"/>
           </a:p>
@@ -3481,12 +3492,73 @@
           <a:chExt cx="0" cy="0"/>
         </a:xfrm>
       </p:grpSpPr>
+      <p:sp>
+        <p:nvSpPr>
+          <p:cNvPr id="2" name="Title 1">
+            <a:extLst>
+              <a:ext uri="{FF2B5EF4-FFF2-40B4-BE49-F238E27FC236}">
+                <a16:creationId xmlns:a16="http://schemas.microsoft.com/office/drawing/2014/main" id="{76F0FA71-38A6-4528-80B8-BC5776FB6DBC}"/>
+              </a:ext>
+            </a:extLst>
+          </p:cNvPr>
+          <p:cNvSpPr>
+            <a:spLocks noGrp="1"/>
+          </p:cNvSpPr>
+          <p:nvPr>
+            <p:ph type="title"/>
+          </p:nvPr>
+        </p:nvSpPr>
+        <p:spPr/>
+        <p:txBody>
+          <a:bodyPr/>
+          <a:lstStyle/>
+          <a:p>
+            <a:r>
+              <a:rPr lang="es-CO" dirty="0"/>
+              <a:t>Aceleración </a:t>
+            </a:r>
+          </a:p>
+        </p:txBody>
+      </p:sp>
+      <p:sp>
+        <p:nvSpPr>
+          <p:cNvPr id="3" name="Content Placeholder 2">
+            <a:extLst>
+              <a:ext uri="{FF2B5EF4-FFF2-40B4-BE49-F238E27FC236}">
+                <a16:creationId xmlns:a16="http://schemas.microsoft.com/office/drawing/2014/main" id="{944BA5BE-F5FA-49A6-AED3-A53E50347295}"/>
+              </a:ext>
+            </a:extLst>
+          </p:cNvPr>
+          <p:cNvSpPr>
+            <a:spLocks noGrp="1"/>
+          </p:cNvSpPr>
+          <p:nvPr>
+            <p:ph idx="1"/>
+          </p:nvPr>
+        </p:nvSpPr>
+        <p:spPr/>
+        <p:txBody>
+          <a:bodyPr/>
+          <a:lstStyle/>
+          <a:p>
+            <a:r>
+              <a:rPr lang="es-CO" sz="1800" b="1" dirty="0"/>
+              <a:t>Se acelera por decisión, se frena por necesidad</a:t>
+            </a:r>
+            <a:r>
+              <a:rPr lang="es-CO" sz="1800" dirty="0"/>
+              <a:t>: En promedio, las frenadas son ligeramente más fuertes y más largas, tanto en el 4012 como en los otros.</a:t>
+            </a:r>
+            <a:endParaRPr lang="es-CO" dirty="0"/>
+          </a:p>
+        </p:txBody>
+      </p:sp>
       <p:pic>
         <p:nvPicPr>
-          <p:cNvPr id="11" name="Picture 10">
-            <a:extLst>
-              <a:ext uri="{FF2B5EF4-FFF2-40B4-BE49-F238E27FC236}">
-                <a16:creationId xmlns:a16="http://schemas.microsoft.com/office/drawing/2014/main" id="{5D3A8494-C44E-49EB-9689-7FAA43A547A0}"/>
+          <p:cNvPr id="4" name="Picture 3">
+            <a:extLst>
+              <a:ext uri="{FF2B5EF4-FFF2-40B4-BE49-F238E27FC236}">
+                <a16:creationId xmlns:a16="http://schemas.microsoft.com/office/drawing/2014/main" id="{8EB4B903-2E21-4485-8101-4D3C884DA82F}"/>
               </a:ext>
             </a:extLst>
           </p:cNvPr>
@@ -3496,95 +3568,7 @@
           <p:nvPr/>
         </p:nvPicPr>
         <p:blipFill>
-          <a:blip r:embed="rId2"/>
-          <a:stretch>
-            <a:fillRect/>
-          </a:stretch>
-        </p:blipFill>
-        <p:spPr>
-          <a:xfrm>
-            <a:off x="6043331" y="1740417"/>
-            <a:ext cx="6667500" cy="5000625"/>
-          </a:xfrm>
-          <a:prstGeom prst="rect">
-            <a:avLst/>
-          </a:prstGeom>
-        </p:spPr>
-      </p:pic>
-      <p:sp>
-        <p:nvSpPr>
-          <p:cNvPr id="2" name="Title 1">
-            <a:extLst>
-              <a:ext uri="{FF2B5EF4-FFF2-40B4-BE49-F238E27FC236}">
-                <a16:creationId xmlns:a16="http://schemas.microsoft.com/office/drawing/2014/main" id="{44B0B01B-E3CB-4E36-9AE6-45CFD6ABC120}"/>
-              </a:ext>
-            </a:extLst>
-          </p:cNvPr>
-          <p:cNvSpPr>
-            <a:spLocks noGrp="1"/>
-          </p:cNvSpPr>
-          <p:nvPr>
-            <p:ph type="title"/>
-          </p:nvPr>
-        </p:nvSpPr>
-        <p:spPr/>
-        <p:txBody>
-          <a:bodyPr/>
-          <a:lstStyle/>
-          <a:p>
-            <a:r>
-              <a:rPr lang="es-CO" dirty="0"/>
-              <a:t>Aceleración</a:t>
-            </a:r>
-          </a:p>
-        </p:txBody>
-      </p:sp>
-      <p:sp>
-        <p:nvSpPr>
-          <p:cNvPr id="3" name="Content Placeholder 2">
-            <a:extLst>
-              <a:ext uri="{FF2B5EF4-FFF2-40B4-BE49-F238E27FC236}">
-                <a16:creationId xmlns:a16="http://schemas.microsoft.com/office/drawing/2014/main" id="{6128163C-3E79-4C3C-907B-95DA07EBE134}"/>
-              </a:ext>
-            </a:extLst>
-          </p:cNvPr>
-          <p:cNvSpPr>
-            <a:spLocks noGrp="1"/>
-          </p:cNvSpPr>
-          <p:nvPr>
-            <p:ph idx="1"/>
-          </p:nvPr>
-        </p:nvSpPr>
-        <p:spPr>
-          <a:xfrm>
-            <a:off x="811305" y="1825625"/>
-            <a:ext cx="10515600" cy="4351338"/>
-          </a:xfrm>
-        </p:spPr>
-        <p:txBody>
-          <a:bodyPr/>
-          <a:lstStyle/>
-          <a:p>
-            <a:endParaRPr lang="es-CO" dirty="0"/>
-          </a:p>
-        </p:txBody>
-      </p:sp>
-      <p:pic>
-        <p:nvPicPr>
-          <p:cNvPr id="7" name="Picture 6">
-            <a:extLst>
-              <a:ext uri="{FF2B5EF4-FFF2-40B4-BE49-F238E27FC236}">
-                <a16:creationId xmlns:a16="http://schemas.microsoft.com/office/drawing/2014/main" id="{B74EA99E-AC4D-47E8-B6CE-7979D51824BE}"/>
-              </a:ext>
-            </a:extLst>
-          </p:cNvPr>
-          <p:cNvPicPr>
-            <a:picLocks noChangeAspect="1"/>
-          </p:cNvPicPr>
-          <p:nvPr/>
-        </p:nvPicPr>
-        <p:blipFill>
-          <a:blip r:embed="rId3">
+          <a:blip r:embed="rId2">
             <a:clrChange>
               <a:clrFrom>
                 <a:srgbClr val="FFFFFF"/>
@@ -3602,291 +3586,18 @@
         </p:blipFill>
         <p:spPr>
           <a:xfrm>
-            <a:off x="-69017" y="1790146"/>
-            <a:ext cx="6667500" cy="5000625"/>
+            <a:off x="979209" y="2459422"/>
+            <a:ext cx="8959743" cy="3577084"/>
           </a:xfrm>
           <a:prstGeom prst="rect">
             <a:avLst/>
           </a:prstGeom>
         </p:spPr>
       </p:pic>
-      <p:sp>
-        <p:nvSpPr>
-          <p:cNvPr id="8" name="TextBox 7">
-            <a:extLst>
-              <a:ext uri="{FF2B5EF4-FFF2-40B4-BE49-F238E27FC236}">
-                <a16:creationId xmlns:a16="http://schemas.microsoft.com/office/drawing/2014/main" id="{E96FD121-2453-422D-8E2F-DDEE578F8870}"/>
-              </a:ext>
-            </a:extLst>
-          </p:cNvPr>
-          <p:cNvSpPr txBox="1"/>
-          <p:nvPr/>
-        </p:nvSpPr>
-        <p:spPr>
-          <a:xfrm>
-            <a:off x="3218330" y="1640959"/>
-            <a:ext cx="1042273" cy="369332"/>
-          </a:xfrm>
-          <a:prstGeom prst="rect">
-            <a:avLst/>
-          </a:prstGeom>
-          <a:noFill/>
-        </p:spPr>
-        <p:txBody>
-          <a:bodyPr wrap="none" rtlCol="0">
-            <a:spAutoFit/>
-          </a:bodyPr>
-          <a:lstStyle/>
-          <a:p>
-            <a:r>
-              <a:rPr lang="es-CO" dirty="0"/>
-              <a:t>Bus 4012</a:t>
-            </a:r>
-          </a:p>
-        </p:txBody>
-      </p:sp>
-      <p:sp>
-        <p:nvSpPr>
-          <p:cNvPr id="9" name="TextBox 8">
-            <a:extLst>
-              <a:ext uri="{FF2B5EF4-FFF2-40B4-BE49-F238E27FC236}">
-                <a16:creationId xmlns:a16="http://schemas.microsoft.com/office/drawing/2014/main" id="{DAA6E8B6-5056-4F40-89FD-F6F0A4121228}"/>
-              </a:ext>
-            </a:extLst>
-          </p:cNvPr>
-          <p:cNvSpPr txBox="1"/>
-          <p:nvPr/>
-        </p:nvSpPr>
-        <p:spPr>
-          <a:xfrm>
-            <a:off x="8814485" y="1640959"/>
-            <a:ext cx="1042273" cy="369332"/>
-          </a:xfrm>
-          <a:prstGeom prst="rect">
-            <a:avLst/>
-          </a:prstGeom>
-          <a:noFill/>
-        </p:spPr>
-        <p:txBody>
-          <a:bodyPr wrap="none" rtlCol="0">
-            <a:spAutoFit/>
-          </a:bodyPr>
-          <a:lstStyle/>
-          <a:p>
-            <a:r>
-              <a:rPr lang="es-CO" dirty="0"/>
-              <a:t>Bus 4025</a:t>
-            </a:r>
-          </a:p>
-        </p:txBody>
-      </p:sp>
-      <p:sp>
-        <p:nvSpPr>
-          <p:cNvPr id="12" name="TextBox 11">
-            <a:extLst>
-              <a:ext uri="{FF2B5EF4-FFF2-40B4-BE49-F238E27FC236}">
-                <a16:creationId xmlns:a16="http://schemas.microsoft.com/office/drawing/2014/main" id="{9401F842-71F5-4EBE-8380-74993E26472F}"/>
-              </a:ext>
-            </a:extLst>
-          </p:cNvPr>
-          <p:cNvSpPr txBox="1"/>
-          <p:nvPr/>
-        </p:nvSpPr>
-        <p:spPr>
-          <a:xfrm>
-            <a:off x="4910667" y="144520"/>
-            <a:ext cx="6985000" cy="1954381"/>
-          </a:xfrm>
-          <a:prstGeom prst="rect">
-            <a:avLst/>
-          </a:prstGeom>
-          <a:noFill/>
-        </p:spPr>
-        <p:txBody>
-          <a:bodyPr wrap="square" rtlCol="0">
-            <a:spAutoFit/>
-          </a:bodyPr>
-          <a:lstStyle/>
-          <a:p>
-            <a:r>
-              <a:rPr lang="es-CO" sz="1100" dirty="0"/>
-              <a:t>Por lo anterior, cualquier evaluación sobre los indicadores de aceleración debe hacer por cada uno de los dos únicos buses donde hay información el sexo: el 4012 (el brusco) y el 4025.</a:t>
-            </a:r>
-          </a:p>
-          <a:p>
-            <a:endParaRPr lang="es-CO" sz="1100" dirty="0"/>
-          </a:p>
-          <a:p>
-            <a:r>
-              <a:rPr lang="es-CO" sz="1100" dirty="0"/>
-              <a:t>La matriz de correlación no muestra mayores indicios sobre patrones entre sexos.</a:t>
-            </a:r>
-          </a:p>
-          <a:p>
-            <a:r>
-              <a:rPr lang="es-CO" sz="1100" b="1" dirty="0"/>
-              <a:t>Se repite en los dos buses:</a:t>
-            </a:r>
-          </a:p>
-          <a:p>
-            <a:pPr marL="171450" indent="-171450">
-              <a:buFont typeface="Arial" panose="020B0604020202020204" pitchFamily="34" charset="0"/>
-              <a:buChar char="•"/>
-            </a:pPr>
-            <a:r>
-              <a:rPr lang="es-CO" sz="1100" dirty="0"/>
-              <a:t>Correlación positiva: </a:t>
-            </a:r>
-            <a:r>
-              <a:rPr lang="es-CO" sz="1100" dirty="0" err="1"/>
-              <a:t>Mag</a:t>
-            </a:r>
-            <a:r>
-              <a:rPr lang="es-CO" sz="1100" dirty="0"/>
-              <a:t> Aceleraciones con </a:t>
-            </a:r>
-            <a:r>
-              <a:rPr lang="es-CO" sz="1100" dirty="0" err="1"/>
-              <a:t>Mag</a:t>
-            </a:r>
-            <a:r>
-              <a:rPr lang="es-CO" sz="1100" dirty="0"/>
-              <a:t> frenadas</a:t>
-            </a:r>
-          </a:p>
-          <a:p>
-            <a:pPr marL="171450" indent="-171450">
-              <a:buFont typeface="Arial" panose="020B0604020202020204" pitchFamily="34" charset="0"/>
-              <a:buChar char="•"/>
-            </a:pPr>
-            <a:r>
-              <a:rPr lang="es-CO" sz="1100" dirty="0"/>
-              <a:t>Correlación Alta positiva: </a:t>
-            </a:r>
-            <a:r>
-              <a:rPr lang="es-CO" sz="1100" dirty="0" err="1"/>
-              <a:t>Dur</a:t>
-            </a:r>
-            <a:r>
-              <a:rPr lang="es-CO" sz="1100" dirty="0"/>
-              <a:t> Aceleraciones con </a:t>
-            </a:r>
-            <a:r>
-              <a:rPr lang="es-CO" sz="1100" dirty="0" err="1"/>
-              <a:t>Dur</a:t>
-            </a:r>
-            <a:r>
-              <a:rPr lang="es-CO" sz="1100" dirty="0"/>
-              <a:t> frenadas</a:t>
-            </a:r>
-          </a:p>
-          <a:p>
-            <a:pPr marL="171450" indent="-171450">
-              <a:buFont typeface="Arial" panose="020B0604020202020204" pitchFamily="34" charset="0"/>
-              <a:buChar char="•"/>
-            </a:pPr>
-            <a:r>
-              <a:rPr lang="es-CO" sz="1100" dirty="0"/>
-              <a:t>Correlación Alta positiva: Ace/km con </a:t>
-            </a:r>
-            <a:r>
-              <a:rPr lang="es-CO" sz="1100" dirty="0" err="1"/>
-              <a:t>fre</a:t>
-            </a:r>
-            <a:r>
-              <a:rPr lang="es-CO" sz="1100" dirty="0"/>
-              <a:t>/km</a:t>
-            </a:r>
-          </a:p>
-          <a:p>
-            <a:pPr marL="171450" indent="-171450">
-              <a:buFont typeface="Arial" panose="020B0604020202020204" pitchFamily="34" charset="0"/>
-              <a:buChar char="•"/>
-            </a:pPr>
-            <a:r>
-              <a:rPr lang="es-CO" sz="1100" dirty="0"/>
-              <a:t>Correlación negativa: </a:t>
-            </a:r>
-            <a:r>
-              <a:rPr lang="es-CO" sz="1100" dirty="0" err="1"/>
-              <a:t>fre</a:t>
-            </a:r>
-            <a:r>
-              <a:rPr lang="es-CO" sz="1100" dirty="0"/>
-              <a:t>/km con duraciones</a:t>
-            </a:r>
-          </a:p>
-          <a:p>
-            <a:pPr marL="171450" indent="-171450">
-              <a:buFont typeface="Arial" panose="020B0604020202020204" pitchFamily="34" charset="0"/>
-              <a:buChar char="•"/>
-            </a:pPr>
-            <a:r>
-              <a:rPr lang="es-CO" sz="1100" dirty="0"/>
-              <a:t>Correlación negativa: Ace/km con duraciones</a:t>
-            </a:r>
-          </a:p>
-          <a:p>
-            <a:endParaRPr lang="es-CO" sz="1100" dirty="0"/>
-          </a:p>
-        </p:txBody>
-      </p:sp>
-      <p:sp>
-        <p:nvSpPr>
-          <p:cNvPr id="16" name="Rectangle 15">
-            <a:extLst>
-              <a:ext uri="{FF2B5EF4-FFF2-40B4-BE49-F238E27FC236}">
-                <a16:creationId xmlns:a16="http://schemas.microsoft.com/office/drawing/2014/main" id="{AEE4E399-CCED-419E-9EF0-960EA2B23896}"/>
-              </a:ext>
-            </a:extLst>
-          </p:cNvPr>
-          <p:cNvSpPr/>
-          <p:nvPr/>
-        </p:nvSpPr>
-        <p:spPr>
-          <a:xfrm>
-            <a:off x="10142481" y="5126311"/>
-            <a:ext cx="683173" cy="580806"/>
-          </a:xfrm>
-          <a:prstGeom prst="rect">
-            <a:avLst/>
-          </a:prstGeom>
-          <a:noFill/>
-          <a:ln w="38100">
-            <a:solidFill>
-              <a:srgbClr val="FFC000"/>
-            </a:solidFill>
-          </a:ln>
-        </p:spPr>
-        <p:style>
-          <a:lnRef idx="2">
-            <a:schemeClr val="accent1">
-              <a:shade val="50000"/>
-            </a:schemeClr>
-          </a:lnRef>
-          <a:fillRef idx="1">
-            <a:schemeClr val="accent1"/>
-          </a:fillRef>
-          <a:effectRef idx="0">
-            <a:schemeClr val="accent1"/>
-          </a:effectRef>
-          <a:fontRef idx="minor">
-            <a:schemeClr val="lt1"/>
-          </a:fontRef>
-        </p:style>
-        <p:txBody>
-          <a:bodyPr rtlCol="0" anchor="ctr"/>
-          <a:lstStyle/>
-          <a:p>
-            <a:pPr algn="ctr"/>
-            <a:endParaRPr lang="es-CO"/>
-          </a:p>
-        </p:txBody>
-      </p:sp>
     </p:spTree>
     <p:extLst>
       <p:ext uri="{BB962C8B-B14F-4D97-AF65-F5344CB8AC3E}">
-        <p14:creationId xmlns:p14="http://schemas.microsoft.com/office/powerpoint/2010/main" val="2209058227"/>
+        <p14:creationId xmlns:p14="http://schemas.microsoft.com/office/powerpoint/2010/main" val="2177463488"/>
       </p:ext>
     </p:extLst>
   </p:cSld>
@@ -3943,138 +3654,181 @@
       </p:sp>
       <p:sp>
         <p:nvSpPr>
-          <p:cNvPr id="8" name="TextBox 7">
-            <a:extLst>
-              <a:ext uri="{FF2B5EF4-FFF2-40B4-BE49-F238E27FC236}">
-                <a16:creationId xmlns:a16="http://schemas.microsoft.com/office/drawing/2014/main" id="{E96FD121-2453-422D-8E2F-DDEE578F8870}"/>
-              </a:ext>
-            </a:extLst>
-          </p:cNvPr>
-          <p:cNvSpPr txBox="1"/>
-          <p:nvPr/>
-        </p:nvSpPr>
-        <p:spPr>
-          <a:xfrm>
-            <a:off x="3218330" y="1640959"/>
-            <a:ext cx="1042273" cy="369332"/>
-          </a:xfrm>
-          <a:prstGeom prst="rect">
-            <a:avLst/>
-          </a:prstGeom>
-          <a:noFill/>
-        </p:spPr>
-        <p:txBody>
-          <a:bodyPr wrap="none" rtlCol="0">
-            <a:spAutoFit/>
+          <p:cNvPr id="3" name="Content Placeholder 2">
+            <a:extLst>
+              <a:ext uri="{FF2B5EF4-FFF2-40B4-BE49-F238E27FC236}">
+                <a16:creationId xmlns:a16="http://schemas.microsoft.com/office/drawing/2014/main" id="{6128163C-3E79-4C3C-907B-95DA07EBE134}"/>
+              </a:ext>
+            </a:extLst>
+          </p:cNvPr>
+          <p:cNvSpPr>
+            <a:spLocks noGrp="1"/>
+          </p:cNvSpPr>
+          <p:nvPr>
+            <p:ph idx="1"/>
+          </p:nvPr>
+        </p:nvSpPr>
+        <p:spPr>
+          <a:xfrm>
+            <a:off x="838200" y="1825625"/>
+            <a:ext cx="2559424" cy="4351338"/>
+          </a:xfrm>
+        </p:spPr>
+        <p:txBody>
+          <a:bodyPr>
+            <a:normAutofit fontScale="92500"/>
           </a:bodyPr>
           <a:lstStyle/>
           <a:p>
             <a:r>
-              <a:rPr lang="es-CO" dirty="0"/>
-              <a:t>Bus 4012</a:t>
-            </a:r>
-          </a:p>
-        </p:txBody>
-      </p:sp>
-      <p:sp>
-        <p:nvSpPr>
-          <p:cNvPr id="9" name="TextBox 8">
-            <a:extLst>
-              <a:ext uri="{FF2B5EF4-FFF2-40B4-BE49-F238E27FC236}">
-                <a16:creationId xmlns:a16="http://schemas.microsoft.com/office/drawing/2014/main" id="{DAA6E8B6-5056-4F40-89FD-F6F0A4121228}"/>
-              </a:ext>
-            </a:extLst>
-          </p:cNvPr>
-          <p:cNvSpPr txBox="1"/>
-          <p:nvPr/>
-        </p:nvSpPr>
-        <p:spPr>
-          <a:xfrm>
-            <a:off x="8814485" y="1640959"/>
-            <a:ext cx="1042273" cy="369332"/>
-          </a:xfrm>
-          <a:prstGeom prst="rect">
-            <a:avLst/>
-          </a:prstGeom>
-          <a:noFill/>
-        </p:spPr>
-        <p:txBody>
-          <a:bodyPr wrap="none" rtlCol="0">
-            <a:spAutoFit/>
-          </a:bodyPr>
-          <a:lstStyle/>
-          <a:p>
-            <a:r>
-              <a:rPr lang="es-CO" dirty="0"/>
-              <a:t>Bus 4025</a:t>
-            </a:r>
-          </a:p>
-        </p:txBody>
-      </p:sp>
-      <p:sp>
-        <p:nvSpPr>
-          <p:cNvPr id="12" name="TextBox 11">
-            <a:extLst>
-              <a:ext uri="{FF2B5EF4-FFF2-40B4-BE49-F238E27FC236}">
-                <a16:creationId xmlns:a16="http://schemas.microsoft.com/office/drawing/2014/main" id="{9401F842-71F5-4EBE-8380-74993E26472F}"/>
-              </a:ext>
-            </a:extLst>
-          </p:cNvPr>
-          <p:cNvSpPr txBox="1"/>
-          <p:nvPr/>
-        </p:nvSpPr>
-        <p:spPr>
-          <a:xfrm>
-            <a:off x="4910667" y="228600"/>
-            <a:ext cx="6985000" cy="1384995"/>
-          </a:xfrm>
-          <a:prstGeom prst="rect">
-            <a:avLst/>
-          </a:prstGeom>
-          <a:noFill/>
-        </p:spPr>
-        <p:txBody>
-          <a:bodyPr wrap="square" rtlCol="0">
-            <a:spAutoFit/>
-          </a:bodyPr>
-          <a:lstStyle/>
-          <a:p>
-            <a:r>
               <a:rPr lang="es-CO" sz="1400" dirty="0"/>
-              <a:t>El bus 4012 (brusco) recorre principalmente la HA617</a:t>
+              <a:t>Hay 6 indicadores sobre las (des)aceleraciones para cada recorrido:</a:t>
+            </a:r>
+          </a:p>
+          <a:p>
+            <a:pPr lvl="1"/>
+            <a:r>
+              <a:rPr lang="es-CO" sz="1000" dirty="0"/>
+              <a:t>% </a:t>
+            </a:r>
+            <a:r>
+              <a:rPr lang="es-CO" sz="1000" dirty="0" err="1"/>
+              <a:t>Mag</a:t>
+            </a:r>
+            <a:r>
+              <a:rPr lang="es-CO" sz="1000" dirty="0"/>
+              <a:t> &gt; 1 m/s2 (porcentaje de ace fuertes)</a:t>
+            </a:r>
+          </a:p>
+          <a:p>
+            <a:pPr lvl="1"/>
+            <a:r>
+              <a:rPr lang="es-CO" sz="1000" dirty="0"/>
+              <a:t>% </a:t>
+            </a:r>
+            <a:r>
+              <a:rPr lang="es-CO" sz="1000" dirty="0" err="1"/>
+              <a:t>Mag</a:t>
+            </a:r>
+            <a:r>
+              <a:rPr lang="es-CO" sz="1000" dirty="0"/>
+              <a:t> &gt; 2 m/s2 (porcentaje de ace muy fuertes)</a:t>
+            </a:r>
+          </a:p>
+          <a:p>
+            <a:pPr lvl="1"/>
+            <a:r>
+              <a:rPr lang="es-CO" sz="1000" dirty="0"/>
+              <a:t>% </a:t>
+            </a:r>
+            <a:r>
+              <a:rPr lang="es-CO" sz="1000" dirty="0" err="1"/>
+              <a:t>Mag</a:t>
+            </a:r>
+            <a:r>
+              <a:rPr lang="es-CO" sz="1000" dirty="0"/>
+              <a:t> &lt; -1 m/s2 (porcentaje de </a:t>
+            </a:r>
+            <a:r>
+              <a:rPr lang="es-CO" sz="1000" dirty="0" err="1"/>
+              <a:t>fre</a:t>
+            </a:r>
+            <a:r>
+              <a:rPr lang="es-CO" sz="1000" dirty="0"/>
+              <a:t> fuertes)</a:t>
+            </a:r>
+          </a:p>
+          <a:p>
+            <a:pPr lvl="1"/>
+            <a:r>
+              <a:rPr lang="es-CO" sz="1000" dirty="0"/>
+              <a:t>% </a:t>
+            </a:r>
+            <a:r>
+              <a:rPr lang="es-CO" sz="1000" dirty="0" err="1"/>
+              <a:t>Mag</a:t>
+            </a:r>
+            <a:r>
+              <a:rPr lang="es-CO" sz="1000" dirty="0"/>
+              <a:t> &lt; -2 m/s2 (porcentaje de </a:t>
+            </a:r>
+            <a:r>
+              <a:rPr lang="es-CO" sz="1000" dirty="0" err="1"/>
+              <a:t>fre</a:t>
+            </a:r>
+            <a:r>
+              <a:rPr lang="es-CO" sz="1000" dirty="0"/>
+              <a:t> muy fuertes)</a:t>
+            </a:r>
+          </a:p>
+          <a:p>
+            <a:pPr lvl="1"/>
+            <a:r>
+              <a:rPr lang="es-CO" sz="1000" dirty="0"/>
+              <a:t>Duración de las aceleraciones</a:t>
+            </a:r>
+          </a:p>
+          <a:p>
+            <a:pPr lvl="1"/>
+            <a:r>
+              <a:rPr lang="es-CO" sz="1000" dirty="0"/>
+              <a:t>Duración de las frenadas</a:t>
             </a:r>
           </a:p>
           <a:p>
             <a:r>
               <a:rPr lang="es-CO" sz="1400" dirty="0"/>
-              <a:t>El bus 4025 recorre principalmente la HL613</a:t>
-            </a:r>
-          </a:p>
-          <a:p>
-            <a:endParaRPr lang="es-CO" sz="1400" dirty="0"/>
+              <a:t>Además, en los patrones de conducción hay 2 indicadores</a:t>
+            </a:r>
+          </a:p>
+          <a:p>
+            <a:pPr lvl="1"/>
+            <a:r>
+              <a:rPr lang="es-CO" sz="1000" dirty="0"/>
+              <a:t># Aceleraciones por km</a:t>
+            </a:r>
+          </a:p>
+          <a:p>
+            <a:pPr lvl="1"/>
+            <a:r>
+              <a:rPr lang="es-CO" sz="1000" dirty="0"/>
+              <a:t># frenadas por km</a:t>
+            </a:r>
+          </a:p>
+          <a:p>
+            <a:pPr lvl="1"/>
+            <a:endParaRPr lang="es-CO" sz="1000" dirty="0"/>
           </a:p>
           <a:p>
             <a:r>
               <a:rPr lang="es-CO" sz="1400" dirty="0"/>
-              <a:t>Aunque hay más hombres “suaves” en 4025 o más mujeres “suaves” en 4012, no aparece ningún patrón claro aquí... las posiciones en esta nube de datos están asociadas al Conductor... (</a:t>
+              <a:t>En los primeros 6 indicadores, el bus 4012 (</a:t>
             </a:r>
             <a:r>
               <a:rPr lang="es-CO" sz="1400" dirty="0" err="1"/>
-              <a:t>CondID</a:t>
+              <a:t>cyan</a:t>
             </a:r>
             <a:r>
               <a:rPr lang="es-CO" sz="1400" dirty="0"/>
-              <a:t>)</a:t>
-            </a:r>
+              <a:t>) se distingue inmediatamente. Lo llamamos el “bus brusco”, </a:t>
+            </a:r>
+            <a:r>
+              <a:rPr lang="es-CO" sz="1400" b="1" dirty="0"/>
+              <a:t>frena y acelera más fuerte y en menos tiempo.</a:t>
+            </a:r>
+          </a:p>
+          <a:p>
+            <a:pPr lvl="1"/>
+            <a:endParaRPr lang="es-CO" sz="1000" dirty="0"/>
           </a:p>
         </p:txBody>
       </p:sp>
       <p:pic>
         <p:nvPicPr>
-          <p:cNvPr id="14" name="Picture 13">
-            <a:extLst>
-              <a:ext uri="{FF2B5EF4-FFF2-40B4-BE49-F238E27FC236}">
-                <a16:creationId xmlns:a16="http://schemas.microsoft.com/office/drawing/2014/main" id="{C4EB91E2-A2EE-4131-A7A0-F097C66B2057}"/>
+          <p:cNvPr id="5" name="Picture 4">
+            <a:extLst>
+              <a:ext uri="{FF2B5EF4-FFF2-40B4-BE49-F238E27FC236}">
+                <a16:creationId xmlns:a16="http://schemas.microsoft.com/office/drawing/2014/main" id="{57A2BCBA-5D7D-403A-A8A4-D416FA0400E2}"/>
               </a:ext>
             </a:extLst>
           </p:cNvPr>
@@ -4091,68 +3845,8 @@
         </p:blipFill>
         <p:spPr>
           <a:xfrm>
-            <a:off x="717398" y="1790146"/>
-            <a:ext cx="5243014" cy="5852667"/>
-          </a:xfrm>
-          <a:prstGeom prst="rect">
-            <a:avLst/>
-          </a:prstGeom>
-        </p:spPr>
-      </p:pic>
-      <p:pic>
-        <p:nvPicPr>
-          <p:cNvPr id="5" name="Picture 4">
-            <a:extLst>
-              <a:ext uri="{FF2B5EF4-FFF2-40B4-BE49-F238E27FC236}">
-                <a16:creationId xmlns:a16="http://schemas.microsoft.com/office/drawing/2014/main" id="{6D072FE5-6B37-449D-BC49-D745A580CF1C}"/>
-              </a:ext>
-            </a:extLst>
-          </p:cNvPr>
-          <p:cNvPicPr>
-            <a:picLocks noChangeAspect="1"/>
-          </p:cNvPicPr>
-          <p:nvPr/>
-        </p:nvPicPr>
-        <p:blipFill>
-          <a:blip r:embed="rId3"/>
-          <a:stretch>
-            <a:fillRect/>
-          </a:stretch>
-        </p:blipFill>
-        <p:spPr>
-          <a:xfrm>
-            <a:off x="2627586" y="5153147"/>
-            <a:ext cx="3852111" cy="2679456"/>
-          </a:xfrm>
-          <a:prstGeom prst="rect">
-            <a:avLst/>
-          </a:prstGeom>
-        </p:spPr>
-      </p:pic>
-      <p:pic>
-        <p:nvPicPr>
-          <p:cNvPr id="10" name="Picture 9">
-            <a:extLst>
-              <a:ext uri="{FF2B5EF4-FFF2-40B4-BE49-F238E27FC236}">
-                <a16:creationId xmlns:a16="http://schemas.microsoft.com/office/drawing/2014/main" id="{3CCBB73A-1BE6-4D26-A2EF-B39BD9CA319A}"/>
-              </a:ext>
-            </a:extLst>
-          </p:cNvPr>
-          <p:cNvPicPr>
-            <a:picLocks noChangeAspect="1"/>
-          </p:cNvPicPr>
-          <p:nvPr/>
-        </p:nvPicPr>
-        <p:blipFill>
-          <a:blip r:embed="rId4"/>
-          <a:stretch>
-            <a:fillRect/>
-          </a:stretch>
-        </p:blipFill>
-        <p:spPr>
-          <a:xfrm>
-            <a:off x="6896548" y="1432625"/>
-            <a:ext cx="5122320" cy="4897750"/>
+            <a:off x="3973886" y="157162"/>
+            <a:ext cx="9820275" cy="6543675"/>
           </a:xfrm>
           <a:prstGeom prst="rect">
             <a:avLst/>
@@ -4162,7 +3856,7 @@
     </p:spTree>
     <p:extLst>
       <p:ext uri="{BB962C8B-B14F-4D97-AF65-F5344CB8AC3E}">
-        <p14:creationId xmlns:p14="http://schemas.microsoft.com/office/powerpoint/2010/main" val="466185757"/>
+        <p14:creationId xmlns:p14="http://schemas.microsoft.com/office/powerpoint/2010/main" val="1758016994"/>
       </p:ext>
     </p:extLst>
   </p:cSld>
@@ -4189,151 +3883,12 @@
           <a:chExt cx="0" cy="0"/>
         </a:xfrm>
       </p:grpSpPr>
-      <p:sp>
-        <p:nvSpPr>
-          <p:cNvPr id="2" name="Title 1">
-            <a:extLst>
-              <a:ext uri="{FF2B5EF4-FFF2-40B4-BE49-F238E27FC236}">
-                <a16:creationId xmlns:a16="http://schemas.microsoft.com/office/drawing/2014/main" id="{44B0B01B-E3CB-4E36-9AE6-45CFD6ABC120}"/>
-              </a:ext>
-            </a:extLst>
-          </p:cNvPr>
-          <p:cNvSpPr>
-            <a:spLocks noGrp="1"/>
-          </p:cNvSpPr>
-          <p:nvPr>
-            <p:ph type="title"/>
-          </p:nvPr>
-        </p:nvSpPr>
-        <p:spPr/>
-        <p:txBody>
-          <a:bodyPr/>
-          <a:lstStyle/>
-          <a:p>
-            <a:r>
-              <a:rPr lang="es-CO" dirty="0"/>
-              <a:t>Aceleración</a:t>
-            </a:r>
-          </a:p>
-        </p:txBody>
-      </p:sp>
-      <p:sp>
-        <p:nvSpPr>
-          <p:cNvPr id="9" name="TextBox 8">
-            <a:extLst>
-              <a:ext uri="{FF2B5EF4-FFF2-40B4-BE49-F238E27FC236}">
-                <a16:creationId xmlns:a16="http://schemas.microsoft.com/office/drawing/2014/main" id="{DAA6E8B6-5056-4F40-89FD-F6F0A4121228}"/>
-              </a:ext>
-            </a:extLst>
-          </p:cNvPr>
-          <p:cNvSpPr txBox="1"/>
-          <p:nvPr/>
-        </p:nvSpPr>
-        <p:spPr>
-          <a:xfrm>
-            <a:off x="8814485" y="1640959"/>
-            <a:ext cx="1042273" cy="369332"/>
-          </a:xfrm>
-          <a:prstGeom prst="rect">
-            <a:avLst/>
-          </a:prstGeom>
-          <a:noFill/>
-        </p:spPr>
-        <p:txBody>
-          <a:bodyPr wrap="none" rtlCol="0">
-            <a:spAutoFit/>
-          </a:bodyPr>
-          <a:lstStyle/>
-          <a:p>
-            <a:r>
-              <a:rPr lang="es-CO" dirty="0"/>
-              <a:t>Bus 4025</a:t>
-            </a:r>
-          </a:p>
-        </p:txBody>
-      </p:sp>
-      <p:sp>
-        <p:nvSpPr>
-          <p:cNvPr id="12" name="TextBox 11">
-            <a:extLst>
-              <a:ext uri="{FF2B5EF4-FFF2-40B4-BE49-F238E27FC236}">
-                <a16:creationId xmlns:a16="http://schemas.microsoft.com/office/drawing/2014/main" id="{9401F842-71F5-4EBE-8380-74993E26472F}"/>
-              </a:ext>
-            </a:extLst>
-          </p:cNvPr>
-          <p:cNvSpPr txBox="1"/>
-          <p:nvPr/>
-        </p:nvSpPr>
-        <p:spPr>
-          <a:xfrm>
-            <a:off x="4910667" y="228600"/>
-            <a:ext cx="6985000" cy="1384995"/>
-          </a:xfrm>
-          <a:prstGeom prst="rect">
-            <a:avLst/>
-          </a:prstGeom>
-          <a:noFill/>
-        </p:spPr>
-        <p:txBody>
-          <a:bodyPr wrap="square" rtlCol="0">
-            <a:spAutoFit/>
-          </a:bodyPr>
-          <a:lstStyle/>
-          <a:p>
-            <a:r>
-              <a:rPr lang="es-CO" sz="1400" dirty="0"/>
-              <a:t>En el 4012 y 4025 solo hay 2 </a:t>
-            </a:r>
-            <a:r>
-              <a:rPr lang="es-CO" sz="1400" dirty="0" err="1"/>
-              <a:t>IDs</a:t>
-            </a:r>
-            <a:r>
-              <a:rPr lang="es-CO" sz="1400" dirty="0"/>
-              <a:t> de Hs repetidos, el 168 (</a:t>
-            </a:r>
-            <a:r>
-              <a:rPr lang="es-CO" sz="1400" dirty="0" err="1"/>
-              <a:t>star</a:t>
-            </a:r>
-            <a:r>
-              <a:rPr lang="es-CO" sz="1400" dirty="0"/>
-              <a:t>) y el 730 (x): AMBOS CONSERVAN EL PROMEDIO DEL # FRE/KM, pero cambian la duración de la frenada, mayor en el 4025 en ambos casos.</a:t>
-            </a:r>
-          </a:p>
-          <a:p>
-            <a:endParaRPr lang="es-CO" sz="1400" dirty="0"/>
-          </a:p>
-          <a:p>
-            <a:r>
-              <a:rPr lang="es-CO" sz="1400" dirty="0"/>
-              <a:t>Todos los </a:t>
-            </a:r>
-            <a:r>
-              <a:rPr lang="es-CO" sz="1400" dirty="0" err="1"/>
-              <a:t>ConID</a:t>
-            </a:r>
-            <a:r>
-              <a:rPr lang="es-CO" sz="1400" dirty="0"/>
-              <a:t> forman </a:t>
-            </a:r>
-            <a:r>
-              <a:rPr lang="es-CO" sz="1400" dirty="0" err="1"/>
-              <a:t>clusters</a:t>
-            </a:r>
-            <a:r>
-              <a:rPr lang="es-CO" sz="1400" dirty="0"/>
-              <a:t> cercanos! (Cada conductor tiene una huella digital de su patrón de conducción)</a:t>
-            </a:r>
-          </a:p>
-        </p:txBody>
-      </p:sp>
       <p:pic>
         <p:nvPicPr>
-          <p:cNvPr id="6" name="Picture 5">
-            <a:extLst>
-              <a:ext uri="{FF2B5EF4-FFF2-40B4-BE49-F238E27FC236}">
-                <a16:creationId xmlns:a16="http://schemas.microsoft.com/office/drawing/2014/main" id="{7EF67583-FCD5-4B10-8A7A-AD63D1C08E41}"/>
+          <p:cNvPr id="11" name="Picture 10">
+            <a:extLst>
+              <a:ext uri="{FF2B5EF4-FFF2-40B4-BE49-F238E27FC236}">
+                <a16:creationId xmlns:a16="http://schemas.microsoft.com/office/drawing/2014/main" id="{5D3A8494-C44E-49EB-9689-7FAA43A547A0}"/>
               </a:ext>
             </a:extLst>
           </p:cNvPr>
@@ -4350,20 +3905,78 @@
         </p:blipFill>
         <p:spPr>
           <a:xfrm>
-            <a:off x="-220852" y="1876436"/>
-            <a:ext cx="6264183" cy="4900085"/>
+            <a:off x="6043331" y="1740417"/>
+            <a:ext cx="6667500" cy="5000625"/>
           </a:xfrm>
           <a:prstGeom prst="rect">
             <a:avLst/>
           </a:prstGeom>
         </p:spPr>
       </p:pic>
+      <p:sp>
+        <p:nvSpPr>
+          <p:cNvPr id="2" name="Title 1">
+            <a:extLst>
+              <a:ext uri="{FF2B5EF4-FFF2-40B4-BE49-F238E27FC236}">
+                <a16:creationId xmlns:a16="http://schemas.microsoft.com/office/drawing/2014/main" id="{44B0B01B-E3CB-4E36-9AE6-45CFD6ABC120}"/>
+              </a:ext>
+            </a:extLst>
+          </p:cNvPr>
+          <p:cNvSpPr>
+            <a:spLocks noGrp="1"/>
+          </p:cNvSpPr>
+          <p:nvPr>
+            <p:ph type="title"/>
+          </p:nvPr>
+        </p:nvSpPr>
+        <p:spPr/>
+        <p:txBody>
+          <a:bodyPr/>
+          <a:lstStyle/>
+          <a:p>
+            <a:r>
+              <a:rPr lang="es-CO" dirty="0"/>
+              <a:t>Aceleración</a:t>
+            </a:r>
+          </a:p>
+        </p:txBody>
+      </p:sp>
+      <p:sp>
+        <p:nvSpPr>
+          <p:cNvPr id="3" name="Content Placeholder 2">
+            <a:extLst>
+              <a:ext uri="{FF2B5EF4-FFF2-40B4-BE49-F238E27FC236}">
+                <a16:creationId xmlns:a16="http://schemas.microsoft.com/office/drawing/2014/main" id="{6128163C-3E79-4C3C-907B-95DA07EBE134}"/>
+              </a:ext>
+            </a:extLst>
+          </p:cNvPr>
+          <p:cNvSpPr>
+            <a:spLocks noGrp="1"/>
+          </p:cNvSpPr>
+          <p:nvPr>
+            <p:ph idx="1"/>
+          </p:nvPr>
+        </p:nvSpPr>
+        <p:spPr>
+          <a:xfrm>
+            <a:off x="811305" y="1825625"/>
+            <a:ext cx="10515600" cy="4351338"/>
+          </a:xfrm>
+        </p:spPr>
+        <p:txBody>
+          <a:bodyPr/>
+          <a:lstStyle/>
+          <a:p>
+            <a:endParaRPr lang="es-CO" dirty="0"/>
+          </a:p>
+        </p:txBody>
+      </p:sp>
       <p:pic>
         <p:nvPicPr>
-          <p:cNvPr id="17" name="Picture 16">
-            <a:extLst>
-              <a:ext uri="{FF2B5EF4-FFF2-40B4-BE49-F238E27FC236}">
-                <a16:creationId xmlns:a16="http://schemas.microsoft.com/office/drawing/2014/main" id="{CF62DD5D-4297-4B92-B291-CF3DA3A9B734}"/>
+          <p:cNvPr id="7" name="Picture 6">
+            <a:extLst>
+              <a:ext uri="{FF2B5EF4-FFF2-40B4-BE49-F238E27FC236}">
+                <a16:creationId xmlns:a16="http://schemas.microsoft.com/office/drawing/2014/main" id="{B74EA99E-AC4D-47E8-B6CE-7979D51824BE}"/>
               </a:ext>
             </a:extLst>
           </p:cNvPr>
@@ -4373,25 +3986,306 @@
           <p:nvPr/>
         </p:nvPicPr>
         <p:blipFill>
-          <a:blip r:embed="rId3"/>
+          <a:blip r:embed="rId3">
+            <a:clrChange>
+              <a:clrFrom>
+                <a:srgbClr val="FFFFFF"/>
+              </a:clrFrom>
+              <a:clrTo>
+                <a:srgbClr val="FFFFFF">
+                  <a:alpha val="0"/>
+                </a:srgbClr>
+              </a:clrTo>
+            </a:clrChange>
+          </a:blip>
           <a:stretch>
             <a:fillRect/>
           </a:stretch>
         </p:blipFill>
         <p:spPr>
           <a:xfrm>
-            <a:off x="6096000" y="1602819"/>
-            <a:ext cx="5770937" cy="5517931"/>
+            <a:off x="-69017" y="1790146"/>
+            <a:ext cx="6667500" cy="5000625"/>
           </a:xfrm>
           <a:prstGeom prst="rect">
             <a:avLst/>
           </a:prstGeom>
         </p:spPr>
       </p:pic>
+      <p:sp>
+        <p:nvSpPr>
+          <p:cNvPr id="8" name="TextBox 7">
+            <a:extLst>
+              <a:ext uri="{FF2B5EF4-FFF2-40B4-BE49-F238E27FC236}">
+                <a16:creationId xmlns:a16="http://schemas.microsoft.com/office/drawing/2014/main" id="{E96FD121-2453-422D-8E2F-DDEE578F8870}"/>
+              </a:ext>
+            </a:extLst>
+          </p:cNvPr>
+          <p:cNvSpPr txBox="1"/>
+          <p:nvPr/>
+        </p:nvSpPr>
+        <p:spPr>
+          <a:xfrm>
+            <a:off x="3218330" y="1640959"/>
+            <a:ext cx="1042273" cy="369332"/>
+          </a:xfrm>
+          <a:prstGeom prst="rect">
+            <a:avLst/>
+          </a:prstGeom>
+          <a:noFill/>
+        </p:spPr>
+        <p:txBody>
+          <a:bodyPr wrap="none" rtlCol="0">
+            <a:spAutoFit/>
+          </a:bodyPr>
+          <a:lstStyle/>
+          <a:p>
+            <a:r>
+              <a:rPr lang="es-CO" dirty="0"/>
+              <a:t>Bus 4012</a:t>
+            </a:r>
+          </a:p>
+        </p:txBody>
+      </p:sp>
+      <p:sp>
+        <p:nvSpPr>
+          <p:cNvPr id="9" name="TextBox 8">
+            <a:extLst>
+              <a:ext uri="{FF2B5EF4-FFF2-40B4-BE49-F238E27FC236}">
+                <a16:creationId xmlns:a16="http://schemas.microsoft.com/office/drawing/2014/main" id="{DAA6E8B6-5056-4F40-89FD-F6F0A4121228}"/>
+              </a:ext>
+            </a:extLst>
+          </p:cNvPr>
+          <p:cNvSpPr txBox="1"/>
+          <p:nvPr/>
+        </p:nvSpPr>
+        <p:spPr>
+          <a:xfrm>
+            <a:off x="8814485" y="1640959"/>
+            <a:ext cx="1042273" cy="369332"/>
+          </a:xfrm>
+          <a:prstGeom prst="rect">
+            <a:avLst/>
+          </a:prstGeom>
+          <a:noFill/>
+        </p:spPr>
+        <p:txBody>
+          <a:bodyPr wrap="none" rtlCol="0">
+            <a:spAutoFit/>
+          </a:bodyPr>
+          <a:lstStyle/>
+          <a:p>
+            <a:r>
+              <a:rPr lang="es-CO" dirty="0"/>
+              <a:t>Bus 4025</a:t>
+            </a:r>
+          </a:p>
+        </p:txBody>
+      </p:sp>
+      <p:sp>
+        <p:nvSpPr>
+          <p:cNvPr id="12" name="TextBox 11">
+            <a:extLst>
+              <a:ext uri="{FF2B5EF4-FFF2-40B4-BE49-F238E27FC236}">
+                <a16:creationId xmlns:a16="http://schemas.microsoft.com/office/drawing/2014/main" id="{9401F842-71F5-4EBE-8380-74993E26472F}"/>
+              </a:ext>
+            </a:extLst>
+          </p:cNvPr>
+          <p:cNvSpPr txBox="1"/>
+          <p:nvPr/>
+        </p:nvSpPr>
+        <p:spPr>
+          <a:xfrm>
+            <a:off x="4910667" y="144520"/>
+            <a:ext cx="6985000" cy="1785104"/>
+          </a:xfrm>
+          <a:prstGeom prst="rect">
+            <a:avLst/>
+          </a:prstGeom>
+          <a:noFill/>
+        </p:spPr>
+        <p:txBody>
+          <a:bodyPr wrap="square" rtlCol="0">
+            <a:spAutoFit/>
+          </a:bodyPr>
+          <a:lstStyle/>
+          <a:p>
+            <a:r>
+              <a:rPr lang="es-CO" sz="1100" dirty="0"/>
+              <a:t>Por lo anterior, cualquier evaluación sobre los indicadores de aceleración debe hacer por cada uno de los dos únicos buses donde hay información el sexo: el 4012 (el brusco) y el 4025.</a:t>
+            </a:r>
+          </a:p>
+          <a:p>
+            <a:endParaRPr lang="es-CO" sz="1100" dirty="0"/>
+          </a:p>
+          <a:p>
+            <a:r>
+              <a:rPr lang="es-CO" sz="1100" dirty="0"/>
+              <a:t>La matriz de correlación no muestra mayores indicios sobre patrones entre sexos.</a:t>
+            </a:r>
+          </a:p>
+          <a:p>
+            <a:r>
+              <a:rPr lang="es-CO" sz="1100" b="1" dirty="0"/>
+              <a:t>Se repite en los dos buses:</a:t>
+            </a:r>
+          </a:p>
+          <a:p>
+            <a:pPr marL="171450" indent="-171450">
+              <a:buFont typeface="Arial" panose="020B0604020202020204" pitchFamily="34" charset="0"/>
+              <a:buChar char="•"/>
+            </a:pPr>
+            <a:r>
+              <a:rPr lang="es-CO" sz="1100" dirty="0"/>
+              <a:t>Correlación positiva: </a:t>
+            </a:r>
+            <a:r>
+              <a:rPr lang="es-CO" sz="1100" dirty="0" err="1"/>
+              <a:t>Mag</a:t>
+            </a:r>
+            <a:r>
+              <a:rPr lang="es-CO" sz="1100" dirty="0"/>
+              <a:t> Aceleraciones con </a:t>
+            </a:r>
+            <a:r>
+              <a:rPr lang="es-CO" sz="1100" dirty="0" err="1"/>
+              <a:t>Mag</a:t>
+            </a:r>
+            <a:r>
+              <a:rPr lang="es-CO" sz="1100" dirty="0"/>
+              <a:t> frenadas</a:t>
+            </a:r>
+          </a:p>
+          <a:p>
+            <a:pPr marL="171450" indent="-171450">
+              <a:buFont typeface="Arial" panose="020B0604020202020204" pitchFamily="34" charset="0"/>
+              <a:buChar char="•"/>
+            </a:pPr>
+            <a:r>
+              <a:rPr lang="es-CO" sz="1100" dirty="0"/>
+              <a:t>Correlación Alta positiva: </a:t>
+            </a:r>
+            <a:r>
+              <a:rPr lang="es-CO" sz="1100" dirty="0" err="1"/>
+              <a:t>Dur</a:t>
+            </a:r>
+            <a:r>
+              <a:rPr lang="es-CO" sz="1100" dirty="0"/>
+              <a:t> Aceleraciones con </a:t>
+            </a:r>
+            <a:r>
+              <a:rPr lang="es-CO" sz="1100" dirty="0" err="1"/>
+              <a:t>Dur</a:t>
+            </a:r>
+            <a:r>
+              <a:rPr lang="es-CO" sz="1100" dirty="0"/>
+              <a:t> frenadas</a:t>
+            </a:r>
+          </a:p>
+          <a:p>
+            <a:pPr marL="171450" indent="-171450">
+              <a:buFont typeface="Arial" panose="020B0604020202020204" pitchFamily="34" charset="0"/>
+              <a:buChar char="•"/>
+            </a:pPr>
+            <a:r>
+              <a:rPr lang="es-CO" sz="1100" dirty="0"/>
+              <a:t>Correlación Alta positiva: Ace/km con </a:t>
+            </a:r>
+            <a:r>
+              <a:rPr lang="es-CO" sz="1100" dirty="0" err="1"/>
+              <a:t>fre</a:t>
+            </a:r>
+            <a:r>
+              <a:rPr lang="es-CO" sz="1100" dirty="0"/>
+              <a:t>/km</a:t>
+            </a:r>
+          </a:p>
+          <a:p>
+            <a:pPr marL="171450" indent="-171450">
+              <a:buFont typeface="Arial" panose="020B0604020202020204" pitchFamily="34" charset="0"/>
+              <a:buChar char="•"/>
+            </a:pPr>
+            <a:r>
+              <a:rPr lang="es-CO" sz="1100" dirty="0"/>
+              <a:t>Correlación negativa: </a:t>
+            </a:r>
+            <a:r>
+              <a:rPr lang="es-CO" sz="1100" dirty="0" err="1"/>
+              <a:t>fre</a:t>
+            </a:r>
+            <a:r>
+              <a:rPr lang="es-CO" sz="1100" dirty="0"/>
+              <a:t>/km con duraciones</a:t>
+            </a:r>
+          </a:p>
+          <a:p>
+            <a:pPr marL="171450" indent="-171450">
+              <a:buFont typeface="Arial" panose="020B0604020202020204" pitchFamily="34" charset="0"/>
+              <a:buChar char="•"/>
+            </a:pPr>
+            <a:r>
+              <a:rPr lang="es-CO" sz="1100" dirty="0"/>
+              <a:t>Correlación negativa: Ace/km con duraciones</a:t>
+            </a:r>
+          </a:p>
+        </p:txBody>
+      </p:sp>
+      <p:sp>
+        <p:nvSpPr>
+          <p:cNvPr id="16" name="Rectangle 15">
+            <a:extLst>
+              <a:ext uri="{FF2B5EF4-FFF2-40B4-BE49-F238E27FC236}">
+                <a16:creationId xmlns:a16="http://schemas.microsoft.com/office/drawing/2014/main" id="{AEE4E399-CCED-419E-9EF0-960EA2B23896}"/>
+              </a:ext>
+            </a:extLst>
+          </p:cNvPr>
+          <p:cNvSpPr/>
+          <p:nvPr/>
+        </p:nvSpPr>
+        <p:spPr>
+          <a:xfrm>
+            <a:off x="10142481" y="5126311"/>
+            <a:ext cx="683173" cy="580806"/>
+          </a:xfrm>
+          <a:prstGeom prst="rect">
+            <a:avLst/>
+          </a:prstGeom>
+          <a:noFill/>
+          <a:ln w="38100">
+            <a:solidFill>
+              <a:srgbClr val="FFC000"/>
+            </a:solidFill>
+          </a:ln>
+        </p:spPr>
+        <p:style>
+          <a:lnRef idx="2">
+            <a:schemeClr val="accent1">
+              <a:shade val="50000"/>
+            </a:schemeClr>
+          </a:lnRef>
+          <a:fillRef idx="1">
+            <a:schemeClr val="accent1"/>
+          </a:fillRef>
+          <a:effectRef idx="0">
+            <a:schemeClr val="accent1"/>
+          </a:effectRef>
+          <a:fontRef idx="minor">
+            <a:schemeClr val="lt1"/>
+          </a:fontRef>
+        </p:style>
+        <p:txBody>
+          <a:bodyPr rtlCol="0" anchor="ctr"/>
+          <a:lstStyle/>
+          <a:p>
+            <a:pPr algn="ctr"/>
+            <a:endParaRPr lang="es-CO"/>
+          </a:p>
+        </p:txBody>
+      </p:sp>
     </p:spTree>
     <p:extLst>
       <p:ext uri="{BB962C8B-B14F-4D97-AF65-F5344CB8AC3E}">
-        <p14:creationId xmlns:p14="http://schemas.microsoft.com/office/powerpoint/2010/main" val="1664484253"/>
+        <p14:creationId xmlns:p14="http://schemas.microsoft.com/office/powerpoint/2010/main" val="2209058227"/>
       </p:ext>
     </p:extLst>
   </p:cSld>
@@ -4448,40 +4342,10 @@
       </p:sp>
       <p:sp>
         <p:nvSpPr>
-          <p:cNvPr id="3" name="Content Placeholder 2">
-            <a:extLst>
-              <a:ext uri="{FF2B5EF4-FFF2-40B4-BE49-F238E27FC236}">
-                <a16:creationId xmlns:a16="http://schemas.microsoft.com/office/drawing/2014/main" id="{6128163C-3E79-4C3C-907B-95DA07EBE134}"/>
-              </a:ext>
-            </a:extLst>
-          </p:cNvPr>
-          <p:cNvSpPr>
-            <a:spLocks noGrp="1"/>
-          </p:cNvSpPr>
-          <p:nvPr>
-            <p:ph idx="1"/>
-          </p:nvPr>
-        </p:nvSpPr>
-        <p:spPr>
-          <a:xfrm>
-            <a:off x="811305" y="1825625"/>
-            <a:ext cx="10515600" cy="4351338"/>
-          </a:xfrm>
-        </p:spPr>
-        <p:txBody>
-          <a:bodyPr/>
-          <a:lstStyle/>
-          <a:p>
-            <a:endParaRPr lang="es-CO" dirty="0"/>
-          </a:p>
-        </p:txBody>
-      </p:sp>
-      <p:sp>
-        <p:nvSpPr>
-          <p:cNvPr id="12" name="TextBox 11">
-            <a:extLst>
-              <a:ext uri="{FF2B5EF4-FFF2-40B4-BE49-F238E27FC236}">
-                <a16:creationId xmlns:a16="http://schemas.microsoft.com/office/drawing/2014/main" id="{9401F842-71F5-4EBE-8380-74993E26472F}"/>
+          <p:cNvPr id="8" name="TextBox 7">
+            <a:extLst>
+              <a:ext uri="{FF2B5EF4-FFF2-40B4-BE49-F238E27FC236}">
+                <a16:creationId xmlns:a16="http://schemas.microsoft.com/office/drawing/2014/main" id="{E96FD121-2453-422D-8E2F-DDEE578F8870}"/>
               </a:ext>
             </a:extLst>
           </p:cNvPr>
@@ -4490,8 +4354,8 @@
         </p:nvSpPr>
         <p:spPr>
           <a:xfrm>
-            <a:off x="4910667" y="228600"/>
-            <a:ext cx="6985000" cy="1169551"/>
+            <a:off x="3218330" y="1640959"/>
+            <a:ext cx="1042273" cy="369332"/>
           </a:xfrm>
           <a:prstGeom prst="rect">
             <a:avLst/>
@@ -4499,6 +4363,76 @@
           <a:noFill/>
         </p:spPr>
         <p:txBody>
+          <a:bodyPr wrap="none" rtlCol="0">
+            <a:spAutoFit/>
+          </a:bodyPr>
+          <a:lstStyle/>
+          <a:p>
+            <a:r>
+              <a:rPr lang="es-CO" dirty="0"/>
+              <a:t>Bus 4012</a:t>
+            </a:r>
+          </a:p>
+        </p:txBody>
+      </p:sp>
+      <p:sp>
+        <p:nvSpPr>
+          <p:cNvPr id="9" name="TextBox 8">
+            <a:extLst>
+              <a:ext uri="{FF2B5EF4-FFF2-40B4-BE49-F238E27FC236}">
+                <a16:creationId xmlns:a16="http://schemas.microsoft.com/office/drawing/2014/main" id="{DAA6E8B6-5056-4F40-89FD-F6F0A4121228}"/>
+              </a:ext>
+            </a:extLst>
+          </p:cNvPr>
+          <p:cNvSpPr txBox="1"/>
+          <p:nvPr/>
+        </p:nvSpPr>
+        <p:spPr>
+          <a:xfrm>
+            <a:off x="8814485" y="1640959"/>
+            <a:ext cx="1042273" cy="369332"/>
+          </a:xfrm>
+          <a:prstGeom prst="rect">
+            <a:avLst/>
+          </a:prstGeom>
+          <a:noFill/>
+        </p:spPr>
+        <p:txBody>
+          <a:bodyPr wrap="none" rtlCol="0">
+            <a:spAutoFit/>
+          </a:bodyPr>
+          <a:lstStyle/>
+          <a:p>
+            <a:r>
+              <a:rPr lang="es-CO" dirty="0"/>
+              <a:t>Bus 4025</a:t>
+            </a:r>
+          </a:p>
+        </p:txBody>
+      </p:sp>
+      <p:sp>
+        <p:nvSpPr>
+          <p:cNvPr id="12" name="TextBox 11">
+            <a:extLst>
+              <a:ext uri="{FF2B5EF4-FFF2-40B4-BE49-F238E27FC236}">
+                <a16:creationId xmlns:a16="http://schemas.microsoft.com/office/drawing/2014/main" id="{9401F842-71F5-4EBE-8380-74993E26472F}"/>
+              </a:ext>
+            </a:extLst>
+          </p:cNvPr>
+          <p:cNvSpPr txBox="1"/>
+          <p:nvPr/>
+        </p:nvSpPr>
+        <p:spPr>
+          <a:xfrm>
+            <a:off x="4910667" y="228600"/>
+            <a:ext cx="6985000" cy="1384995"/>
+          </a:xfrm>
+          <a:prstGeom prst="rect">
+            <a:avLst/>
+          </a:prstGeom>
+          <a:noFill/>
+        </p:spPr>
+        <p:txBody>
           <a:bodyPr wrap="square" rtlCol="0">
             <a:spAutoFit/>
           </a:bodyPr>
@@ -4506,6 +4440,247 @@
           <a:p>
             <a:r>
               <a:rPr lang="es-CO" sz="1400" dirty="0"/>
+              <a:t>El bus 4012 (brusco) recorre principalmente la HA617</a:t>
+            </a:r>
+          </a:p>
+          <a:p>
+            <a:r>
+              <a:rPr lang="es-CO" sz="1400" dirty="0"/>
+              <a:t>El bus 4025 recorre principalmente la HL613</a:t>
+            </a:r>
+          </a:p>
+          <a:p>
+            <a:endParaRPr lang="es-CO" sz="1400" dirty="0"/>
+          </a:p>
+          <a:p>
+            <a:r>
+              <a:rPr lang="es-CO" sz="1400" dirty="0"/>
+              <a:t>Aunque hay más hombres “suaves” en 4025 o más mujeres “suaves” en 4012, no aparece ningún patrón claro aquí... las posiciones en esta nube de datos están asociadas al Conductor... (</a:t>
+            </a:r>
+            <a:r>
+              <a:rPr lang="es-CO" sz="1400" dirty="0" err="1"/>
+              <a:t>CondID</a:t>
+            </a:r>
+            <a:r>
+              <a:rPr lang="es-CO" sz="1400" dirty="0"/>
+              <a:t>)</a:t>
+            </a:r>
+          </a:p>
+        </p:txBody>
+      </p:sp>
+      <p:pic>
+        <p:nvPicPr>
+          <p:cNvPr id="14" name="Picture 13">
+            <a:extLst>
+              <a:ext uri="{FF2B5EF4-FFF2-40B4-BE49-F238E27FC236}">
+                <a16:creationId xmlns:a16="http://schemas.microsoft.com/office/drawing/2014/main" id="{C4EB91E2-A2EE-4131-A7A0-F097C66B2057}"/>
+              </a:ext>
+            </a:extLst>
+          </p:cNvPr>
+          <p:cNvPicPr>
+            <a:picLocks noChangeAspect="1"/>
+          </p:cNvPicPr>
+          <p:nvPr/>
+        </p:nvPicPr>
+        <p:blipFill>
+          <a:blip r:embed="rId2"/>
+          <a:stretch>
+            <a:fillRect/>
+          </a:stretch>
+        </p:blipFill>
+        <p:spPr>
+          <a:xfrm>
+            <a:off x="717398" y="1790146"/>
+            <a:ext cx="5243014" cy="5852667"/>
+          </a:xfrm>
+          <a:prstGeom prst="rect">
+            <a:avLst/>
+          </a:prstGeom>
+        </p:spPr>
+      </p:pic>
+      <p:pic>
+        <p:nvPicPr>
+          <p:cNvPr id="5" name="Picture 4">
+            <a:extLst>
+              <a:ext uri="{FF2B5EF4-FFF2-40B4-BE49-F238E27FC236}">
+                <a16:creationId xmlns:a16="http://schemas.microsoft.com/office/drawing/2014/main" id="{6D072FE5-6B37-449D-BC49-D745A580CF1C}"/>
+              </a:ext>
+            </a:extLst>
+          </p:cNvPr>
+          <p:cNvPicPr>
+            <a:picLocks noChangeAspect="1"/>
+          </p:cNvPicPr>
+          <p:nvPr/>
+        </p:nvPicPr>
+        <p:blipFill>
+          <a:blip r:embed="rId3"/>
+          <a:stretch>
+            <a:fillRect/>
+          </a:stretch>
+        </p:blipFill>
+        <p:spPr>
+          <a:xfrm>
+            <a:off x="2627586" y="5153147"/>
+            <a:ext cx="3852111" cy="2679456"/>
+          </a:xfrm>
+          <a:prstGeom prst="rect">
+            <a:avLst/>
+          </a:prstGeom>
+        </p:spPr>
+      </p:pic>
+      <p:pic>
+        <p:nvPicPr>
+          <p:cNvPr id="10" name="Picture 9">
+            <a:extLst>
+              <a:ext uri="{FF2B5EF4-FFF2-40B4-BE49-F238E27FC236}">
+                <a16:creationId xmlns:a16="http://schemas.microsoft.com/office/drawing/2014/main" id="{3CCBB73A-1BE6-4D26-A2EF-B39BD9CA319A}"/>
+              </a:ext>
+            </a:extLst>
+          </p:cNvPr>
+          <p:cNvPicPr>
+            <a:picLocks noChangeAspect="1"/>
+          </p:cNvPicPr>
+          <p:nvPr/>
+        </p:nvPicPr>
+        <p:blipFill>
+          <a:blip r:embed="rId4"/>
+          <a:stretch>
+            <a:fillRect/>
+          </a:stretch>
+        </p:blipFill>
+        <p:spPr>
+          <a:xfrm>
+            <a:off x="6896548" y="1432625"/>
+            <a:ext cx="5122320" cy="4897750"/>
+          </a:xfrm>
+          <a:prstGeom prst="rect">
+            <a:avLst/>
+          </a:prstGeom>
+        </p:spPr>
+      </p:pic>
+    </p:spTree>
+    <p:extLst>
+      <p:ext uri="{BB962C8B-B14F-4D97-AF65-F5344CB8AC3E}">
+        <p14:creationId xmlns:p14="http://schemas.microsoft.com/office/powerpoint/2010/main" val="466185757"/>
+      </p:ext>
+    </p:extLst>
+  </p:cSld>
+  <p:clrMapOvr>
+    <a:masterClrMapping/>
+  </p:clrMapOvr>
+</p:sld>
+</file>
+
+<file path=ppt/slides/slide14.xml><?xml version="1.0" encoding="utf-8"?>
+<p:sld xmlns:a="http://schemas.openxmlformats.org/drawingml/2006/main" xmlns:r="http://schemas.openxmlformats.org/officeDocument/2006/relationships" xmlns:p="http://schemas.openxmlformats.org/presentationml/2006/main">
+  <p:cSld>
+    <p:spTree>
+      <p:nvGrpSpPr>
+        <p:cNvPr id="1" name=""/>
+        <p:cNvGrpSpPr/>
+        <p:nvPr/>
+      </p:nvGrpSpPr>
+      <p:grpSpPr>
+        <a:xfrm>
+          <a:off x="0" y="0"/>
+          <a:ext cx="0" cy="0"/>
+          <a:chOff x="0" y="0"/>
+          <a:chExt cx="0" cy="0"/>
+        </a:xfrm>
+      </p:grpSpPr>
+      <p:sp>
+        <p:nvSpPr>
+          <p:cNvPr id="2" name="Title 1">
+            <a:extLst>
+              <a:ext uri="{FF2B5EF4-FFF2-40B4-BE49-F238E27FC236}">
+                <a16:creationId xmlns:a16="http://schemas.microsoft.com/office/drawing/2014/main" id="{44B0B01B-E3CB-4E36-9AE6-45CFD6ABC120}"/>
+              </a:ext>
+            </a:extLst>
+          </p:cNvPr>
+          <p:cNvSpPr>
+            <a:spLocks noGrp="1"/>
+          </p:cNvSpPr>
+          <p:nvPr>
+            <p:ph type="title"/>
+          </p:nvPr>
+        </p:nvSpPr>
+        <p:spPr/>
+        <p:txBody>
+          <a:bodyPr/>
+          <a:lstStyle/>
+          <a:p>
+            <a:r>
+              <a:rPr lang="es-CO" dirty="0"/>
+              <a:t>Aceleración</a:t>
+            </a:r>
+          </a:p>
+        </p:txBody>
+      </p:sp>
+      <p:sp>
+        <p:nvSpPr>
+          <p:cNvPr id="9" name="TextBox 8">
+            <a:extLst>
+              <a:ext uri="{FF2B5EF4-FFF2-40B4-BE49-F238E27FC236}">
+                <a16:creationId xmlns:a16="http://schemas.microsoft.com/office/drawing/2014/main" id="{DAA6E8B6-5056-4F40-89FD-F6F0A4121228}"/>
+              </a:ext>
+            </a:extLst>
+          </p:cNvPr>
+          <p:cNvSpPr txBox="1"/>
+          <p:nvPr/>
+        </p:nvSpPr>
+        <p:spPr>
+          <a:xfrm>
+            <a:off x="8814485" y="1640959"/>
+            <a:ext cx="1042273" cy="369332"/>
+          </a:xfrm>
+          <a:prstGeom prst="rect">
+            <a:avLst/>
+          </a:prstGeom>
+          <a:noFill/>
+        </p:spPr>
+        <p:txBody>
+          <a:bodyPr wrap="none" rtlCol="0">
+            <a:spAutoFit/>
+          </a:bodyPr>
+          <a:lstStyle/>
+          <a:p>
+            <a:r>
+              <a:rPr lang="es-CO" dirty="0"/>
+              <a:t>Bus 4025</a:t>
+            </a:r>
+          </a:p>
+        </p:txBody>
+      </p:sp>
+      <p:sp>
+        <p:nvSpPr>
+          <p:cNvPr id="12" name="TextBox 11">
+            <a:extLst>
+              <a:ext uri="{FF2B5EF4-FFF2-40B4-BE49-F238E27FC236}">
+                <a16:creationId xmlns:a16="http://schemas.microsoft.com/office/drawing/2014/main" id="{9401F842-71F5-4EBE-8380-74993E26472F}"/>
+              </a:ext>
+            </a:extLst>
+          </p:cNvPr>
+          <p:cNvSpPr txBox="1"/>
+          <p:nvPr/>
+        </p:nvSpPr>
+        <p:spPr>
+          <a:xfrm>
+            <a:off x="4910667" y="228600"/>
+            <a:ext cx="6985000" cy="1384995"/>
+          </a:xfrm>
+          <a:prstGeom prst="rect">
+            <a:avLst/>
+          </a:prstGeom>
+          <a:noFill/>
+        </p:spPr>
+        <p:txBody>
+          <a:bodyPr wrap="square" rtlCol="0">
+            <a:spAutoFit/>
+          </a:bodyPr>
+          <a:lstStyle/>
+          <a:p>
+            <a:r>
+              <a:rPr lang="es-CO" sz="1400" dirty="0"/>
               <a:t>En el 4012 y 4025 solo hay 2 </a:t>
             </a:r>
             <a:r>
@@ -4514,7 +4689,7 @@
             </a:r>
             <a:r>
               <a:rPr lang="es-CO" sz="1400" dirty="0"/>
-              <a:t> de Ms repetidos, el 599 (</a:t>
+              <a:t> de Hs repetidos, el 168 (</a:t>
             </a:r>
             <a:r>
               <a:rPr lang="es-CO" sz="1400" dirty="0" err="1"/>
@@ -4522,12 +4697,236 @@
             </a:r>
             <a:r>
               <a:rPr lang="es-CO" sz="1400" dirty="0"/>
-              <a:t>) y el 644 (x): no se conserva ninguna de las dos variables con estos dos </a:t>
+              <a:t>) y el 730 (x): AMBOS CONSERVAN EL PROMEDIO DEL # FRE/KM, pero cambian la duración de la frenada, mayor en el 4025 en ambos casos.</a:t>
+            </a:r>
+          </a:p>
+          <a:p>
+            <a:endParaRPr lang="es-CO" sz="1400" dirty="0"/>
+          </a:p>
+          <a:p>
+            <a:r>
+              <a:rPr lang="es-CO" sz="1400" dirty="0"/>
+              <a:t>Todos los </a:t>
+            </a:r>
+            <a:r>
+              <a:rPr lang="es-CO" sz="1400" dirty="0" err="1"/>
+              <a:t>CondID</a:t>
+            </a:r>
+            <a:r>
+              <a:rPr lang="es-CO" sz="1400" dirty="0"/>
+              <a:t> forman </a:t>
+            </a:r>
+            <a:r>
+              <a:rPr lang="es-CO" sz="1400" dirty="0" err="1"/>
+              <a:t>clusters</a:t>
+            </a:r>
+            <a:r>
+              <a:rPr lang="es-CO" sz="1400" dirty="0"/>
+              <a:t> cercanos! (Cada conductor tiene una huella digital de su patrón de conducción)</a:t>
+            </a:r>
+          </a:p>
+        </p:txBody>
+      </p:sp>
+      <p:pic>
+        <p:nvPicPr>
+          <p:cNvPr id="6" name="Picture 5">
+            <a:extLst>
+              <a:ext uri="{FF2B5EF4-FFF2-40B4-BE49-F238E27FC236}">
+                <a16:creationId xmlns:a16="http://schemas.microsoft.com/office/drawing/2014/main" id="{7EF67583-FCD5-4B10-8A7A-AD63D1C08E41}"/>
+              </a:ext>
+            </a:extLst>
+          </p:cNvPr>
+          <p:cNvPicPr>
+            <a:picLocks noChangeAspect="1"/>
+          </p:cNvPicPr>
+          <p:nvPr/>
+        </p:nvPicPr>
+        <p:blipFill>
+          <a:blip r:embed="rId2"/>
+          <a:stretch>
+            <a:fillRect/>
+          </a:stretch>
+        </p:blipFill>
+        <p:spPr>
+          <a:xfrm>
+            <a:off x="-220852" y="1876436"/>
+            <a:ext cx="6264183" cy="4900085"/>
+          </a:xfrm>
+          <a:prstGeom prst="rect">
+            <a:avLst/>
+          </a:prstGeom>
+        </p:spPr>
+      </p:pic>
+      <p:pic>
+        <p:nvPicPr>
+          <p:cNvPr id="17" name="Picture 16">
+            <a:extLst>
+              <a:ext uri="{FF2B5EF4-FFF2-40B4-BE49-F238E27FC236}">
+                <a16:creationId xmlns:a16="http://schemas.microsoft.com/office/drawing/2014/main" id="{CF62DD5D-4297-4B92-B291-CF3DA3A9B734}"/>
+              </a:ext>
+            </a:extLst>
+          </p:cNvPr>
+          <p:cNvPicPr>
+            <a:picLocks noChangeAspect="1"/>
+          </p:cNvPicPr>
+          <p:nvPr/>
+        </p:nvPicPr>
+        <p:blipFill>
+          <a:blip r:embed="rId3"/>
+          <a:stretch>
+            <a:fillRect/>
+          </a:stretch>
+        </p:blipFill>
+        <p:spPr>
+          <a:xfrm>
+            <a:off x="6096000" y="1602819"/>
+            <a:ext cx="5770937" cy="5517931"/>
+          </a:xfrm>
+          <a:prstGeom prst="rect">
+            <a:avLst/>
+          </a:prstGeom>
+        </p:spPr>
+      </p:pic>
+    </p:spTree>
+    <p:extLst>
+      <p:ext uri="{BB962C8B-B14F-4D97-AF65-F5344CB8AC3E}">
+        <p14:creationId xmlns:p14="http://schemas.microsoft.com/office/powerpoint/2010/main" val="1664484253"/>
+      </p:ext>
+    </p:extLst>
+  </p:cSld>
+  <p:clrMapOvr>
+    <a:masterClrMapping/>
+  </p:clrMapOvr>
+</p:sld>
+</file>
+
+<file path=ppt/slides/slide15.xml><?xml version="1.0" encoding="utf-8"?>
+<p:sld xmlns:a="http://schemas.openxmlformats.org/drawingml/2006/main" xmlns:r="http://schemas.openxmlformats.org/officeDocument/2006/relationships" xmlns:p="http://schemas.openxmlformats.org/presentationml/2006/main">
+  <p:cSld>
+    <p:spTree>
+      <p:nvGrpSpPr>
+        <p:cNvPr id="1" name=""/>
+        <p:cNvGrpSpPr/>
+        <p:nvPr/>
+      </p:nvGrpSpPr>
+      <p:grpSpPr>
+        <a:xfrm>
+          <a:off x="0" y="0"/>
+          <a:ext cx="0" cy="0"/>
+          <a:chOff x="0" y="0"/>
+          <a:chExt cx="0" cy="0"/>
+        </a:xfrm>
+      </p:grpSpPr>
+      <p:sp>
+        <p:nvSpPr>
+          <p:cNvPr id="2" name="Title 1">
+            <a:extLst>
+              <a:ext uri="{FF2B5EF4-FFF2-40B4-BE49-F238E27FC236}">
+                <a16:creationId xmlns:a16="http://schemas.microsoft.com/office/drawing/2014/main" id="{44B0B01B-E3CB-4E36-9AE6-45CFD6ABC120}"/>
+              </a:ext>
+            </a:extLst>
+          </p:cNvPr>
+          <p:cNvSpPr>
+            <a:spLocks noGrp="1"/>
+          </p:cNvSpPr>
+          <p:nvPr>
+            <p:ph type="title"/>
+          </p:nvPr>
+        </p:nvSpPr>
+        <p:spPr/>
+        <p:txBody>
+          <a:bodyPr/>
+          <a:lstStyle/>
+          <a:p>
+            <a:r>
+              <a:rPr lang="es-CO" dirty="0"/>
+              <a:t>Aceleración</a:t>
+            </a:r>
+          </a:p>
+        </p:txBody>
+      </p:sp>
+      <p:sp>
+        <p:nvSpPr>
+          <p:cNvPr id="3" name="Content Placeholder 2">
+            <a:extLst>
+              <a:ext uri="{FF2B5EF4-FFF2-40B4-BE49-F238E27FC236}">
+                <a16:creationId xmlns:a16="http://schemas.microsoft.com/office/drawing/2014/main" id="{6128163C-3E79-4C3C-907B-95DA07EBE134}"/>
+              </a:ext>
+            </a:extLst>
+          </p:cNvPr>
+          <p:cNvSpPr>
+            <a:spLocks noGrp="1"/>
+          </p:cNvSpPr>
+          <p:nvPr>
+            <p:ph idx="1"/>
+          </p:nvPr>
+        </p:nvSpPr>
+        <p:spPr>
+          <a:xfrm>
+            <a:off x="811305" y="1825625"/>
+            <a:ext cx="10515600" cy="4351338"/>
+          </a:xfrm>
+        </p:spPr>
+        <p:txBody>
+          <a:bodyPr/>
+          <a:lstStyle/>
+          <a:p>
+            <a:endParaRPr lang="es-CO" dirty="0"/>
+          </a:p>
+        </p:txBody>
+      </p:sp>
+      <p:sp>
+        <p:nvSpPr>
+          <p:cNvPr id="12" name="TextBox 11">
+            <a:extLst>
+              <a:ext uri="{FF2B5EF4-FFF2-40B4-BE49-F238E27FC236}">
+                <a16:creationId xmlns:a16="http://schemas.microsoft.com/office/drawing/2014/main" id="{9401F842-71F5-4EBE-8380-74993E26472F}"/>
+              </a:ext>
+            </a:extLst>
+          </p:cNvPr>
+          <p:cNvSpPr txBox="1"/>
+          <p:nvPr/>
+        </p:nvSpPr>
+        <p:spPr>
+          <a:xfrm>
+            <a:off x="4910667" y="228600"/>
+            <a:ext cx="6985000" cy="1169551"/>
+          </a:xfrm>
+          <a:prstGeom prst="rect">
+            <a:avLst/>
+          </a:prstGeom>
+          <a:noFill/>
+        </p:spPr>
+        <p:txBody>
+          <a:bodyPr wrap="square" rtlCol="0">
+            <a:spAutoFit/>
+          </a:bodyPr>
+          <a:lstStyle/>
+          <a:p>
+            <a:r>
+              <a:rPr lang="es-CO" sz="1400" dirty="0"/>
+              <a:t>En el 4012 y 4025 solo hay 2 </a:t>
             </a:r>
             <a:r>
               <a:rPr lang="es-CO" sz="1400" dirty="0" err="1"/>
               <a:t>IDs</a:t>
             </a:r>
+            <a:r>
+              <a:rPr lang="es-CO" sz="1400" dirty="0"/>
+              <a:t> de Ms repetidos, el 599 (</a:t>
+            </a:r>
+            <a:r>
+              <a:rPr lang="es-CO" sz="1400" dirty="0" err="1"/>
+              <a:t>star</a:t>
+            </a:r>
+            <a:r>
+              <a:rPr lang="es-CO" sz="1400" dirty="0"/>
+              <a:t>) y el 644 (x): no se conserva ninguna de las dos variables con estos dos </a:t>
+            </a:r>
+            <a:r>
+              <a:rPr lang="es-CO" sz="1400" dirty="0" err="1"/>
+              <a:t>IDs</a:t>
+            </a:r>
             <a:endParaRPr lang="es-CO" sz="1400" dirty="0"/>
           </a:p>
           <a:p>
@@ -4540,7 +4939,7 @@
             </a:r>
             <a:r>
               <a:rPr lang="es-CO" sz="1400" dirty="0" err="1"/>
-              <a:t>ConID</a:t>
+              <a:t>CondID</a:t>
             </a:r>
             <a:r>
               <a:rPr lang="es-CO" sz="1400" dirty="0"/>
@@ -4556,7 +4955,7 @@
             </a:r>
             <a:r>
               <a:rPr lang="es-CO" sz="1400" dirty="0" err="1"/>
-              <a:t>ConID</a:t>
+              <a:t>CondID</a:t>
             </a:r>
             <a:r>
               <a:rPr lang="es-CO" sz="1400" dirty="0"/>
@@ -4679,7 +5078,7 @@
 </p:sld>
 </file>
 
-<file path=ppt/slides/slide14.xml><?xml version="1.0" encoding="utf-8"?>
+<file path=ppt/slides/slide16.xml><?xml version="1.0" encoding="utf-8"?>
 <p:sld xmlns:a="http://schemas.openxmlformats.org/drawingml/2006/main" xmlns:r="http://schemas.openxmlformats.org/officeDocument/2006/relationships" xmlns:p="http://schemas.openxmlformats.org/presentationml/2006/main">
   <p:cSld>
     <p:spTree>
@@ -4866,7 +5265,7 @@
                 </a:r>
                 <a:r>
                   <a:rPr lang="es-CO" sz="1400" b="1" dirty="0"/>
-                  <a:t>-/km se explica por los </a:t>
+                  <a:t>-/km se explican por los </a:t>
                 </a:r>
                 <a:r>
                   <a:rPr lang="es-CO" sz="1400" b="1" dirty="0" err="1"/>
@@ -5001,7 +5400,7 @@
 </p:sld>
 </file>
 
-<file path=ppt/slides/slide15.xml><?xml version="1.0" encoding="utf-8"?>
+<file path=ppt/slides/slide17.xml><?xml version="1.0" encoding="utf-8"?>
 <p:sld xmlns:a="http://schemas.openxmlformats.org/drawingml/2006/main" xmlns:r="http://schemas.openxmlformats.org/officeDocument/2006/relationships" xmlns:p="http://schemas.openxmlformats.org/presentationml/2006/main">
   <p:cSld>
     <p:spTree>
@@ -5220,7 +5619,7 @@
 </p:sld>
 </file>
 
-<file path=ppt/slides/slide16.xml><?xml version="1.0" encoding="utf-8"?>
+<file path=ppt/slides/slide18.xml><?xml version="1.0" encoding="utf-8"?>
 <p:sld xmlns:a="http://schemas.openxmlformats.org/drawingml/2006/main" xmlns:r="http://schemas.openxmlformats.org/officeDocument/2006/relationships" xmlns:p="http://schemas.openxmlformats.org/presentationml/2006/main">
   <p:cSld>
     <p:spTree>
@@ -5433,7 +5832,7 @@
 </p:sld>
 </file>
 
-<file path=ppt/slides/slide17.xml><?xml version="1.0" encoding="utf-8"?>
+<file path=ppt/slides/slide19.xml><?xml version="1.0" encoding="utf-8"?>
 <p:sld xmlns:a="http://schemas.openxmlformats.org/drawingml/2006/main" xmlns:r="http://schemas.openxmlformats.org/officeDocument/2006/relationships" xmlns:p="http://schemas.openxmlformats.org/presentationml/2006/main">
   <p:cSld>
     <p:spTree>
@@ -5631,291 +6030,6 @@
 </p:sld>
 </file>
 
-<file path=ppt/slides/slide18.xml><?xml version="1.0" encoding="utf-8"?>
-<p:sld xmlns:a="http://schemas.openxmlformats.org/drawingml/2006/main" xmlns:r="http://schemas.openxmlformats.org/officeDocument/2006/relationships" xmlns:p="http://schemas.openxmlformats.org/presentationml/2006/main">
-  <p:cSld>
-    <p:spTree>
-      <p:nvGrpSpPr>
-        <p:cNvPr id="1" name=""/>
-        <p:cNvGrpSpPr/>
-        <p:nvPr/>
-      </p:nvGrpSpPr>
-      <p:grpSpPr>
-        <a:xfrm>
-          <a:off x="0" y="0"/>
-          <a:ext cx="0" cy="0"/>
-          <a:chOff x="0" y="0"/>
-          <a:chExt cx="0" cy="0"/>
-        </a:xfrm>
-      </p:grpSpPr>
-      <p:sp>
-        <p:nvSpPr>
-          <p:cNvPr id="2" name="Title 1">
-            <a:extLst>
-              <a:ext uri="{FF2B5EF4-FFF2-40B4-BE49-F238E27FC236}">
-                <a16:creationId xmlns:a16="http://schemas.microsoft.com/office/drawing/2014/main" id="{08655512-7946-4047-A1D7-53A8399D4DFB}"/>
-              </a:ext>
-            </a:extLst>
-          </p:cNvPr>
-          <p:cNvSpPr>
-            <a:spLocks noGrp="1"/>
-          </p:cNvSpPr>
-          <p:nvPr>
-            <p:ph type="title"/>
-          </p:nvPr>
-        </p:nvSpPr>
-        <p:spPr/>
-        <p:txBody>
-          <a:bodyPr/>
-          <a:lstStyle/>
-          <a:p>
-            <a:r>
-              <a:rPr lang="es-CO" dirty="0"/>
-              <a:t>Riesgo</a:t>
-            </a:r>
-          </a:p>
-        </p:txBody>
-      </p:sp>
-      <p:sp>
-        <p:nvSpPr>
-          <p:cNvPr id="3" name="Content Placeholder 2">
-            <a:extLst>
-              <a:ext uri="{FF2B5EF4-FFF2-40B4-BE49-F238E27FC236}">
-                <a16:creationId xmlns:a16="http://schemas.microsoft.com/office/drawing/2014/main" id="{2621EB15-0F81-4D7D-863A-9987161CDC7F}"/>
-              </a:ext>
-            </a:extLst>
-          </p:cNvPr>
-          <p:cNvSpPr>
-            <a:spLocks noGrp="1"/>
-          </p:cNvSpPr>
-          <p:nvPr>
-            <p:ph idx="1"/>
-          </p:nvPr>
-        </p:nvSpPr>
-        <p:spPr>
-          <a:xfrm>
-            <a:off x="838200" y="1825625"/>
-            <a:ext cx="3877734" cy="4351338"/>
-          </a:xfrm>
-        </p:spPr>
-        <p:txBody>
-          <a:bodyPr/>
-          <a:lstStyle/>
-          <a:p>
-            <a:r>
-              <a:rPr lang="es-CO" dirty="0"/>
-              <a:t>Correlación (obvia) con indicadores de velocidad</a:t>
-            </a:r>
-          </a:p>
-          <a:p>
-            <a:r>
-              <a:rPr lang="es-CO" dirty="0"/>
-              <a:t>No se ven diferencias significativas entre sexos</a:t>
-            </a:r>
-          </a:p>
-        </p:txBody>
-      </p:sp>
-      <p:pic>
-        <p:nvPicPr>
-          <p:cNvPr id="5" name="Picture 4">
-            <a:extLst>
-              <a:ext uri="{FF2B5EF4-FFF2-40B4-BE49-F238E27FC236}">
-                <a16:creationId xmlns:a16="http://schemas.microsoft.com/office/drawing/2014/main" id="{4BC4A89A-0215-4040-9B88-BF8727CBA120}"/>
-              </a:ext>
-            </a:extLst>
-          </p:cNvPr>
-          <p:cNvPicPr>
-            <a:picLocks noChangeAspect="1"/>
-          </p:cNvPicPr>
-          <p:nvPr/>
-        </p:nvPicPr>
-        <p:blipFill rotWithShape="1">
-          <a:blip r:embed="rId2"/>
-          <a:srcRect l="8267" r="7601"/>
-          <a:stretch/>
-        </p:blipFill>
-        <p:spPr>
-          <a:xfrm>
-            <a:off x="4715934" y="0"/>
-            <a:ext cx="7179734" cy="4105769"/>
-          </a:xfrm>
-          <a:prstGeom prst="rect">
-            <a:avLst/>
-          </a:prstGeom>
-        </p:spPr>
-      </p:pic>
-      <p:pic>
-        <p:nvPicPr>
-          <p:cNvPr id="7" name="Picture 6">
-            <a:extLst>
-              <a:ext uri="{FF2B5EF4-FFF2-40B4-BE49-F238E27FC236}">
-                <a16:creationId xmlns:a16="http://schemas.microsoft.com/office/drawing/2014/main" id="{2C577EEF-BF61-4EC6-BDF6-C3B44DCAED78}"/>
-              </a:ext>
-            </a:extLst>
-          </p:cNvPr>
-          <p:cNvPicPr>
-            <a:picLocks noChangeAspect="1"/>
-          </p:cNvPicPr>
-          <p:nvPr/>
-        </p:nvPicPr>
-        <p:blipFill>
-          <a:blip r:embed="rId3"/>
-          <a:stretch>
-            <a:fillRect/>
-          </a:stretch>
-        </p:blipFill>
-        <p:spPr>
-          <a:xfrm>
-            <a:off x="5203518" y="3770820"/>
-            <a:ext cx="6692150" cy="2604580"/>
-          </a:xfrm>
-          <a:prstGeom prst="rect">
-            <a:avLst/>
-          </a:prstGeom>
-        </p:spPr>
-      </p:pic>
-    </p:spTree>
-    <p:extLst>
-      <p:ext uri="{BB962C8B-B14F-4D97-AF65-F5344CB8AC3E}">
-        <p14:creationId xmlns:p14="http://schemas.microsoft.com/office/powerpoint/2010/main" val="1538201739"/>
-      </p:ext>
-    </p:extLst>
-  </p:cSld>
-  <p:clrMapOvr>
-    <a:masterClrMapping/>
-  </p:clrMapOvr>
-</p:sld>
-</file>
-
-<file path=ppt/slides/slide19.xml><?xml version="1.0" encoding="utf-8"?>
-<p:sld xmlns:a="http://schemas.openxmlformats.org/drawingml/2006/main" xmlns:r="http://schemas.openxmlformats.org/officeDocument/2006/relationships" xmlns:p="http://schemas.openxmlformats.org/presentationml/2006/main">
-  <p:cSld>
-    <p:spTree>
-      <p:nvGrpSpPr>
-        <p:cNvPr id="1" name=""/>
-        <p:cNvGrpSpPr/>
-        <p:nvPr/>
-      </p:nvGrpSpPr>
-      <p:grpSpPr>
-        <a:xfrm>
-          <a:off x="0" y="0"/>
-          <a:ext cx="0" cy="0"/>
-          <a:chOff x="0" y="0"/>
-          <a:chExt cx="0" cy="0"/>
-        </a:xfrm>
-      </p:grpSpPr>
-      <p:sp>
-        <p:nvSpPr>
-          <p:cNvPr id="2" name="Title 1">
-            <a:extLst>
-              <a:ext uri="{FF2B5EF4-FFF2-40B4-BE49-F238E27FC236}">
-                <a16:creationId xmlns:a16="http://schemas.microsoft.com/office/drawing/2014/main" id="{6CF01B10-51BF-48BF-A3BD-CAE8964BC802}"/>
-              </a:ext>
-            </a:extLst>
-          </p:cNvPr>
-          <p:cNvSpPr>
-            <a:spLocks noGrp="1"/>
-          </p:cNvSpPr>
-          <p:nvPr>
-            <p:ph type="title"/>
-          </p:nvPr>
-        </p:nvSpPr>
-        <p:spPr/>
-        <p:txBody>
-          <a:bodyPr/>
-          <a:lstStyle/>
-          <a:p>
-            <a:r>
-              <a:rPr lang="es-CO" dirty="0"/>
-              <a:t>Riesgo vs </a:t>
-            </a:r>
-            <a:r>
-              <a:rPr lang="es-CO" dirty="0" err="1"/>
-              <a:t>acc</a:t>
-            </a:r>
-            <a:r>
-              <a:rPr lang="es-CO" dirty="0"/>
-              <a:t> o </a:t>
-            </a:r>
-            <a:r>
-              <a:rPr lang="es-CO" dirty="0" err="1"/>
-              <a:t>fre</a:t>
-            </a:r>
-            <a:r>
-              <a:rPr lang="es-CO" dirty="0"/>
-              <a:t> por km</a:t>
-            </a:r>
-          </a:p>
-        </p:txBody>
-      </p:sp>
-      <p:sp>
-        <p:nvSpPr>
-          <p:cNvPr id="3" name="Content Placeholder 2">
-            <a:extLst>
-              <a:ext uri="{FF2B5EF4-FFF2-40B4-BE49-F238E27FC236}">
-                <a16:creationId xmlns:a16="http://schemas.microsoft.com/office/drawing/2014/main" id="{178E408E-8AA6-4CE7-A3F2-16C9825DF1DE}"/>
-              </a:ext>
-            </a:extLst>
-          </p:cNvPr>
-          <p:cNvSpPr>
-            <a:spLocks noGrp="1"/>
-          </p:cNvSpPr>
-          <p:nvPr>
-            <p:ph idx="1"/>
-          </p:nvPr>
-        </p:nvSpPr>
-        <p:spPr/>
-        <p:txBody>
-          <a:bodyPr/>
-          <a:lstStyle/>
-          <a:p>
-            <a:endParaRPr lang="es-CO"/>
-          </a:p>
-        </p:txBody>
-      </p:sp>
-      <p:pic>
-        <p:nvPicPr>
-          <p:cNvPr id="7" name="Picture 6">
-            <a:extLst>
-              <a:ext uri="{FF2B5EF4-FFF2-40B4-BE49-F238E27FC236}">
-                <a16:creationId xmlns:a16="http://schemas.microsoft.com/office/drawing/2014/main" id="{8FC389B6-C2E7-416E-9D80-C1F6A9A64FAF}"/>
-              </a:ext>
-            </a:extLst>
-          </p:cNvPr>
-          <p:cNvPicPr>
-            <a:picLocks noChangeAspect="1"/>
-          </p:cNvPicPr>
-          <p:nvPr/>
-        </p:nvPicPr>
-        <p:blipFill>
-          <a:blip r:embed="rId2"/>
-          <a:stretch>
-            <a:fillRect/>
-          </a:stretch>
-        </p:blipFill>
-        <p:spPr>
-          <a:xfrm>
-            <a:off x="1694392" y="2001044"/>
-            <a:ext cx="9124950" cy="4000500"/>
-          </a:xfrm>
-          <a:prstGeom prst="rect">
-            <a:avLst/>
-          </a:prstGeom>
-        </p:spPr>
-      </p:pic>
-    </p:spTree>
-    <p:extLst>
-      <p:ext uri="{BB962C8B-B14F-4D97-AF65-F5344CB8AC3E}">
-        <p14:creationId xmlns:p14="http://schemas.microsoft.com/office/powerpoint/2010/main" val="537718965"/>
-      </p:ext>
-    </p:extLst>
-  </p:cSld>
-  <p:clrMapOvr>
-    <a:masterClrMapping/>
-  </p:clrMapOvr>
-</p:sld>
-</file>
-
 <file path=ppt/slides/slide2.xml><?xml version="1.0" encoding="utf-8"?>
 <p:sld xmlns:a="http://schemas.openxmlformats.org/drawingml/2006/main" xmlns:r="http://schemas.openxmlformats.org/officeDocument/2006/relationships" xmlns:p="http://schemas.openxmlformats.org/presentationml/2006/main">
   <p:cSld>
@@ -6224,8 +6338,31 @@
                 <a:effectLst/>
                 <a:latin typeface="Menlo"/>
               </a:rPr>
-              <a:t>Resultados: Indicadores, patrones, análisis</a:t>
-            </a:r>
+              <a:t>Resultados: </a:t>
+            </a:r>
+          </a:p>
+          <a:p>
+            <a:pPr lvl="1"/>
+            <a:r>
+              <a:rPr lang="es-ES" sz="1400" b="0" i="0" dirty="0">
+                <a:effectLst/>
+                <a:latin typeface="Menlo"/>
+              </a:rPr>
+              <a:t>Indicadores, patrones, análisis</a:t>
+            </a:r>
+          </a:p>
+          <a:p>
+            <a:pPr lvl="1"/>
+            <a:r>
+              <a:rPr lang="es-ES" sz="1400" dirty="0">
+                <a:latin typeface="Menlo"/>
+              </a:rPr>
+              <a:t>Clasificación</a:t>
+            </a:r>
+            <a:endParaRPr lang="es-ES" sz="1400" b="0" i="0" dirty="0">
+              <a:effectLst/>
+              <a:latin typeface="Menlo"/>
+            </a:endParaRPr>
           </a:p>
           <a:p>
             <a:br>
@@ -6280,7 +6417,7 @@
           <p:cNvPr id="2" name="Title 1">
             <a:extLst>
               <a:ext uri="{FF2B5EF4-FFF2-40B4-BE49-F238E27FC236}">
-                <a16:creationId xmlns:a16="http://schemas.microsoft.com/office/drawing/2014/main" id="{BE55B7DC-E44F-47FB-BF0A-9FF0A70AE8C1}"/>
+                <a16:creationId xmlns:a16="http://schemas.microsoft.com/office/drawing/2014/main" id="{08655512-7946-4047-A1D7-53A8399D4DFB}"/>
               </a:ext>
             </a:extLst>
           </p:cNvPr>
@@ -6298,7 +6435,7 @@
           <a:p>
             <a:r>
               <a:rPr lang="es-CO" dirty="0"/>
-              <a:t>Consumo</a:t>
+              <a:t>Riesgo</a:t>
             </a:r>
           </a:p>
         </p:txBody>
@@ -6308,7 +6445,7 @@
           <p:cNvPr id="3" name="Content Placeholder 2">
             <a:extLst>
               <a:ext uri="{FF2B5EF4-FFF2-40B4-BE49-F238E27FC236}">
-                <a16:creationId xmlns:a16="http://schemas.microsoft.com/office/drawing/2014/main" id="{128748F5-7F93-4327-956D-0D034A771280}"/>
+                <a16:creationId xmlns:a16="http://schemas.microsoft.com/office/drawing/2014/main" id="{2621EB15-0F81-4D7D-863A-9987161CDC7F}"/>
               </a:ext>
             </a:extLst>
           </p:cNvPr>
@@ -6319,12 +6456,26 @@
             <p:ph idx="1"/>
           </p:nvPr>
         </p:nvSpPr>
-        <p:spPr/>
+        <p:spPr>
+          <a:xfrm>
+            <a:off x="838200" y="1825625"/>
+            <a:ext cx="3877734" cy="4351338"/>
+          </a:xfrm>
+        </p:spPr>
         <p:txBody>
           <a:bodyPr/>
           <a:lstStyle/>
           <a:p>
-            <a:endParaRPr lang="es-CO"/>
+            <a:r>
+              <a:rPr lang="es-CO" dirty="0"/>
+              <a:t>Correlación (obvia) con indicadores de velocidad</a:t>
+            </a:r>
+          </a:p>
+          <a:p>
+            <a:r>
+              <a:rPr lang="es-CO" dirty="0"/>
+              <a:t>No se ven diferencias significativas entre sexos</a:t>
+            </a:r>
           </a:p>
         </p:txBody>
       </p:sp>
@@ -6333,7 +6484,36 @@
           <p:cNvPr id="5" name="Picture 4">
             <a:extLst>
               <a:ext uri="{FF2B5EF4-FFF2-40B4-BE49-F238E27FC236}">
-                <a16:creationId xmlns:a16="http://schemas.microsoft.com/office/drawing/2014/main" id="{3D5AA0B6-9DC7-4C49-ABC2-8D047CF34AB6}"/>
+                <a16:creationId xmlns:a16="http://schemas.microsoft.com/office/drawing/2014/main" id="{4BC4A89A-0215-4040-9B88-BF8727CBA120}"/>
+              </a:ext>
+            </a:extLst>
+          </p:cNvPr>
+          <p:cNvPicPr>
+            <a:picLocks noChangeAspect="1"/>
+          </p:cNvPicPr>
+          <p:nvPr/>
+        </p:nvPicPr>
+        <p:blipFill rotWithShape="1">
+          <a:blip r:embed="rId2"/>
+          <a:srcRect l="8267" r="7601"/>
+          <a:stretch/>
+        </p:blipFill>
+        <p:spPr>
+          <a:xfrm>
+            <a:off x="4715934" y="0"/>
+            <a:ext cx="7179734" cy="4105769"/>
+          </a:xfrm>
+          <a:prstGeom prst="rect">
+            <a:avLst/>
+          </a:prstGeom>
+        </p:spPr>
+      </p:pic>
+      <p:pic>
+        <p:nvPicPr>
+          <p:cNvPr id="7" name="Picture 6">
+            <a:extLst>
+              <a:ext uri="{FF2B5EF4-FFF2-40B4-BE49-F238E27FC236}">
+                <a16:creationId xmlns:a16="http://schemas.microsoft.com/office/drawing/2014/main" id="{2C577EEF-BF61-4EC6-BDF6-C3B44DCAED78}"/>
               </a:ext>
             </a:extLst>
           </p:cNvPr>
@@ -6343,15 +6523,15 @@
           <p:nvPr/>
         </p:nvPicPr>
         <p:blipFill>
-          <a:blip r:embed="rId2"/>
+          <a:blip r:embed="rId3"/>
           <a:stretch>
             <a:fillRect/>
           </a:stretch>
         </p:blipFill>
         <p:spPr>
           <a:xfrm>
-            <a:off x="1162050" y="1428750"/>
-            <a:ext cx="9867900" cy="4000500"/>
+            <a:off x="5203518" y="3770820"/>
+            <a:ext cx="6692150" cy="2604580"/>
           </a:xfrm>
           <a:prstGeom prst="rect">
             <a:avLst/>
@@ -6361,7 +6541,7 @@
     </p:spTree>
     <p:extLst>
       <p:ext uri="{BB962C8B-B14F-4D97-AF65-F5344CB8AC3E}">
-        <p14:creationId xmlns:p14="http://schemas.microsoft.com/office/powerpoint/2010/main" val="2426596854"/>
+        <p14:creationId xmlns:p14="http://schemas.microsoft.com/office/powerpoint/2010/main" val="1538201739"/>
       </p:ext>
     </p:extLst>
   </p:cSld>
@@ -6393,7 +6573,7 @@
           <p:cNvPr id="2" name="Title 1">
             <a:extLst>
               <a:ext uri="{FF2B5EF4-FFF2-40B4-BE49-F238E27FC236}">
-                <a16:creationId xmlns:a16="http://schemas.microsoft.com/office/drawing/2014/main" id="{4D6A95E2-243D-44BC-9A3C-7FE9C3354226}"/>
+                <a16:creationId xmlns:a16="http://schemas.microsoft.com/office/drawing/2014/main" id="{6CF01B10-51BF-48BF-A3BD-CAE8964BC802}"/>
               </a:ext>
             </a:extLst>
           </p:cNvPr>
@@ -6411,7 +6591,23 @@
           <a:p>
             <a:r>
               <a:rPr lang="es-CO" dirty="0"/>
-              <a:t>Consumo</a:t>
+              <a:t>Riesgo vs </a:t>
+            </a:r>
+            <a:r>
+              <a:rPr lang="es-CO" dirty="0" err="1"/>
+              <a:t>acc</a:t>
+            </a:r>
+            <a:r>
+              <a:rPr lang="es-CO" dirty="0"/>
+              <a:t> o </a:t>
+            </a:r>
+            <a:r>
+              <a:rPr lang="es-CO" dirty="0" err="1"/>
+              <a:t>fre</a:t>
+            </a:r>
+            <a:r>
+              <a:rPr lang="es-CO" dirty="0"/>
+              <a:t> por km</a:t>
             </a:r>
           </a:p>
         </p:txBody>
@@ -6421,7 +6617,7 @@
           <p:cNvPr id="3" name="Content Placeholder 2">
             <a:extLst>
               <a:ext uri="{FF2B5EF4-FFF2-40B4-BE49-F238E27FC236}">
-                <a16:creationId xmlns:a16="http://schemas.microsoft.com/office/drawing/2014/main" id="{ABFA090F-323E-4818-991D-5020CE8361DF}"/>
+                <a16:creationId xmlns:a16="http://schemas.microsoft.com/office/drawing/2014/main" id="{178E408E-8AA6-4CE7-A3F2-16C9825DF1DE}"/>
               </a:ext>
             </a:extLst>
           </p:cNvPr>
@@ -6432,47 +6628,21 @@
             <p:ph idx="1"/>
           </p:nvPr>
         </p:nvSpPr>
-        <p:spPr>
-          <a:xfrm>
-            <a:off x="838200" y="1825625"/>
-            <a:ext cx="2967182" cy="4351338"/>
-          </a:xfrm>
-        </p:spPr>
-        <p:txBody>
-          <a:bodyPr>
-            <a:normAutofit/>
-          </a:bodyPr>
-          <a:lstStyle/>
-          <a:p>
-            <a:r>
-              <a:rPr lang="es-CO" sz="1400" dirty="0"/>
-              <a:t>Correlación negativa del consumo/km con las velocidades: velocidad en movimiento y velocidad comercial (incluye paradas)</a:t>
-            </a:r>
-          </a:p>
-          <a:p>
-            <a:r>
-              <a:rPr lang="es-CO" sz="1400" dirty="0"/>
-              <a:t>Rutas en pendientes, H629 y L613 con evidente mayor consumo (casi el doble) que las demás.</a:t>
-            </a:r>
-          </a:p>
-          <a:p>
-            <a:r>
-              <a:rPr lang="es-CO" sz="1400" dirty="0">
-                <a:solidFill>
-                  <a:srgbClr val="FF0000"/>
-                </a:solidFill>
-              </a:rPr>
-              <a:t>Importante agregar la energía regenerada para estimar el consumo completo.</a:t>
-            </a:r>
+        <p:spPr/>
+        <p:txBody>
+          <a:bodyPr/>
+          <a:lstStyle/>
+          <a:p>
+            <a:endParaRPr lang="es-CO"/>
           </a:p>
         </p:txBody>
       </p:sp>
       <p:pic>
         <p:nvPicPr>
-          <p:cNvPr id="5" name="Picture 4">
-            <a:extLst>
-              <a:ext uri="{FF2B5EF4-FFF2-40B4-BE49-F238E27FC236}">
-                <a16:creationId xmlns:a16="http://schemas.microsoft.com/office/drawing/2014/main" id="{68735796-E0AD-4AB0-BFB9-82A829BA6EA9}"/>
+          <p:cNvPr id="7" name="Picture 6">
+            <a:extLst>
+              <a:ext uri="{FF2B5EF4-FFF2-40B4-BE49-F238E27FC236}">
+                <a16:creationId xmlns:a16="http://schemas.microsoft.com/office/drawing/2014/main" id="{8FC389B6-C2E7-416E-9D80-C1F6A9A64FAF}"/>
               </a:ext>
             </a:extLst>
           </p:cNvPr>
@@ -6481,15 +6651,16 @@
           </p:cNvPicPr>
           <p:nvPr/>
         </p:nvPicPr>
-        <p:blipFill rotWithShape="1">
+        <p:blipFill>
           <a:blip r:embed="rId2"/>
-          <a:srcRect l="8881"/>
-          <a:stretch/>
+          <a:stretch>
+            <a:fillRect/>
+          </a:stretch>
         </p:blipFill>
         <p:spPr>
           <a:xfrm>
-            <a:off x="3805382" y="1368802"/>
-            <a:ext cx="8238836" cy="4120395"/>
+            <a:off x="1694392" y="2001044"/>
+            <a:ext cx="9124950" cy="4000500"/>
           </a:xfrm>
           <a:prstGeom prst="rect">
             <a:avLst/>
@@ -6499,7 +6670,7 @@
     </p:spTree>
     <p:extLst>
       <p:ext uri="{BB962C8B-B14F-4D97-AF65-F5344CB8AC3E}">
-        <p14:creationId xmlns:p14="http://schemas.microsoft.com/office/powerpoint/2010/main" val="2548587813"/>
+        <p14:creationId xmlns:p14="http://schemas.microsoft.com/office/powerpoint/2010/main" val="537718965"/>
       </p:ext>
     </p:extLst>
   </p:cSld>
@@ -6531,7 +6702,7 @@
           <p:cNvPr id="2" name="Title 1">
             <a:extLst>
               <a:ext uri="{FF2B5EF4-FFF2-40B4-BE49-F238E27FC236}">
-                <a16:creationId xmlns:a16="http://schemas.microsoft.com/office/drawing/2014/main" id="{012732A5-CA64-438D-8D68-CB017C748861}"/>
+                <a16:creationId xmlns:a16="http://schemas.microsoft.com/office/drawing/2014/main" id="{BE55B7DC-E44F-47FB-BF0A-9FF0A70AE8C1}"/>
               </a:ext>
             </a:extLst>
           </p:cNvPr>
@@ -6559,7 +6730,7 @@
           <p:cNvPr id="3" name="Content Placeholder 2">
             <a:extLst>
               <a:ext uri="{FF2B5EF4-FFF2-40B4-BE49-F238E27FC236}">
-                <a16:creationId xmlns:a16="http://schemas.microsoft.com/office/drawing/2014/main" id="{83DF4FFA-FB2B-4E37-9402-0BBE66287E54}"/>
+                <a16:creationId xmlns:a16="http://schemas.microsoft.com/office/drawing/2014/main" id="{128748F5-7F93-4327-956D-0D034A771280}"/>
               </a:ext>
             </a:extLst>
           </p:cNvPr>
@@ -6570,49 +6741,12 @@
             <p:ph idx="1"/>
           </p:nvPr>
         </p:nvSpPr>
-        <p:spPr>
-          <a:xfrm>
-            <a:off x="838200" y="1825625"/>
-            <a:ext cx="3078018" cy="4351338"/>
-          </a:xfrm>
-        </p:spPr>
-        <p:txBody>
-          <a:bodyPr>
-            <a:normAutofit/>
-          </a:bodyPr>
-          <a:lstStyle/>
-          <a:p>
-            <a:r>
-              <a:rPr lang="es-CO" sz="1800" dirty="0"/>
-              <a:t>Todas las rutas muestran correlación positiva entre consumo y </a:t>
-            </a:r>
-            <a:r>
-              <a:rPr lang="es-CO" sz="1800" dirty="0" err="1"/>
-              <a:t>acc</a:t>
-            </a:r>
-            <a:r>
-              <a:rPr lang="es-CO" sz="1800" dirty="0"/>
-              <a:t>+/km</a:t>
-            </a:r>
-          </a:p>
-          <a:p>
-            <a:r>
-              <a:rPr lang="es-CO" sz="1800" dirty="0"/>
-              <a:t>Las rutas con fuertes pendientes (H629 y L613) aumentan el consumo, pero mantiene correlaciones similares</a:t>
-            </a:r>
-          </a:p>
-          <a:p>
-            <a:r>
-              <a:rPr lang="es-CO" sz="1800" dirty="0">
-                <a:solidFill>
-                  <a:srgbClr val="FF0000"/>
-                </a:solidFill>
-              </a:rPr>
-              <a:t>Importante agregar la energía regenerada para estimar el consumo completo.</a:t>
-            </a:r>
-          </a:p>
-          <a:p>
-            <a:endParaRPr lang="es-CO" sz="1800" dirty="0"/>
+        <p:spPr/>
+        <p:txBody>
+          <a:bodyPr/>
+          <a:lstStyle/>
+          <a:p>
+            <a:endParaRPr lang="es-CO"/>
           </a:p>
         </p:txBody>
       </p:sp>
@@ -6621,7 +6755,7 @@
           <p:cNvPr id="5" name="Picture 4">
             <a:extLst>
               <a:ext uri="{FF2B5EF4-FFF2-40B4-BE49-F238E27FC236}">
-                <a16:creationId xmlns:a16="http://schemas.microsoft.com/office/drawing/2014/main" id="{A6E82763-C78D-435B-842E-57F38A4E8A27}"/>
+                <a16:creationId xmlns:a16="http://schemas.microsoft.com/office/drawing/2014/main" id="{3D5AA0B6-9DC7-4C49-ABC2-8D047CF34AB6}"/>
               </a:ext>
             </a:extLst>
           </p:cNvPr>
@@ -6630,15 +6764,16 @@
           </p:cNvPicPr>
           <p:nvPr/>
         </p:nvPicPr>
-        <p:blipFill rotWithShape="1">
+        <p:blipFill>
           <a:blip r:embed="rId2"/>
-          <a:srcRect l="7468" r="5751"/>
-          <a:stretch/>
+          <a:stretch>
+            <a:fillRect/>
+          </a:stretch>
         </p:blipFill>
         <p:spPr>
           <a:xfrm>
-            <a:off x="3971632" y="1825625"/>
-            <a:ext cx="7943277" cy="4171182"/>
+            <a:off x="2201956" y="1428750"/>
+            <a:ext cx="9867900" cy="4000500"/>
           </a:xfrm>
           <a:prstGeom prst="rect">
             <a:avLst/>
@@ -6648,7 +6783,7 @@
     </p:spTree>
     <p:extLst>
       <p:ext uri="{BB962C8B-B14F-4D97-AF65-F5344CB8AC3E}">
-        <p14:creationId xmlns:p14="http://schemas.microsoft.com/office/powerpoint/2010/main" val="4264388794"/>
+        <p14:creationId xmlns:p14="http://schemas.microsoft.com/office/powerpoint/2010/main" val="2426596854"/>
       </p:ext>
     </p:extLst>
   </p:cSld>
@@ -6680,7 +6815,7 @@
           <p:cNvPr id="2" name="Title 1">
             <a:extLst>
               <a:ext uri="{FF2B5EF4-FFF2-40B4-BE49-F238E27FC236}">
-                <a16:creationId xmlns:a16="http://schemas.microsoft.com/office/drawing/2014/main" id="{9C8D38EE-3BB3-486B-8027-C43433CDC185}"/>
+                <a16:creationId xmlns:a16="http://schemas.microsoft.com/office/drawing/2014/main" id="{B4CE69B1-3B38-4D6D-A140-C5E1C6E137E3}"/>
               </a:ext>
             </a:extLst>
           </p:cNvPr>
@@ -6696,19 +6831,16 @@
           <a:bodyPr/>
           <a:lstStyle/>
           <a:p>
-            <a:r>
-              <a:rPr lang="es-CO" dirty="0"/>
-              <a:t>Consumo</a:t>
-            </a:r>
-          </a:p>
-        </p:txBody>
-      </p:sp>
-      <p:sp>
-        <p:nvSpPr>
-          <p:cNvPr id="3" name="Content Placeholder 2">
-            <a:extLst>
-              <a:ext uri="{FF2B5EF4-FFF2-40B4-BE49-F238E27FC236}">
-                <a16:creationId xmlns:a16="http://schemas.microsoft.com/office/drawing/2014/main" id="{40A161F4-4AB6-441C-B84F-77873884F7B4}"/>
+            <a:endParaRPr lang="es-CO"/>
+          </a:p>
+        </p:txBody>
+      </p:sp>
+      <p:sp>
+        <p:nvSpPr>
+          <p:cNvPr id="6" name="Content Placeholder 5">
+            <a:extLst>
+              <a:ext uri="{FF2B5EF4-FFF2-40B4-BE49-F238E27FC236}">
+                <a16:creationId xmlns:a16="http://schemas.microsoft.com/office/drawing/2014/main" id="{2E46A76F-7CB7-40BF-8114-F16C57732687}"/>
               </a:ext>
             </a:extLst>
           </p:cNvPr>
@@ -6719,31 +6851,21 @@
             <p:ph idx="1"/>
           </p:nvPr>
         </p:nvSpPr>
-        <p:spPr>
-          <a:xfrm>
-            <a:off x="838200" y="1825625"/>
-            <a:ext cx="2886508" cy="4351338"/>
-          </a:xfrm>
-        </p:spPr>
-        <p:txBody>
-          <a:bodyPr>
-            <a:normAutofit/>
-          </a:bodyPr>
-          <a:lstStyle/>
-          <a:p>
-            <a:r>
-              <a:rPr lang="es-CO" sz="1800" dirty="0"/>
-              <a:t>No hay diferencias significativas en el consumo por sexo</a:t>
-            </a:r>
+        <p:spPr/>
+        <p:txBody>
+          <a:bodyPr/>
+          <a:lstStyle/>
+          <a:p>
+            <a:endParaRPr lang="es-CO"/>
           </a:p>
         </p:txBody>
       </p:sp>
       <p:pic>
         <p:nvPicPr>
-          <p:cNvPr id="5" name="Picture 4">
-            <a:extLst>
-              <a:ext uri="{FF2B5EF4-FFF2-40B4-BE49-F238E27FC236}">
-                <a16:creationId xmlns:a16="http://schemas.microsoft.com/office/drawing/2014/main" id="{A112B960-ACFE-4E2E-8275-FC0FA22A1B20}"/>
+          <p:cNvPr id="8" name="Picture 7">
+            <a:extLst>
+              <a:ext uri="{FF2B5EF4-FFF2-40B4-BE49-F238E27FC236}">
+                <a16:creationId xmlns:a16="http://schemas.microsoft.com/office/drawing/2014/main" id="{A83BE3C1-7CD8-4DAA-AD17-AAE32182C22F}"/>
               </a:ext>
             </a:extLst>
           </p:cNvPr>
@@ -6754,13 +6876,43 @@
         </p:nvPicPr>
         <p:blipFill rotWithShape="1">
           <a:blip r:embed="rId2"/>
-          <a:srcRect l="9167" r="8333"/>
+          <a:srcRect t="6929" r="51250"/>
           <a:stretch/>
         </p:blipFill>
         <p:spPr>
           <a:xfrm>
-            <a:off x="3724708" y="1690688"/>
-            <a:ext cx="8153255" cy="4754779"/>
+            <a:off x="0" y="1361440"/>
+            <a:ext cx="5943600" cy="4467740"/>
+          </a:xfrm>
+          <a:prstGeom prst="rect">
+            <a:avLst/>
+          </a:prstGeom>
+        </p:spPr>
+      </p:pic>
+      <p:pic>
+        <p:nvPicPr>
+          <p:cNvPr id="10" name="Picture 9">
+            <a:extLst>
+              <a:ext uri="{FF2B5EF4-FFF2-40B4-BE49-F238E27FC236}">
+                <a16:creationId xmlns:a16="http://schemas.microsoft.com/office/drawing/2014/main" id="{5AE42874-067F-4961-922C-CCFE2FD2DC46}"/>
+              </a:ext>
+            </a:extLst>
+          </p:cNvPr>
+          <p:cNvPicPr>
+            <a:picLocks noChangeAspect="1"/>
+          </p:cNvPicPr>
+          <p:nvPr/>
+        </p:nvPicPr>
+        <p:blipFill>
+          <a:blip r:embed="rId3"/>
+          <a:stretch>
+            <a:fillRect/>
+          </a:stretch>
+        </p:blipFill>
+        <p:spPr>
+          <a:xfrm>
+            <a:off x="0" y="1028819"/>
+            <a:ext cx="12192000" cy="4800361"/>
           </a:xfrm>
           <a:prstGeom prst="rect">
             <a:avLst/>
@@ -6770,13 +6922,88 @@
     </p:spTree>
     <p:extLst>
       <p:ext uri="{BB962C8B-B14F-4D97-AF65-F5344CB8AC3E}">
-        <p14:creationId xmlns:p14="http://schemas.microsoft.com/office/powerpoint/2010/main" val="422390354"/>
+        <p14:creationId xmlns:p14="http://schemas.microsoft.com/office/powerpoint/2010/main" val="2267109918"/>
       </p:ext>
     </p:extLst>
   </p:cSld>
   <p:clrMapOvr>
     <a:masterClrMapping/>
   </p:clrMapOvr>
+  <p:timing>
+    <p:tnLst>
+      <p:par>
+        <p:cTn id="1" dur="indefinite" restart="never" nodeType="tmRoot">
+          <p:childTnLst>
+            <p:seq concurrent="1" nextAc="seek">
+              <p:cTn id="2" dur="indefinite" nodeType="mainSeq">
+                <p:childTnLst>
+                  <p:par>
+                    <p:cTn id="3" fill="hold">
+                      <p:stCondLst>
+                        <p:cond delay="indefinite"/>
+                      </p:stCondLst>
+                      <p:childTnLst>
+                        <p:par>
+                          <p:cTn id="4" fill="hold">
+                            <p:stCondLst>
+                              <p:cond delay="0"/>
+                            </p:stCondLst>
+                            <p:childTnLst>
+                              <p:par>
+                                <p:cTn id="5" presetID="1" presetClass="entr" presetSubtype="0" fill="hold" nodeType="clickEffect">
+                                  <p:stCondLst>
+                                    <p:cond delay="0"/>
+                                  </p:stCondLst>
+                                  <p:childTnLst>
+                                    <p:set>
+                                      <p:cBhvr>
+                                        <p:cTn id="6" dur="1" fill="hold">
+                                          <p:stCondLst>
+                                            <p:cond delay="0"/>
+                                          </p:stCondLst>
+                                        </p:cTn>
+                                        <p:tgtEl>
+                                          <p:spTgt spid="10"/>
+                                        </p:tgtEl>
+                                        <p:attrNameLst>
+                                          <p:attrName>style.visibility</p:attrName>
+                                        </p:attrNameLst>
+                                      </p:cBhvr>
+                                      <p:to>
+                                        <p:strVal val="visible"/>
+                                      </p:to>
+                                    </p:set>
+                                  </p:childTnLst>
+                                </p:cTn>
+                              </p:par>
+                            </p:childTnLst>
+                          </p:cTn>
+                        </p:par>
+                      </p:childTnLst>
+                    </p:cTn>
+                  </p:par>
+                </p:childTnLst>
+              </p:cTn>
+              <p:prevCondLst>
+                <p:cond evt="onPrev" delay="0">
+                  <p:tgtEl>
+                    <p:sldTgt/>
+                  </p:tgtEl>
+                </p:cond>
+              </p:prevCondLst>
+              <p:nextCondLst>
+                <p:cond evt="onNext" delay="0">
+                  <p:tgtEl>
+                    <p:sldTgt/>
+                  </p:tgtEl>
+                </p:cond>
+              </p:nextCondLst>
+            </p:seq>
+          </p:childTnLst>
+        </p:cTn>
+      </p:par>
+    </p:tnLst>
+  </p:timing>
 </p:sld>
 </file>
 
@@ -6802,7 +7029,7 @@
           <p:cNvPr id="2" name="Title 1">
             <a:extLst>
               <a:ext uri="{FF2B5EF4-FFF2-40B4-BE49-F238E27FC236}">
-                <a16:creationId xmlns:a16="http://schemas.microsoft.com/office/drawing/2014/main" id="{58C94CFA-E0C5-4665-877C-9E0A5A2A6C92}"/>
+                <a16:creationId xmlns:a16="http://schemas.microsoft.com/office/drawing/2014/main" id="{C7035C49-6F13-4AC0-8622-76C77BCF0BFE}"/>
               </a:ext>
             </a:extLst>
           </p:cNvPr>
@@ -6820,58 +7047,107 @@
           <a:p>
             <a:r>
               <a:rPr lang="es-CO" dirty="0"/>
-              <a:t>Regeneración</a:t>
-            </a:r>
-          </a:p>
-        </p:txBody>
-      </p:sp>
-      <p:sp>
-        <p:nvSpPr>
-          <p:cNvPr id="3" name="Content Placeholder 2">
-            <a:extLst>
-              <a:ext uri="{FF2B5EF4-FFF2-40B4-BE49-F238E27FC236}">
-                <a16:creationId xmlns:a16="http://schemas.microsoft.com/office/drawing/2014/main" id="{AFC7E9D3-0264-44C2-94C1-30CDAFD03CC2}"/>
-              </a:ext>
-            </a:extLst>
-          </p:cNvPr>
-          <p:cNvSpPr>
-            <a:spLocks noGrp="1"/>
-          </p:cNvSpPr>
-          <p:nvPr>
-            <p:ph idx="1"/>
-          </p:nvPr>
-        </p:nvSpPr>
-        <p:spPr>
-          <a:xfrm>
-            <a:off x="838200" y="1825625"/>
-            <a:ext cx="2474343" cy="4351338"/>
-          </a:xfrm>
-        </p:spPr>
-        <p:txBody>
-          <a:bodyPr>
-            <a:normAutofit/>
-          </a:bodyPr>
-          <a:lstStyle/>
-          <a:p>
-            <a:r>
-              <a:rPr lang="es-CO" sz="1800" dirty="0"/>
-              <a:t>Los hombres regeneran un poquito más, en 5 de 6 rutas.</a:t>
-            </a:r>
-          </a:p>
-          <a:p>
-            <a:r>
-              <a:rPr lang="es-CO" sz="1800" dirty="0"/>
-              <a:t>En la ruta de bajada, los hombres regeneran 9% más!</a:t>
+              <a:t>Total Energy</a:t>
             </a:r>
           </a:p>
         </p:txBody>
       </p:sp>
       <p:pic>
         <p:nvPicPr>
-          <p:cNvPr id="5" name="Picture 4">
-            <a:extLst>
-              <a:ext uri="{FF2B5EF4-FFF2-40B4-BE49-F238E27FC236}">
-                <a16:creationId xmlns:a16="http://schemas.microsoft.com/office/drawing/2014/main" id="{6ACB86B9-4E3C-4CE4-A2A0-D5AFCF99DC86}"/>
+          <p:cNvPr id="12" name="Picture 11">
+            <a:extLst>
+              <a:ext uri="{FF2B5EF4-FFF2-40B4-BE49-F238E27FC236}">
+                <a16:creationId xmlns:a16="http://schemas.microsoft.com/office/drawing/2014/main" id="{6F40BBFE-2DF2-4C7E-A536-0232CE8CF2F1}"/>
+              </a:ext>
+            </a:extLst>
+          </p:cNvPr>
+          <p:cNvPicPr>
+            <a:picLocks noChangeAspect="1"/>
+          </p:cNvPicPr>
+          <p:nvPr/>
+        </p:nvPicPr>
+        <p:blipFill>
+          <a:blip r:embed="rId2"/>
+          <a:stretch>
+            <a:fillRect/>
+          </a:stretch>
+        </p:blipFill>
+        <p:spPr>
+          <a:xfrm>
+            <a:off x="0" y="1028819"/>
+            <a:ext cx="12192000" cy="4800361"/>
+          </a:xfrm>
+          <a:prstGeom prst="rect">
+            <a:avLst/>
+          </a:prstGeom>
+        </p:spPr>
+      </p:pic>
+      <p:pic>
+        <p:nvPicPr>
+          <p:cNvPr id="13" name="Picture 12">
+            <a:extLst>
+              <a:ext uri="{FF2B5EF4-FFF2-40B4-BE49-F238E27FC236}">
+                <a16:creationId xmlns:a16="http://schemas.microsoft.com/office/drawing/2014/main" id="{82246F7B-6E59-458B-AB1E-0F109544C093}"/>
+              </a:ext>
+            </a:extLst>
+          </p:cNvPr>
+          <p:cNvPicPr>
+            <a:picLocks noChangeAspect="1"/>
+          </p:cNvPicPr>
+          <p:nvPr/>
+        </p:nvPicPr>
+        <p:blipFill>
+          <a:blip r:embed="rId3"/>
+          <a:stretch>
+            <a:fillRect/>
+          </a:stretch>
+        </p:blipFill>
+        <p:spPr>
+          <a:xfrm>
+            <a:off x="0" y="1029600"/>
+            <a:ext cx="12192000" cy="4800361"/>
+          </a:xfrm>
+          <a:prstGeom prst="rect">
+            <a:avLst/>
+          </a:prstGeom>
+        </p:spPr>
+      </p:pic>
+      <p:pic>
+        <p:nvPicPr>
+          <p:cNvPr id="14" name="Picture 13">
+            <a:extLst>
+              <a:ext uri="{FF2B5EF4-FFF2-40B4-BE49-F238E27FC236}">
+                <a16:creationId xmlns:a16="http://schemas.microsoft.com/office/drawing/2014/main" id="{906E6D83-DEC7-4BEF-83CD-59435BA3DDC0}"/>
+              </a:ext>
+            </a:extLst>
+          </p:cNvPr>
+          <p:cNvPicPr>
+            <a:picLocks noChangeAspect="1"/>
+          </p:cNvPicPr>
+          <p:nvPr/>
+        </p:nvPicPr>
+        <p:blipFill>
+          <a:blip r:embed="rId4"/>
+          <a:stretch>
+            <a:fillRect/>
+          </a:stretch>
+        </p:blipFill>
+        <p:spPr>
+          <a:xfrm>
+            <a:off x="0" y="1029600"/>
+            <a:ext cx="12192000" cy="4800361"/>
+          </a:xfrm>
+          <a:prstGeom prst="rect">
+            <a:avLst/>
+          </a:prstGeom>
+        </p:spPr>
+      </p:pic>
+      <p:pic>
+        <p:nvPicPr>
+          <p:cNvPr id="15" name="Picture 14">
+            <a:extLst>
+              <a:ext uri="{FF2B5EF4-FFF2-40B4-BE49-F238E27FC236}">
+                <a16:creationId xmlns:a16="http://schemas.microsoft.com/office/drawing/2014/main" id="{47CA6E76-C1BC-460B-AAAF-4864CA804648}"/>
               </a:ext>
             </a:extLst>
           </p:cNvPr>
@@ -6881,14 +7157,72 @@
           <p:nvPr/>
         </p:nvPicPr>
         <p:blipFill rotWithShape="1">
-          <a:blip r:embed="rId2"/>
-          <a:srcRect l="8262" r="8628"/>
+          <a:blip r:embed="rId5"/>
+          <a:srcRect t="92859"/>
           <a:stretch/>
         </p:blipFill>
         <p:spPr>
           <a:xfrm>
-            <a:off x="3312543" y="1433602"/>
-            <a:ext cx="8462513" cy="4629150"/>
+            <a:off x="0" y="5567680"/>
+            <a:ext cx="12192000" cy="342780"/>
+          </a:xfrm>
+          <a:prstGeom prst="rect">
+            <a:avLst/>
+          </a:prstGeom>
+        </p:spPr>
+      </p:pic>
+      <p:pic>
+        <p:nvPicPr>
+          <p:cNvPr id="16" name="Picture 15">
+            <a:extLst>
+              <a:ext uri="{FF2B5EF4-FFF2-40B4-BE49-F238E27FC236}">
+                <a16:creationId xmlns:a16="http://schemas.microsoft.com/office/drawing/2014/main" id="{626249F4-9E79-4C36-9592-787DFFF16DF1}"/>
+              </a:ext>
+            </a:extLst>
+          </p:cNvPr>
+          <p:cNvPicPr>
+            <a:picLocks noChangeAspect="1"/>
+          </p:cNvPicPr>
+          <p:nvPr/>
+        </p:nvPicPr>
+        <p:blipFill rotWithShape="1">
+          <a:blip r:embed="rId5"/>
+          <a:srcRect t="92859"/>
+          <a:stretch/>
+        </p:blipFill>
+        <p:spPr>
+          <a:xfrm>
+            <a:off x="0" y="5567680"/>
+            <a:ext cx="12192000" cy="342780"/>
+          </a:xfrm>
+          <a:prstGeom prst="rect">
+            <a:avLst/>
+          </a:prstGeom>
+        </p:spPr>
+      </p:pic>
+      <p:pic>
+        <p:nvPicPr>
+          <p:cNvPr id="17" name="Picture 16">
+            <a:extLst>
+              <a:ext uri="{FF2B5EF4-FFF2-40B4-BE49-F238E27FC236}">
+                <a16:creationId xmlns:a16="http://schemas.microsoft.com/office/drawing/2014/main" id="{190699F8-B805-4F40-9930-551E71FCABD9}"/>
+              </a:ext>
+            </a:extLst>
+          </p:cNvPr>
+          <p:cNvPicPr>
+            <a:picLocks noChangeAspect="1"/>
+          </p:cNvPicPr>
+          <p:nvPr/>
+        </p:nvPicPr>
+        <p:blipFill rotWithShape="1">
+          <a:blip r:embed="rId5"/>
+          <a:srcRect t="92859"/>
+          <a:stretch/>
+        </p:blipFill>
+        <p:spPr>
+          <a:xfrm>
+            <a:off x="0" y="5567680"/>
+            <a:ext cx="12192000" cy="342780"/>
           </a:xfrm>
           <a:prstGeom prst="rect">
             <a:avLst/>
@@ -6898,13 +7232,235 @@
     </p:spTree>
     <p:extLst>
       <p:ext uri="{BB962C8B-B14F-4D97-AF65-F5344CB8AC3E}">
-        <p14:creationId xmlns:p14="http://schemas.microsoft.com/office/powerpoint/2010/main" val="1964312091"/>
+        <p14:creationId xmlns:p14="http://schemas.microsoft.com/office/powerpoint/2010/main" val="3867595559"/>
       </p:ext>
     </p:extLst>
   </p:cSld>
   <p:clrMapOvr>
     <a:masterClrMapping/>
   </p:clrMapOvr>
+  <p:timing>
+    <p:tnLst>
+      <p:par>
+        <p:cTn id="1" dur="indefinite" restart="never" nodeType="tmRoot">
+          <p:childTnLst>
+            <p:seq concurrent="1" nextAc="seek">
+              <p:cTn id="2" dur="indefinite" nodeType="mainSeq">
+                <p:childTnLst>
+                  <p:par>
+                    <p:cTn id="3" fill="hold">
+                      <p:stCondLst>
+                        <p:cond delay="indefinite"/>
+                        <p:cond evt="onBegin" delay="0">
+                          <p:tn val="2"/>
+                        </p:cond>
+                      </p:stCondLst>
+                      <p:childTnLst>
+                        <p:par>
+                          <p:cTn id="4" fill="hold">
+                            <p:stCondLst>
+                              <p:cond delay="0"/>
+                            </p:stCondLst>
+                            <p:childTnLst>
+                              <p:par>
+                                <p:cTn id="5" presetID="1" presetClass="entr" presetSubtype="0" fill="hold" nodeType="withEffect">
+                                  <p:stCondLst>
+                                    <p:cond delay="0"/>
+                                  </p:stCondLst>
+                                  <p:childTnLst>
+                                    <p:set>
+                                      <p:cBhvr>
+                                        <p:cTn id="6" dur="1" fill="hold">
+                                          <p:stCondLst>
+                                            <p:cond delay="0"/>
+                                          </p:stCondLst>
+                                        </p:cTn>
+                                        <p:tgtEl>
+                                          <p:spTgt spid="17"/>
+                                        </p:tgtEl>
+                                        <p:attrNameLst>
+                                          <p:attrName>style.visibility</p:attrName>
+                                        </p:attrNameLst>
+                                      </p:cBhvr>
+                                      <p:to>
+                                        <p:strVal val="visible"/>
+                                      </p:to>
+                                    </p:set>
+                                  </p:childTnLst>
+                                </p:cTn>
+                              </p:par>
+                            </p:childTnLst>
+                          </p:cTn>
+                        </p:par>
+                      </p:childTnLst>
+                    </p:cTn>
+                  </p:par>
+                  <p:par>
+                    <p:cTn id="7" fill="hold">
+                      <p:stCondLst>
+                        <p:cond delay="indefinite"/>
+                      </p:stCondLst>
+                      <p:childTnLst>
+                        <p:par>
+                          <p:cTn id="8" fill="hold">
+                            <p:stCondLst>
+                              <p:cond delay="0"/>
+                            </p:stCondLst>
+                            <p:childTnLst>
+                              <p:par>
+                                <p:cTn id="9" presetID="1" presetClass="entr" presetSubtype="0" fill="hold" nodeType="clickEffect">
+                                  <p:stCondLst>
+                                    <p:cond delay="0"/>
+                                  </p:stCondLst>
+                                  <p:childTnLst>
+                                    <p:set>
+                                      <p:cBhvr>
+                                        <p:cTn id="10" dur="1" fill="hold">
+                                          <p:stCondLst>
+                                            <p:cond delay="0"/>
+                                          </p:stCondLst>
+                                        </p:cTn>
+                                        <p:tgtEl>
+                                          <p:spTgt spid="13"/>
+                                        </p:tgtEl>
+                                        <p:attrNameLst>
+                                          <p:attrName>style.visibility</p:attrName>
+                                        </p:attrNameLst>
+                                      </p:cBhvr>
+                                      <p:to>
+                                        <p:strVal val="visible"/>
+                                      </p:to>
+                                    </p:set>
+                                  </p:childTnLst>
+                                </p:cTn>
+                              </p:par>
+                              <p:par>
+                                <p:cTn id="11" presetID="1" presetClass="entr" presetSubtype="0" fill="hold" nodeType="withEffect">
+                                  <p:stCondLst>
+                                    <p:cond delay="0"/>
+                                  </p:stCondLst>
+                                  <p:childTnLst>
+                                    <p:set>
+                                      <p:cBhvr>
+                                        <p:cTn id="12" dur="1" fill="hold">
+                                          <p:stCondLst>
+                                            <p:cond delay="0"/>
+                                          </p:stCondLst>
+                                        </p:cTn>
+                                        <p:tgtEl>
+                                          <p:spTgt spid="16"/>
+                                        </p:tgtEl>
+                                        <p:attrNameLst>
+                                          <p:attrName>style.visibility</p:attrName>
+                                        </p:attrNameLst>
+                                      </p:cBhvr>
+                                      <p:to>
+                                        <p:strVal val="visible"/>
+                                      </p:to>
+                                    </p:set>
+                                  </p:childTnLst>
+                                </p:cTn>
+                              </p:par>
+                            </p:childTnLst>
+                          </p:cTn>
+                        </p:par>
+                      </p:childTnLst>
+                    </p:cTn>
+                  </p:par>
+                  <p:par>
+                    <p:cTn id="13" fill="hold">
+                      <p:stCondLst>
+                        <p:cond delay="indefinite"/>
+                      </p:stCondLst>
+                      <p:childTnLst>
+                        <p:par>
+                          <p:cTn id="14" fill="hold">
+                            <p:stCondLst>
+                              <p:cond delay="0"/>
+                            </p:stCondLst>
+                            <p:childTnLst>
+                              <p:par>
+                                <p:cTn id="15" presetID="1" presetClass="entr" presetSubtype="0" fill="hold" nodeType="clickEffect">
+                                  <p:stCondLst>
+                                    <p:cond delay="0"/>
+                                  </p:stCondLst>
+                                  <p:childTnLst>
+                                    <p:set>
+                                      <p:cBhvr>
+                                        <p:cTn id="16" dur="1" fill="hold">
+                                          <p:stCondLst>
+                                            <p:cond delay="0"/>
+                                          </p:stCondLst>
+                                        </p:cTn>
+                                        <p:tgtEl>
+                                          <p:spTgt spid="14"/>
+                                        </p:tgtEl>
+                                        <p:attrNameLst>
+                                          <p:attrName>style.visibility</p:attrName>
+                                        </p:attrNameLst>
+                                      </p:cBhvr>
+                                      <p:to>
+                                        <p:strVal val="visible"/>
+                                      </p:to>
+                                    </p:set>
+                                  </p:childTnLst>
+                                </p:cTn>
+                              </p:par>
+                              <p:par>
+                                <p:cTn id="17" presetID="1" presetClass="entr" presetSubtype="0" fill="hold" nodeType="withEffect">
+                                  <p:stCondLst>
+                                    <p:cond delay="0"/>
+                                  </p:stCondLst>
+                                  <p:childTnLst>
+                                    <p:set>
+                                      <p:cBhvr>
+                                        <p:cTn id="18" dur="1" fill="hold">
+                                          <p:stCondLst>
+                                            <p:cond delay="0"/>
+                                          </p:stCondLst>
+                                        </p:cTn>
+                                        <p:tgtEl>
+                                          <p:spTgt spid="15"/>
+                                        </p:tgtEl>
+                                        <p:attrNameLst>
+                                          <p:attrName>style.visibility</p:attrName>
+                                        </p:attrNameLst>
+                                      </p:cBhvr>
+                                      <p:to>
+                                        <p:strVal val="visible"/>
+                                      </p:to>
+                                    </p:set>
+                                  </p:childTnLst>
+                                </p:cTn>
+                              </p:par>
+                            </p:childTnLst>
+                          </p:cTn>
+                        </p:par>
+                      </p:childTnLst>
+                    </p:cTn>
+                  </p:par>
+                </p:childTnLst>
+              </p:cTn>
+              <p:prevCondLst>
+                <p:cond evt="onPrev" delay="0">
+                  <p:tgtEl>
+                    <p:sldTgt/>
+                  </p:tgtEl>
+                </p:cond>
+              </p:prevCondLst>
+              <p:nextCondLst>
+                <p:cond evt="onNext" delay="0">
+                  <p:tgtEl>
+                    <p:sldTgt/>
+                  </p:tgtEl>
+                </p:cond>
+              </p:nextCondLst>
+            </p:seq>
+          </p:childTnLst>
+        </p:cTn>
+      </p:par>
+    </p:tnLst>
+  </p:timing>
 </p:sld>
 </file>
 
@@ -6930,7 +7486,7 @@
           <p:cNvPr id="2" name="Title 1">
             <a:extLst>
               <a:ext uri="{FF2B5EF4-FFF2-40B4-BE49-F238E27FC236}">
-                <a16:creationId xmlns:a16="http://schemas.microsoft.com/office/drawing/2014/main" id="{8988749B-7486-4842-8A1C-899970AF3027}"/>
+                <a16:creationId xmlns:a16="http://schemas.microsoft.com/office/drawing/2014/main" id="{6A628162-798A-4538-8A6C-FC1238C3186D}"/>
               </a:ext>
             </a:extLst>
           </p:cNvPr>
@@ -6939,31 +7495,6 @@
           </p:cNvSpPr>
           <p:nvPr>
             <p:ph type="title"/>
-          </p:nvPr>
-        </p:nvSpPr>
-        <p:spPr/>
-        <p:txBody>
-          <a:bodyPr/>
-          <a:lstStyle/>
-          <a:p>
-            <a:endParaRPr lang="es-CO"/>
-          </a:p>
-        </p:txBody>
-      </p:sp>
-      <p:sp>
-        <p:nvSpPr>
-          <p:cNvPr id="3" name="Content Placeholder 2">
-            <a:extLst>
-              <a:ext uri="{FF2B5EF4-FFF2-40B4-BE49-F238E27FC236}">
-                <a16:creationId xmlns:a16="http://schemas.microsoft.com/office/drawing/2014/main" id="{CF3F9270-7D54-4DA2-A41F-9C647B32A8F1}"/>
-              </a:ext>
-            </a:extLst>
-          </p:cNvPr>
-          <p:cNvSpPr>
-            <a:spLocks noGrp="1"/>
-          </p:cNvSpPr>
-          <p:nvPr>
-            <p:ph idx="1"/>
           </p:nvPr>
         </p:nvSpPr>
         <p:spPr/>
@@ -6977,10 +7508,10 @@
       </p:sp>
       <p:pic>
         <p:nvPicPr>
-          <p:cNvPr id="1026" name="Picture 2">
-            <a:extLst>
-              <a:ext uri="{FF2B5EF4-FFF2-40B4-BE49-F238E27FC236}">
-                <a16:creationId xmlns:a16="http://schemas.microsoft.com/office/drawing/2014/main" id="{EA9AD86C-A06C-419F-8E7A-B02E8B902591}"/>
+          <p:cNvPr id="4" name="Picture 3">
+            <a:extLst>
+              <a:ext uri="{FF2B5EF4-FFF2-40B4-BE49-F238E27FC236}">
+                <a16:creationId xmlns:a16="http://schemas.microsoft.com/office/drawing/2014/main" id="{B0F6E321-5004-4873-9D00-C2380181A485}"/>
               </a:ext>
             </a:extLst>
           </p:cNvPr>
@@ -6989,7 +7520,7 @@
           </p:cNvPicPr>
           <p:nvPr/>
         </p:nvPicPr>
-        <p:blipFill>
+        <p:blipFill rotWithShape="1">
           <a:blip r:embed="rId2">
             <a:extLst>
               <a:ext uri="{28A0092B-C50C-407E-A947-70E740481C1C}">
@@ -6997,15 +7528,13 @@
               </a:ext>
             </a:extLst>
           </a:blip>
-          <a:srcRect/>
-          <a:stretch>
-            <a:fillRect/>
-          </a:stretch>
+          <a:srcRect t="24971"/>
+          <a:stretch/>
         </p:blipFill>
         <p:spPr bwMode="auto">
           <a:xfrm>
-            <a:off x="494436" y="43699"/>
-            <a:ext cx="5328514" cy="3448050"/>
+            <a:off x="7048733" y="121920"/>
+            <a:ext cx="4451897" cy="2161440"/>
           </a:xfrm>
           <a:prstGeom prst="rect">
             <a:avLst/>
@@ -7024,35 +7553,35 @@
       </p:pic>
       <p:pic>
         <p:nvPicPr>
-          <p:cNvPr id="1028" name="Picture 4">
-            <a:extLst>
-              <a:ext uri="{FF2B5EF4-FFF2-40B4-BE49-F238E27FC236}">
-                <a16:creationId xmlns:a16="http://schemas.microsoft.com/office/drawing/2014/main" id="{A7457FA1-AC54-47BC-B050-39021494714D}"/>
+          <p:cNvPr id="5" name="Content Placeholder 4">
+            <a:extLst>
+              <a:ext uri="{FF2B5EF4-FFF2-40B4-BE49-F238E27FC236}">
+                <a16:creationId xmlns:a16="http://schemas.microsoft.com/office/drawing/2014/main" id="{672D74D5-2716-4695-8A50-41545F6E860E}"/>
               </a:ext>
             </a:extLst>
           </p:cNvPr>
           <p:cNvPicPr>
-            <a:picLocks noChangeAspect="1" noChangeArrowheads="1"/>
+            <a:picLocks noGrp="1" noChangeAspect="1" noChangeArrowheads="1"/>
           </p:cNvPicPr>
-          <p:nvPr/>
+          <p:nvPr>
+            <p:ph idx="1"/>
+          </p:nvPr>
         </p:nvPicPr>
-        <p:blipFill>
-          <a:blip r:embed="rId3">
+        <p:blipFill rotWithShape="1">
+          <a:blip r:embed="rId2">
             <a:extLst>
               <a:ext uri="{28A0092B-C50C-407E-A947-70E740481C1C}">
                 <a14:useLocalDpi xmlns:a14="http://schemas.microsoft.com/office/drawing/2010/main" val="0"/>
               </a:ext>
             </a:extLst>
           </a:blip>
-          <a:srcRect/>
-          <a:stretch>
-            <a:fillRect/>
-          </a:stretch>
+          <a:srcRect l="24165" t="2488" r="46525" b="91755"/>
+          <a:stretch/>
         </p:blipFill>
         <p:spPr bwMode="auto">
           <a:xfrm>
-            <a:off x="6166714" y="43699"/>
-            <a:ext cx="5328514" cy="3448050"/>
+            <a:off x="9611361" y="2032853"/>
+            <a:ext cx="1971040" cy="250507"/>
           </a:xfrm>
           <a:prstGeom prst="rect">
             <a:avLst/>
@@ -7071,10 +7600,10 @@
       </p:pic>
       <p:pic>
         <p:nvPicPr>
-          <p:cNvPr id="6" name="Picture 5">
-            <a:extLst>
-              <a:ext uri="{FF2B5EF4-FFF2-40B4-BE49-F238E27FC236}">
-                <a16:creationId xmlns:a16="http://schemas.microsoft.com/office/drawing/2014/main" id="{43A6B986-2E4C-46F9-B212-E30B2D1E2330}"/>
+          <p:cNvPr id="7" name="Picture 6">
+            <a:extLst>
+              <a:ext uri="{FF2B5EF4-FFF2-40B4-BE49-F238E27FC236}">
+                <a16:creationId xmlns:a16="http://schemas.microsoft.com/office/drawing/2014/main" id="{ECD8143D-DE4B-4A70-B851-978F3669E8BA}"/>
               </a:ext>
             </a:extLst>
           </p:cNvPr>
@@ -7084,15 +7613,231 @@
           <p:nvPr/>
         </p:nvPicPr>
         <p:blipFill>
-          <a:blip r:embed="rId4"/>
+          <a:blip r:embed="rId3"/>
           <a:stretch>
             <a:fillRect/>
           </a:stretch>
         </p:blipFill>
         <p:spPr>
           <a:xfrm>
-            <a:off x="6166714" y="3429000"/>
-            <a:ext cx="5328804" cy="3448050"/>
+            <a:off x="0" y="1028819"/>
+            <a:ext cx="12192000" cy="4800361"/>
+          </a:xfrm>
+          <a:prstGeom prst="rect">
+            <a:avLst/>
+          </a:prstGeom>
+        </p:spPr>
+      </p:pic>
+      <p:pic>
+        <p:nvPicPr>
+          <p:cNvPr id="8" name="Picture 7">
+            <a:extLst>
+              <a:ext uri="{FF2B5EF4-FFF2-40B4-BE49-F238E27FC236}">
+                <a16:creationId xmlns:a16="http://schemas.microsoft.com/office/drawing/2014/main" id="{AAA80F84-D3D9-4E53-B503-B89A505521BE}"/>
+              </a:ext>
+            </a:extLst>
+          </p:cNvPr>
+          <p:cNvPicPr>
+            <a:picLocks noChangeAspect="1"/>
+          </p:cNvPicPr>
+          <p:nvPr/>
+        </p:nvPicPr>
+        <p:blipFill rotWithShape="1">
+          <a:blip r:embed="rId4"/>
+          <a:srcRect t="92859"/>
+          <a:stretch/>
+        </p:blipFill>
+        <p:spPr>
+          <a:xfrm>
+            <a:off x="0" y="5567680"/>
+            <a:ext cx="12192000" cy="342780"/>
+          </a:xfrm>
+          <a:prstGeom prst="rect">
+            <a:avLst/>
+          </a:prstGeom>
+        </p:spPr>
+      </p:pic>
+    </p:spTree>
+    <p:extLst>
+      <p:ext uri="{BB962C8B-B14F-4D97-AF65-F5344CB8AC3E}">
+        <p14:creationId xmlns:p14="http://schemas.microsoft.com/office/powerpoint/2010/main" val="1422353585"/>
+      </p:ext>
+    </p:extLst>
+  </p:cSld>
+  <p:clrMapOvr>
+    <a:masterClrMapping/>
+  </p:clrMapOvr>
+  <p:timing>
+    <p:tnLst>
+      <p:par>
+        <p:cTn id="1" dur="indefinite" restart="never" nodeType="tmRoot">
+          <p:childTnLst>
+            <p:seq concurrent="1" nextAc="seek">
+              <p:cTn id="2" dur="indefinite" nodeType="mainSeq">
+                <p:childTnLst>
+                  <p:par>
+                    <p:cTn id="3" fill="hold">
+                      <p:stCondLst>
+                        <p:cond delay="indefinite"/>
+                        <p:cond evt="onBegin" delay="0">
+                          <p:tn val="2"/>
+                        </p:cond>
+                      </p:stCondLst>
+                      <p:childTnLst>
+                        <p:par>
+                          <p:cTn id="4" fill="hold">
+                            <p:stCondLst>
+                              <p:cond delay="0"/>
+                            </p:stCondLst>
+                            <p:childTnLst>
+                              <p:par>
+                                <p:cTn id="5" presetID="1" presetClass="entr" presetSubtype="0" fill="hold" nodeType="withEffect">
+                                  <p:stCondLst>
+                                    <p:cond delay="0"/>
+                                  </p:stCondLst>
+                                  <p:childTnLst>
+                                    <p:set>
+                                      <p:cBhvr>
+                                        <p:cTn id="6" dur="1" fill="hold">
+                                          <p:stCondLst>
+                                            <p:cond delay="0"/>
+                                          </p:stCondLst>
+                                        </p:cTn>
+                                        <p:tgtEl>
+                                          <p:spTgt spid="8"/>
+                                        </p:tgtEl>
+                                        <p:attrNameLst>
+                                          <p:attrName>style.visibility</p:attrName>
+                                        </p:attrNameLst>
+                                      </p:cBhvr>
+                                      <p:to>
+                                        <p:strVal val="visible"/>
+                                      </p:to>
+                                    </p:set>
+                                  </p:childTnLst>
+                                </p:cTn>
+                              </p:par>
+                            </p:childTnLst>
+                          </p:cTn>
+                        </p:par>
+                      </p:childTnLst>
+                    </p:cTn>
+                  </p:par>
+                </p:childTnLst>
+              </p:cTn>
+              <p:prevCondLst>
+                <p:cond evt="onPrev" delay="0">
+                  <p:tgtEl>
+                    <p:sldTgt/>
+                  </p:tgtEl>
+                </p:cond>
+              </p:prevCondLst>
+              <p:nextCondLst>
+                <p:cond evt="onNext" delay="0">
+                  <p:tgtEl>
+                    <p:sldTgt/>
+                  </p:tgtEl>
+                </p:cond>
+              </p:nextCondLst>
+            </p:seq>
+          </p:childTnLst>
+        </p:cTn>
+      </p:par>
+    </p:tnLst>
+  </p:timing>
+</p:sld>
+</file>
+
+<file path=ppt/slides/slide26.xml><?xml version="1.0" encoding="utf-8"?>
+<p:sld xmlns:a="http://schemas.openxmlformats.org/drawingml/2006/main" xmlns:r="http://schemas.openxmlformats.org/officeDocument/2006/relationships" xmlns:p="http://schemas.openxmlformats.org/presentationml/2006/main">
+  <p:cSld>
+    <p:spTree>
+      <p:nvGrpSpPr>
+        <p:cNvPr id="1" name=""/>
+        <p:cNvGrpSpPr/>
+        <p:nvPr/>
+      </p:nvGrpSpPr>
+      <p:grpSpPr>
+        <a:xfrm>
+          <a:off x="0" y="0"/>
+          <a:ext cx="0" cy="0"/>
+          <a:chOff x="0" y="0"/>
+          <a:chExt cx="0" cy="0"/>
+        </a:xfrm>
+      </p:grpSpPr>
+      <p:sp>
+        <p:nvSpPr>
+          <p:cNvPr id="2" name="Title 1">
+            <a:extLst>
+              <a:ext uri="{FF2B5EF4-FFF2-40B4-BE49-F238E27FC236}">
+                <a16:creationId xmlns:a16="http://schemas.microsoft.com/office/drawing/2014/main" id="{8106A647-6EEC-4E23-BF28-D46C24EDBDD7}"/>
+              </a:ext>
+            </a:extLst>
+          </p:cNvPr>
+          <p:cNvSpPr>
+            <a:spLocks noGrp="1"/>
+          </p:cNvSpPr>
+          <p:nvPr>
+            <p:ph type="title"/>
+          </p:nvPr>
+        </p:nvSpPr>
+        <p:spPr/>
+        <p:txBody>
+          <a:bodyPr/>
+          <a:lstStyle/>
+          <a:p>
+            <a:endParaRPr lang="es-CO"/>
+          </a:p>
+        </p:txBody>
+      </p:sp>
+      <p:sp>
+        <p:nvSpPr>
+          <p:cNvPr id="3" name="Content Placeholder 2">
+            <a:extLst>
+              <a:ext uri="{FF2B5EF4-FFF2-40B4-BE49-F238E27FC236}">
+                <a16:creationId xmlns:a16="http://schemas.microsoft.com/office/drawing/2014/main" id="{BFED9968-088F-47D4-B7F9-F9586F781954}"/>
+              </a:ext>
+            </a:extLst>
+          </p:cNvPr>
+          <p:cNvSpPr>
+            <a:spLocks noGrp="1"/>
+          </p:cNvSpPr>
+          <p:nvPr>
+            <p:ph idx="1"/>
+          </p:nvPr>
+        </p:nvSpPr>
+        <p:spPr/>
+        <p:txBody>
+          <a:bodyPr/>
+          <a:lstStyle/>
+          <a:p>
+            <a:endParaRPr lang="es-CO" dirty="0"/>
+          </a:p>
+        </p:txBody>
+      </p:sp>
+      <p:pic>
+        <p:nvPicPr>
+          <p:cNvPr id="4" name="Picture 3">
+            <a:extLst>
+              <a:ext uri="{FF2B5EF4-FFF2-40B4-BE49-F238E27FC236}">
+                <a16:creationId xmlns:a16="http://schemas.microsoft.com/office/drawing/2014/main" id="{0E3E5416-F5F4-4D53-99ED-DC67F6E3A689}"/>
+              </a:ext>
+            </a:extLst>
+          </p:cNvPr>
+          <p:cNvPicPr>
+            <a:picLocks noChangeAspect="1"/>
+          </p:cNvPicPr>
+          <p:nvPr/>
+        </p:nvPicPr>
+        <p:blipFill rotWithShape="1">
+          <a:blip r:embed="rId2"/>
+          <a:srcRect l="18502"/>
+          <a:stretch/>
+        </p:blipFill>
+        <p:spPr>
+          <a:xfrm>
+            <a:off x="7691120" y="101600"/>
+            <a:ext cx="4342878" cy="3448050"/>
           </a:xfrm>
           <a:prstGeom prst="rect">
             <a:avLst/>
@@ -7104,52 +7849,894 @@
           <p:cNvPr id="5" name="Picture 4">
             <a:extLst>
               <a:ext uri="{FF2B5EF4-FFF2-40B4-BE49-F238E27FC236}">
-                <a16:creationId xmlns:a16="http://schemas.microsoft.com/office/drawing/2014/main" id="{5C087763-FB24-45D9-ADD1-B5EDD4B9941C}"/>
+                <a16:creationId xmlns:a16="http://schemas.microsoft.com/office/drawing/2014/main" id="{CC245EF0-B33D-4841-A95B-6976DDC11B93}"/>
               </a:ext>
             </a:extLst>
           </p:cNvPr>
           <p:cNvPicPr>
-            <a:picLocks noChangeAspect="1" noChangeArrowheads="1"/>
+            <a:picLocks noChangeAspect="1"/>
+          </p:cNvPicPr>
+          <p:nvPr/>
+        </p:nvPicPr>
+        <p:blipFill rotWithShape="1">
+          <a:blip r:embed="rId2"/>
+          <a:srcRect l="961" t="15028" r="84358" b="73775"/>
+          <a:stretch/>
+        </p:blipFill>
+        <p:spPr>
+          <a:xfrm>
+            <a:off x="10903933" y="2824480"/>
+            <a:ext cx="899733" cy="444024"/>
+          </a:xfrm>
+          <a:prstGeom prst="rect">
+            <a:avLst/>
+          </a:prstGeom>
+        </p:spPr>
+      </p:pic>
+      <p:pic>
+        <p:nvPicPr>
+          <p:cNvPr id="7" name="Picture 6">
+            <a:extLst>
+              <a:ext uri="{FF2B5EF4-FFF2-40B4-BE49-F238E27FC236}">
+                <a16:creationId xmlns:a16="http://schemas.microsoft.com/office/drawing/2014/main" id="{119DF2D2-F20A-4267-A781-5058716CFBAF}"/>
+              </a:ext>
+            </a:extLst>
+          </p:cNvPr>
+          <p:cNvPicPr>
+            <a:picLocks noChangeAspect="1"/>
           </p:cNvPicPr>
           <p:nvPr/>
         </p:nvPicPr>
         <p:blipFill>
-          <a:blip r:embed="rId5">
-            <a:extLst>
-              <a:ext uri="{28A0092B-C50C-407E-A947-70E740481C1C}">
-                <a14:useLocalDpi xmlns:a14="http://schemas.microsoft.com/office/drawing/2010/main" val="0"/>
-              </a:ext>
-            </a:extLst>
-          </a:blip>
-          <a:srcRect/>
+          <a:blip r:embed="rId3"/>
           <a:stretch>
             <a:fillRect/>
           </a:stretch>
         </p:blipFill>
-        <p:spPr bwMode="auto">
-          <a:xfrm>
-            <a:off x="1135613" y="3822164"/>
-            <a:ext cx="4451897" cy="2880796"/>
+        <p:spPr>
+          <a:xfrm>
+            <a:off x="0" y="1028819"/>
+            <a:ext cx="12192000" cy="4800361"/>
           </a:xfrm>
           <a:prstGeom prst="rect">
             <a:avLst/>
           </a:prstGeom>
-          <a:noFill/>
-          <a:extLst>
-            <a:ext uri="{909E8E84-426E-40DD-AFC4-6F175D3DCCD1}">
-              <a14:hiddenFill xmlns:a14="http://schemas.microsoft.com/office/drawing/2010/main">
-                <a:solidFill>
-                  <a:srgbClr val="FFFFFF"/>
-                </a:solidFill>
-              </a14:hiddenFill>
-            </a:ext>
-          </a:extLst>
+        </p:spPr>
+      </p:pic>
+      <p:pic>
+        <p:nvPicPr>
+          <p:cNvPr id="8" name="Picture 7">
+            <a:extLst>
+              <a:ext uri="{FF2B5EF4-FFF2-40B4-BE49-F238E27FC236}">
+                <a16:creationId xmlns:a16="http://schemas.microsoft.com/office/drawing/2014/main" id="{7B7A0535-B889-4B74-95FA-E1E45C7FB378}"/>
+              </a:ext>
+            </a:extLst>
+          </p:cNvPr>
+          <p:cNvPicPr>
+            <a:picLocks noChangeAspect="1"/>
+          </p:cNvPicPr>
+          <p:nvPr/>
+        </p:nvPicPr>
+        <p:blipFill rotWithShape="1">
+          <a:blip r:embed="rId4"/>
+          <a:srcRect t="92859"/>
+          <a:stretch/>
+        </p:blipFill>
+        <p:spPr>
+          <a:xfrm>
+            <a:off x="0" y="5567680"/>
+            <a:ext cx="12192000" cy="342780"/>
+          </a:xfrm>
+          <a:prstGeom prst="rect">
+            <a:avLst/>
+          </a:prstGeom>
         </p:spPr>
       </p:pic>
     </p:spTree>
     <p:extLst>
       <p:ext uri="{BB962C8B-B14F-4D97-AF65-F5344CB8AC3E}">
-        <p14:creationId xmlns:p14="http://schemas.microsoft.com/office/powerpoint/2010/main" val="3813866145"/>
+        <p14:creationId xmlns:p14="http://schemas.microsoft.com/office/powerpoint/2010/main" val="3092206104"/>
+      </p:ext>
+    </p:extLst>
+  </p:cSld>
+  <p:clrMapOvr>
+    <a:masterClrMapping/>
+  </p:clrMapOvr>
+  <p:timing>
+    <p:tnLst>
+      <p:par>
+        <p:cTn id="1" dur="indefinite" restart="never" nodeType="tmRoot">
+          <p:childTnLst>
+            <p:seq concurrent="1" nextAc="seek">
+              <p:cTn id="2" dur="indefinite" nodeType="mainSeq">
+                <p:childTnLst>
+                  <p:par>
+                    <p:cTn id="3" fill="hold">
+                      <p:stCondLst>
+                        <p:cond delay="indefinite"/>
+                        <p:cond evt="onBegin" delay="0">
+                          <p:tn val="2"/>
+                        </p:cond>
+                      </p:stCondLst>
+                      <p:childTnLst>
+                        <p:par>
+                          <p:cTn id="4" fill="hold">
+                            <p:stCondLst>
+                              <p:cond delay="0"/>
+                            </p:stCondLst>
+                            <p:childTnLst>
+                              <p:par>
+                                <p:cTn id="5" presetID="1" presetClass="entr" presetSubtype="0" fill="hold" nodeType="withEffect">
+                                  <p:stCondLst>
+                                    <p:cond delay="0"/>
+                                  </p:stCondLst>
+                                  <p:childTnLst>
+                                    <p:set>
+                                      <p:cBhvr>
+                                        <p:cTn id="6" dur="1" fill="hold">
+                                          <p:stCondLst>
+                                            <p:cond delay="0"/>
+                                          </p:stCondLst>
+                                        </p:cTn>
+                                        <p:tgtEl>
+                                          <p:spTgt spid="8"/>
+                                        </p:tgtEl>
+                                        <p:attrNameLst>
+                                          <p:attrName>style.visibility</p:attrName>
+                                        </p:attrNameLst>
+                                      </p:cBhvr>
+                                      <p:to>
+                                        <p:strVal val="visible"/>
+                                      </p:to>
+                                    </p:set>
+                                  </p:childTnLst>
+                                </p:cTn>
+                              </p:par>
+                            </p:childTnLst>
+                          </p:cTn>
+                        </p:par>
+                      </p:childTnLst>
+                    </p:cTn>
+                  </p:par>
+                </p:childTnLst>
+              </p:cTn>
+              <p:prevCondLst>
+                <p:cond evt="onPrev" delay="0">
+                  <p:tgtEl>
+                    <p:sldTgt/>
+                  </p:tgtEl>
+                </p:cond>
+              </p:prevCondLst>
+              <p:nextCondLst>
+                <p:cond evt="onNext" delay="0">
+                  <p:tgtEl>
+                    <p:sldTgt/>
+                  </p:tgtEl>
+                </p:cond>
+              </p:nextCondLst>
+            </p:seq>
+          </p:childTnLst>
+        </p:cTn>
+      </p:par>
+    </p:tnLst>
+  </p:timing>
+</p:sld>
+</file>
+
+<file path=ppt/slides/slide27.xml><?xml version="1.0" encoding="utf-8"?>
+<p:sld xmlns:a="http://schemas.openxmlformats.org/drawingml/2006/main" xmlns:r="http://schemas.openxmlformats.org/officeDocument/2006/relationships" xmlns:p="http://schemas.openxmlformats.org/presentationml/2006/main">
+  <p:cSld>
+    <p:spTree>
+      <p:nvGrpSpPr>
+        <p:cNvPr id="1" name=""/>
+        <p:cNvGrpSpPr/>
+        <p:nvPr/>
+      </p:nvGrpSpPr>
+      <p:grpSpPr>
+        <a:xfrm>
+          <a:off x="0" y="0"/>
+          <a:ext cx="0" cy="0"/>
+          <a:chOff x="0" y="0"/>
+          <a:chExt cx="0" cy="0"/>
+        </a:xfrm>
+      </p:grpSpPr>
+      <p:sp>
+        <p:nvSpPr>
+          <p:cNvPr id="2" name="Title 1">
+            <a:extLst>
+              <a:ext uri="{FF2B5EF4-FFF2-40B4-BE49-F238E27FC236}">
+                <a16:creationId xmlns:a16="http://schemas.microsoft.com/office/drawing/2014/main" id="{4DFAA3E9-0286-4100-A0B1-ECAB6F0BEDC1}"/>
+              </a:ext>
+            </a:extLst>
+          </p:cNvPr>
+          <p:cNvSpPr>
+            <a:spLocks noGrp="1"/>
+          </p:cNvSpPr>
+          <p:nvPr>
+            <p:ph type="title"/>
+          </p:nvPr>
+        </p:nvSpPr>
+        <p:spPr/>
+        <p:txBody>
+          <a:bodyPr/>
+          <a:lstStyle/>
+          <a:p>
+            <a:endParaRPr lang="es-CO"/>
+          </a:p>
+        </p:txBody>
+      </p:sp>
+      <p:sp>
+        <p:nvSpPr>
+          <p:cNvPr id="3" name="Content Placeholder 2">
+            <a:extLst>
+              <a:ext uri="{FF2B5EF4-FFF2-40B4-BE49-F238E27FC236}">
+                <a16:creationId xmlns:a16="http://schemas.microsoft.com/office/drawing/2014/main" id="{D589FDBF-04D5-473F-85C0-1FA80CDD0C90}"/>
+              </a:ext>
+            </a:extLst>
+          </p:cNvPr>
+          <p:cNvSpPr>
+            <a:spLocks noGrp="1"/>
+          </p:cNvSpPr>
+          <p:nvPr>
+            <p:ph idx="1"/>
+          </p:nvPr>
+        </p:nvSpPr>
+        <p:spPr/>
+        <p:txBody>
+          <a:bodyPr/>
+          <a:lstStyle/>
+          <a:p>
+            <a:endParaRPr lang="es-CO"/>
+          </a:p>
+        </p:txBody>
+      </p:sp>
+      <p:pic>
+        <p:nvPicPr>
+          <p:cNvPr id="5" name="Picture 4">
+            <a:extLst>
+              <a:ext uri="{FF2B5EF4-FFF2-40B4-BE49-F238E27FC236}">
+                <a16:creationId xmlns:a16="http://schemas.microsoft.com/office/drawing/2014/main" id="{19C691A6-06ED-4560-AB11-645581CE0BFA}"/>
+              </a:ext>
+            </a:extLst>
+          </p:cNvPr>
+          <p:cNvPicPr>
+            <a:picLocks noChangeAspect="1"/>
+          </p:cNvPicPr>
+          <p:nvPr/>
+        </p:nvPicPr>
+        <p:blipFill>
+          <a:blip r:embed="rId2"/>
+          <a:stretch>
+            <a:fillRect/>
+          </a:stretch>
+        </p:blipFill>
+        <p:spPr>
+          <a:xfrm>
+            <a:off x="0" y="1028819"/>
+            <a:ext cx="12192000" cy="4800361"/>
+          </a:xfrm>
+          <a:prstGeom prst="rect">
+            <a:avLst/>
+          </a:prstGeom>
+        </p:spPr>
+      </p:pic>
+      <p:pic>
+        <p:nvPicPr>
+          <p:cNvPr id="6" name="Picture 5">
+            <a:extLst>
+              <a:ext uri="{FF2B5EF4-FFF2-40B4-BE49-F238E27FC236}">
+                <a16:creationId xmlns:a16="http://schemas.microsoft.com/office/drawing/2014/main" id="{A6821B05-F5F3-4D8E-832A-EB5822E0784B}"/>
+              </a:ext>
+            </a:extLst>
+          </p:cNvPr>
+          <p:cNvPicPr>
+            <a:picLocks noChangeAspect="1"/>
+          </p:cNvPicPr>
+          <p:nvPr/>
+        </p:nvPicPr>
+        <p:blipFill rotWithShape="1">
+          <a:blip r:embed="rId3"/>
+          <a:srcRect t="92859"/>
+          <a:stretch/>
+        </p:blipFill>
+        <p:spPr>
+          <a:xfrm>
+            <a:off x="0" y="5567680"/>
+            <a:ext cx="12192000" cy="342780"/>
+          </a:xfrm>
+          <a:prstGeom prst="rect">
+            <a:avLst/>
+          </a:prstGeom>
+        </p:spPr>
+      </p:pic>
+    </p:spTree>
+    <p:extLst>
+      <p:ext uri="{BB962C8B-B14F-4D97-AF65-F5344CB8AC3E}">
+        <p14:creationId xmlns:p14="http://schemas.microsoft.com/office/powerpoint/2010/main" val="3028807690"/>
+      </p:ext>
+    </p:extLst>
+  </p:cSld>
+  <p:clrMapOvr>
+    <a:masterClrMapping/>
+  </p:clrMapOvr>
+  <p:timing>
+    <p:tnLst>
+      <p:par>
+        <p:cTn id="1" dur="indefinite" restart="never" nodeType="tmRoot">
+          <p:childTnLst>
+            <p:seq concurrent="1" nextAc="seek">
+              <p:cTn id="2" dur="indefinite" nodeType="mainSeq">
+                <p:childTnLst>
+                  <p:par>
+                    <p:cTn id="3" fill="hold">
+                      <p:stCondLst>
+                        <p:cond delay="indefinite"/>
+                        <p:cond evt="onBegin" delay="0">
+                          <p:tn val="2"/>
+                        </p:cond>
+                      </p:stCondLst>
+                      <p:childTnLst>
+                        <p:par>
+                          <p:cTn id="4" fill="hold">
+                            <p:stCondLst>
+                              <p:cond delay="0"/>
+                            </p:stCondLst>
+                            <p:childTnLst>
+                              <p:par>
+                                <p:cTn id="5" presetID="1" presetClass="entr" presetSubtype="0" fill="hold" nodeType="withEffect">
+                                  <p:stCondLst>
+                                    <p:cond delay="0"/>
+                                  </p:stCondLst>
+                                  <p:childTnLst>
+                                    <p:set>
+                                      <p:cBhvr>
+                                        <p:cTn id="6" dur="1" fill="hold">
+                                          <p:stCondLst>
+                                            <p:cond delay="0"/>
+                                          </p:stCondLst>
+                                        </p:cTn>
+                                        <p:tgtEl>
+                                          <p:spTgt spid="6"/>
+                                        </p:tgtEl>
+                                        <p:attrNameLst>
+                                          <p:attrName>style.visibility</p:attrName>
+                                        </p:attrNameLst>
+                                      </p:cBhvr>
+                                      <p:to>
+                                        <p:strVal val="visible"/>
+                                      </p:to>
+                                    </p:set>
+                                  </p:childTnLst>
+                                </p:cTn>
+                              </p:par>
+                            </p:childTnLst>
+                          </p:cTn>
+                        </p:par>
+                      </p:childTnLst>
+                    </p:cTn>
+                  </p:par>
+                </p:childTnLst>
+              </p:cTn>
+              <p:prevCondLst>
+                <p:cond evt="onPrev" delay="0">
+                  <p:tgtEl>
+                    <p:sldTgt/>
+                  </p:tgtEl>
+                </p:cond>
+              </p:prevCondLst>
+              <p:nextCondLst>
+                <p:cond evt="onNext" delay="0">
+                  <p:tgtEl>
+                    <p:sldTgt/>
+                  </p:tgtEl>
+                </p:cond>
+              </p:nextCondLst>
+            </p:seq>
+          </p:childTnLst>
+        </p:cTn>
+      </p:par>
+    </p:tnLst>
+  </p:timing>
+</p:sld>
+</file>
+
+<file path=ppt/slides/slide28.xml><?xml version="1.0" encoding="utf-8"?>
+<p:sld xmlns:a="http://schemas.openxmlformats.org/drawingml/2006/main" xmlns:r="http://schemas.openxmlformats.org/officeDocument/2006/relationships" xmlns:p="http://schemas.openxmlformats.org/presentationml/2006/main">
+  <p:cSld>
+    <p:spTree>
+      <p:nvGrpSpPr>
+        <p:cNvPr id="1" name=""/>
+        <p:cNvGrpSpPr/>
+        <p:nvPr/>
+      </p:nvGrpSpPr>
+      <p:grpSpPr>
+        <a:xfrm>
+          <a:off x="0" y="0"/>
+          <a:ext cx="0" cy="0"/>
+          <a:chOff x="0" y="0"/>
+          <a:chExt cx="0" cy="0"/>
+        </a:xfrm>
+      </p:grpSpPr>
+      <p:sp>
+        <p:nvSpPr>
+          <p:cNvPr id="2" name="Title 1">
+            <a:extLst>
+              <a:ext uri="{FF2B5EF4-FFF2-40B4-BE49-F238E27FC236}">
+                <a16:creationId xmlns:a16="http://schemas.microsoft.com/office/drawing/2014/main" id="{C3921915-77DC-4A20-A1B1-CE29A3E40880}"/>
+              </a:ext>
+            </a:extLst>
+          </p:cNvPr>
+          <p:cNvSpPr>
+            <a:spLocks noGrp="1"/>
+          </p:cNvSpPr>
+          <p:nvPr>
+            <p:ph type="title"/>
+          </p:nvPr>
+        </p:nvSpPr>
+        <p:spPr/>
+        <p:txBody>
+          <a:bodyPr/>
+          <a:lstStyle/>
+          <a:p>
+            <a:r>
+              <a:rPr lang="es-CO" dirty="0"/>
+              <a:t>Consumo de la red</a:t>
+            </a:r>
+          </a:p>
+        </p:txBody>
+      </p:sp>
+      <p:sp>
+        <p:nvSpPr>
+          <p:cNvPr id="3" name="Content Placeholder 2">
+            <a:extLst>
+              <a:ext uri="{FF2B5EF4-FFF2-40B4-BE49-F238E27FC236}">
+                <a16:creationId xmlns:a16="http://schemas.microsoft.com/office/drawing/2014/main" id="{A166D014-CB64-4AA4-B8E3-55CD00F657B4}"/>
+              </a:ext>
+            </a:extLst>
+          </p:cNvPr>
+          <p:cNvSpPr>
+            <a:spLocks noGrp="1"/>
+          </p:cNvSpPr>
+          <p:nvPr>
+            <p:ph idx="1"/>
+          </p:nvPr>
+        </p:nvSpPr>
+        <p:spPr/>
+        <p:txBody>
+          <a:bodyPr/>
+          <a:lstStyle/>
+          <a:p>
+            <a:endParaRPr lang="es-CO"/>
+          </a:p>
+        </p:txBody>
+      </p:sp>
+      <p:pic>
+        <p:nvPicPr>
+          <p:cNvPr id="14" name="Picture 13">
+            <a:extLst>
+              <a:ext uri="{FF2B5EF4-FFF2-40B4-BE49-F238E27FC236}">
+                <a16:creationId xmlns:a16="http://schemas.microsoft.com/office/drawing/2014/main" id="{68F2B884-833A-4B68-ACCD-B54BBF4D7568}"/>
+              </a:ext>
+            </a:extLst>
+          </p:cNvPr>
+          <p:cNvPicPr>
+            <a:picLocks noChangeAspect="1"/>
+          </p:cNvPicPr>
+          <p:nvPr/>
+        </p:nvPicPr>
+        <p:blipFill>
+          <a:blip r:embed="rId2"/>
+          <a:stretch>
+            <a:fillRect/>
+          </a:stretch>
+        </p:blipFill>
+        <p:spPr>
+          <a:xfrm>
+            <a:off x="0" y="1028819"/>
+            <a:ext cx="12192000" cy="4800361"/>
+          </a:xfrm>
+          <a:prstGeom prst="rect">
+            <a:avLst/>
+          </a:prstGeom>
+        </p:spPr>
+      </p:pic>
+      <p:pic>
+        <p:nvPicPr>
+          <p:cNvPr id="17" name="Picture 16">
+            <a:extLst>
+              <a:ext uri="{FF2B5EF4-FFF2-40B4-BE49-F238E27FC236}">
+                <a16:creationId xmlns:a16="http://schemas.microsoft.com/office/drawing/2014/main" id="{F82EA194-27F7-4673-A3BD-6BC9036B9EA3}"/>
+              </a:ext>
+            </a:extLst>
+          </p:cNvPr>
+          <p:cNvPicPr>
+            <a:picLocks noChangeAspect="1"/>
+          </p:cNvPicPr>
+          <p:nvPr/>
+        </p:nvPicPr>
+        <p:blipFill>
+          <a:blip r:embed="rId3">
+            <a:clrChange>
+              <a:clrFrom>
+                <a:srgbClr val="FFFFFF"/>
+              </a:clrFrom>
+              <a:clrTo>
+                <a:srgbClr val="FFFFFF">
+                  <a:alpha val="0"/>
+                </a:srgbClr>
+              </a:clrTo>
+            </a:clrChange>
+          </a:blip>
+          <a:stretch>
+            <a:fillRect/>
+          </a:stretch>
+        </p:blipFill>
+        <p:spPr>
+          <a:xfrm>
+            <a:off x="0" y="1028819"/>
+            <a:ext cx="12192000" cy="4800361"/>
+          </a:xfrm>
+          <a:prstGeom prst="rect">
+            <a:avLst/>
+          </a:prstGeom>
+        </p:spPr>
+      </p:pic>
+      <p:pic>
+        <p:nvPicPr>
+          <p:cNvPr id="18" name="Picture 17">
+            <a:extLst>
+              <a:ext uri="{FF2B5EF4-FFF2-40B4-BE49-F238E27FC236}">
+                <a16:creationId xmlns:a16="http://schemas.microsoft.com/office/drawing/2014/main" id="{52EE9E84-34BC-461F-9485-C5ACD555262B}"/>
+              </a:ext>
+            </a:extLst>
+          </p:cNvPr>
+          <p:cNvPicPr>
+            <a:picLocks noChangeAspect="1"/>
+          </p:cNvPicPr>
+          <p:nvPr/>
+        </p:nvPicPr>
+        <p:blipFill rotWithShape="1">
+          <a:blip r:embed="rId2"/>
+          <a:srcRect l="29417" r="49999" b="66615"/>
+          <a:stretch/>
+        </p:blipFill>
+        <p:spPr>
+          <a:xfrm>
+            <a:off x="3586480" y="1028819"/>
+            <a:ext cx="2509520" cy="1602621"/>
+          </a:xfrm>
+          <a:prstGeom prst="rect">
+            <a:avLst/>
+          </a:prstGeom>
+        </p:spPr>
+      </p:pic>
+      <p:pic>
+        <p:nvPicPr>
+          <p:cNvPr id="19" name="Picture 18">
+            <a:extLst>
+              <a:ext uri="{FF2B5EF4-FFF2-40B4-BE49-F238E27FC236}">
+                <a16:creationId xmlns:a16="http://schemas.microsoft.com/office/drawing/2014/main" id="{4B098869-FA4A-498E-B87A-036379DC2D00}"/>
+              </a:ext>
+            </a:extLst>
+          </p:cNvPr>
+          <p:cNvPicPr>
+            <a:picLocks noChangeAspect="1"/>
+          </p:cNvPicPr>
+          <p:nvPr/>
+        </p:nvPicPr>
+        <p:blipFill rotWithShape="1">
+          <a:blip r:embed="rId2"/>
+          <a:srcRect l="73209" b="66615"/>
+          <a:stretch/>
+        </p:blipFill>
+        <p:spPr>
+          <a:xfrm>
+            <a:off x="8925560" y="1026757"/>
+            <a:ext cx="3266440" cy="1602621"/>
+          </a:xfrm>
+          <a:prstGeom prst="rect">
+            <a:avLst/>
+          </a:prstGeom>
+        </p:spPr>
+      </p:pic>
+    </p:spTree>
+    <p:extLst>
+      <p:ext uri="{BB962C8B-B14F-4D97-AF65-F5344CB8AC3E}">
+        <p14:creationId xmlns:p14="http://schemas.microsoft.com/office/powerpoint/2010/main" val="2697238453"/>
+      </p:ext>
+    </p:extLst>
+  </p:cSld>
+  <p:clrMapOvr>
+    <a:masterClrMapping/>
+  </p:clrMapOvr>
+  <p:timing>
+    <p:tnLst>
+      <p:par>
+        <p:cTn id="1" dur="indefinite" restart="never" nodeType="tmRoot">
+          <p:childTnLst>
+            <p:seq concurrent="1" nextAc="seek">
+              <p:cTn id="2" dur="indefinite" nodeType="mainSeq">
+                <p:childTnLst>
+                  <p:par>
+                    <p:cTn id="3" fill="hold">
+                      <p:stCondLst>
+                        <p:cond delay="indefinite"/>
+                      </p:stCondLst>
+                      <p:childTnLst>
+                        <p:par>
+                          <p:cTn id="4" fill="hold">
+                            <p:stCondLst>
+                              <p:cond delay="0"/>
+                            </p:stCondLst>
+                            <p:childTnLst>
+                              <p:par>
+                                <p:cTn id="5" presetID="1" presetClass="entr" presetSubtype="0" fill="hold" nodeType="clickEffect">
+                                  <p:stCondLst>
+                                    <p:cond delay="0"/>
+                                  </p:stCondLst>
+                                  <p:childTnLst>
+                                    <p:set>
+                                      <p:cBhvr>
+                                        <p:cTn id="6" dur="1" fill="hold">
+                                          <p:stCondLst>
+                                            <p:cond delay="0"/>
+                                          </p:stCondLst>
+                                        </p:cTn>
+                                        <p:tgtEl>
+                                          <p:spTgt spid="17"/>
+                                        </p:tgtEl>
+                                        <p:attrNameLst>
+                                          <p:attrName>style.visibility</p:attrName>
+                                        </p:attrNameLst>
+                                      </p:cBhvr>
+                                      <p:to>
+                                        <p:strVal val="visible"/>
+                                      </p:to>
+                                    </p:set>
+                                  </p:childTnLst>
+                                </p:cTn>
+                              </p:par>
+                            </p:childTnLst>
+                          </p:cTn>
+                        </p:par>
+                      </p:childTnLst>
+                    </p:cTn>
+                  </p:par>
+                  <p:par>
+                    <p:cTn id="7" fill="hold">
+                      <p:stCondLst>
+                        <p:cond delay="indefinite"/>
+                      </p:stCondLst>
+                      <p:childTnLst>
+                        <p:par>
+                          <p:cTn id="8" fill="hold">
+                            <p:stCondLst>
+                              <p:cond delay="0"/>
+                            </p:stCondLst>
+                            <p:childTnLst>
+                              <p:par>
+                                <p:cTn id="9" presetID="10" presetClass="exit" presetSubtype="0" fill="hold" nodeType="clickEffect">
+                                  <p:stCondLst>
+                                    <p:cond delay="0"/>
+                                  </p:stCondLst>
+                                  <p:childTnLst>
+                                    <p:animEffect transition="out" filter="fade">
+                                      <p:cBhvr>
+                                        <p:cTn id="10" dur="500"/>
+                                        <p:tgtEl>
+                                          <p:spTgt spid="14"/>
+                                        </p:tgtEl>
+                                      </p:cBhvr>
+                                    </p:animEffect>
+                                    <p:set>
+                                      <p:cBhvr>
+                                        <p:cTn id="11" dur="1" fill="hold">
+                                          <p:stCondLst>
+                                            <p:cond delay="499"/>
+                                          </p:stCondLst>
+                                        </p:cTn>
+                                        <p:tgtEl>
+                                          <p:spTgt spid="14"/>
+                                        </p:tgtEl>
+                                        <p:attrNameLst>
+                                          <p:attrName>style.visibility</p:attrName>
+                                        </p:attrNameLst>
+                                      </p:cBhvr>
+                                      <p:to>
+                                        <p:strVal val="hidden"/>
+                                      </p:to>
+                                    </p:set>
+                                  </p:childTnLst>
+                                </p:cTn>
+                              </p:par>
+                              <p:par>
+                                <p:cTn id="12" presetID="1" presetClass="entr" presetSubtype="0" fill="hold" nodeType="withEffect">
+                                  <p:stCondLst>
+                                    <p:cond delay="0"/>
+                                  </p:stCondLst>
+                                  <p:childTnLst>
+                                    <p:set>
+                                      <p:cBhvr>
+                                        <p:cTn id="13" dur="1" fill="hold">
+                                          <p:stCondLst>
+                                            <p:cond delay="0"/>
+                                          </p:stCondLst>
+                                        </p:cTn>
+                                        <p:tgtEl>
+                                          <p:spTgt spid="18"/>
+                                        </p:tgtEl>
+                                        <p:attrNameLst>
+                                          <p:attrName>style.visibility</p:attrName>
+                                        </p:attrNameLst>
+                                      </p:cBhvr>
+                                      <p:to>
+                                        <p:strVal val="visible"/>
+                                      </p:to>
+                                    </p:set>
+                                  </p:childTnLst>
+                                </p:cTn>
+                              </p:par>
+                              <p:par>
+                                <p:cTn id="14" presetID="1" presetClass="entr" presetSubtype="0" fill="hold" nodeType="withEffect">
+                                  <p:stCondLst>
+                                    <p:cond delay="0"/>
+                                  </p:stCondLst>
+                                  <p:childTnLst>
+                                    <p:set>
+                                      <p:cBhvr>
+                                        <p:cTn id="15" dur="1" fill="hold">
+                                          <p:stCondLst>
+                                            <p:cond delay="0"/>
+                                          </p:stCondLst>
+                                        </p:cTn>
+                                        <p:tgtEl>
+                                          <p:spTgt spid="19"/>
+                                        </p:tgtEl>
+                                        <p:attrNameLst>
+                                          <p:attrName>style.visibility</p:attrName>
+                                        </p:attrNameLst>
+                                      </p:cBhvr>
+                                      <p:to>
+                                        <p:strVal val="visible"/>
+                                      </p:to>
+                                    </p:set>
+                                  </p:childTnLst>
+                                </p:cTn>
+                              </p:par>
+                            </p:childTnLst>
+                          </p:cTn>
+                        </p:par>
+                      </p:childTnLst>
+                    </p:cTn>
+                  </p:par>
+                </p:childTnLst>
+              </p:cTn>
+              <p:prevCondLst>
+                <p:cond evt="onPrev" delay="0">
+                  <p:tgtEl>
+                    <p:sldTgt/>
+                  </p:tgtEl>
+                </p:cond>
+              </p:prevCondLst>
+              <p:nextCondLst>
+                <p:cond evt="onNext" delay="0">
+                  <p:tgtEl>
+                    <p:sldTgt/>
+                  </p:tgtEl>
+                </p:cond>
+              </p:nextCondLst>
+            </p:seq>
+          </p:childTnLst>
+        </p:cTn>
+      </p:par>
+    </p:tnLst>
+  </p:timing>
+</p:sld>
+</file>
+
+<file path=ppt/slides/slide29.xml><?xml version="1.0" encoding="utf-8"?>
+<p:sld xmlns:a="http://schemas.openxmlformats.org/drawingml/2006/main" xmlns:r="http://schemas.openxmlformats.org/officeDocument/2006/relationships" xmlns:p="http://schemas.openxmlformats.org/presentationml/2006/main">
+  <p:cSld>
+    <p:spTree>
+      <p:nvGrpSpPr>
+        <p:cNvPr id="1" name=""/>
+        <p:cNvGrpSpPr/>
+        <p:nvPr/>
+      </p:nvGrpSpPr>
+      <p:grpSpPr>
+        <a:xfrm>
+          <a:off x="0" y="0"/>
+          <a:ext cx="0" cy="0"/>
+          <a:chOff x="0" y="0"/>
+          <a:chExt cx="0" cy="0"/>
+        </a:xfrm>
+      </p:grpSpPr>
+      <p:sp>
+        <p:nvSpPr>
+          <p:cNvPr id="2" name="Title 1">
+            <a:extLst>
+              <a:ext uri="{FF2B5EF4-FFF2-40B4-BE49-F238E27FC236}">
+                <a16:creationId xmlns:a16="http://schemas.microsoft.com/office/drawing/2014/main" id="{A3965023-1666-4485-9FFF-38D52182F417}"/>
+              </a:ext>
+            </a:extLst>
+          </p:cNvPr>
+          <p:cNvSpPr>
+            <a:spLocks noGrp="1"/>
+          </p:cNvSpPr>
+          <p:nvPr>
+            <p:ph type="title"/>
+          </p:nvPr>
+        </p:nvSpPr>
+        <p:spPr/>
+        <p:txBody>
+          <a:bodyPr/>
+          <a:lstStyle/>
+          <a:p>
+            <a:r>
+              <a:rPr lang="es-CO" dirty="0"/>
+              <a:t>Consumo</a:t>
+            </a:r>
+          </a:p>
+        </p:txBody>
+      </p:sp>
+      <p:sp>
+        <p:nvSpPr>
+          <p:cNvPr id="3" name="Content Placeholder 2">
+            <a:extLst>
+              <a:ext uri="{FF2B5EF4-FFF2-40B4-BE49-F238E27FC236}">
+                <a16:creationId xmlns:a16="http://schemas.microsoft.com/office/drawing/2014/main" id="{3869A327-7EB4-4042-B471-74679C37ABB2}"/>
+              </a:ext>
+            </a:extLst>
+          </p:cNvPr>
+          <p:cNvSpPr>
+            <a:spLocks noGrp="1"/>
+          </p:cNvSpPr>
+          <p:nvPr>
+            <p:ph idx="1"/>
+          </p:nvPr>
+        </p:nvSpPr>
+        <p:spPr/>
+        <p:txBody>
+          <a:bodyPr/>
+          <a:lstStyle/>
+          <a:p>
+            <a:endParaRPr lang="es-CO"/>
+          </a:p>
+        </p:txBody>
+      </p:sp>
+      <p:pic>
+        <p:nvPicPr>
+          <p:cNvPr id="5" name="Picture 4">
+            <a:extLst>
+              <a:ext uri="{FF2B5EF4-FFF2-40B4-BE49-F238E27FC236}">
+                <a16:creationId xmlns:a16="http://schemas.microsoft.com/office/drawing/2014/main" id="{09563035-2915-401D-B78E-BBDD231A08BB}"/>
+              </a:ext>
+            </a:extLst>
+          </p:cNvPr>
+          <p:cNvPicPr>
+            <a:picLocks noChangeAspect="1"/>
+          </p:cNvPicPr>
+          <p:nvPr/>
+        </p:nvPicPr>
+        <p:blipFill rotWithShape="1">
+          <a:blip r:embed="rId2"/>
+          <a:srcRect l="7468" r="5751"/>
+          <a:stretch/>
+        </p:blipFill>
+        <p:spPr>
+          <a:xfrm>
+            <a:off x="848360" y="1027906"/>
+            <a:ext cx="10660149" cy="4800361"/>
+          </a:xfrm>
+          <a:prstGeom prst="rect">
+            <a:avLst/>
+          </a:prstGeom>
+        </p:spPr>
+      </p:pic>
+    </p:spTree>
+    <p:extLst>
+      <p:ext uri="{BB962C8B-B14F-4D97-AF65-F5344CB8AC3E}">
+        <p14:creationId xmlns:p14="http://schemas.microsoft.com/office/powerpoint/2010/main" val="36860601"/>
       </p:ext>
     </p:extLst>
   </p:cSld>
@@ -7236,6 +8823,1396 @@
     <p:extLst>
       <p:ext uri="{BB962C8B-B14F-4D97-AF65-F5344CB8AC3E}">
         <p14:creationId xmlns:p14="http://schemas.microsoft.com/office/powerpoint/2010/main" val="3104570698"/>
+      </p:ext>
+    </p:extLst>
+  </p:cSld>
+  <p:clrMapOvr>
+    <a:masterClrMapping/>
+  </p:clrMapOvr>
+</p:sld>
+</file>
+
+<file path=ppt/slides/slide30.xml><?xml version="1.0" encoding="utf-8"?>
+<p:sld xmlns:a="http://schemas.openxmlformats.org/drawingml/2006/main" xmlns:r="http://schemas.openxmlformats.org/officeDocument/2006/relationships" xmlns:p="http://schemas.openxmlformats.org/presentationml/2006/main">
+  <p:cSld>
+    <p:spTree>
+      <p:nvGrpSpPr>
+        <p:cNvPr id="1" name=""/>
+        <p:cNvGrpSpPr/>
+        <p:nvPr/>
+      </p:nvGrpSpPr>
+      <p:grpSpPr>
+        <a:xfrm>
+          <a:off x="0" y="0"/>
+          <a:ext cx="0" cy="0"/>
+          <a:chOff x="0" y="0"/>
+          <a:chExt cx="0" cy="0"/>
+        </a:xfrm>
+      </p:grpSpPr>
+      <p:sp>
+        <p:nvSpPr>
+          <p:cNvPr id="2" name="Title 1">
+            <a:extLst>
+              <a:ext uri="{FF2B5EF4-FFF2-40B4-BE49-F238E27FC236}">
+                <a16:creationId xmlns:a16="http://schemas.microsoft.com/office/drawing/2014/main" id="{3EE2637C-A9FF-4A15-95F8-6A99E43DA900}"/>
+              </a:ext>
+            </a:extLst>
+          </p:cNvPr>
+          <p:cNvSpPr>
+            <a:spLocks noGrp="1"/>
+          </p:cNvSpPr>
+          <p:nvPr>
+            <p:ph type="title"/>
+          </p:nvPr>
+        </p:nvSpPr>
+        <p:spPr/>
+        <p:txBody>
+          <a:bodyPr/>
+          <a:lstStyle/>
+          <a:p>
+            <a:endParaRPr lang="es-CO"/>
+          </a:p>
+        </p:txBody>
+      </p:sp>
+      <p:sp>
+        <p:nvSpPr>
+          <p:cNvPr id="3" name="Content Placeholder 2">
+            <a:extLst>
+              <a:ext uri="{FF2B5EF4-FFF2-40B4-BE49-F238E27FC236}">
+                <a16:creationId xmlns:a16="http://schemas.microsoft.com/office/drawing/2014/main" id="{225992B5-6EE2-4F55-B529-4346979A7EC9}"/>
+              </a:ext>
+            </a:extLst>
+          </p:cNvPr>
+          <p:cNvSpPr>
+            <a:spLocks noGrp="1"/>
+          </p:cNvSpPr>
+          <p:nvPr>
+            <p:ph idx="1"/>
+          </p:nvPr>
+        </p:nvSpPr>
+        <p:spPr/>
+        <p:txBody>
+          <a:bodyPr/>
+          <a:lstStyle/>
+          <a:p>
+            <a:endParaRPr lang="es-CO"/>
+          </a:p>
+        </p:txBody>
+      </p:sp>
+      <p:pic>
+        <p:nvPicPr>
+          <p:cNvPr id="5" name="Picture 4">
+            <a:extLst>
+              <a:ext uri="{FF2B5EF4-FFF2-40B4-BE49-F238E27FC236}">
+                <a16:creationId xmlns:a16="http://schemas.microsoft.com/office/drawing/2014/main" id="{EDC7C0F4-C76B-4313-BF3C-0AEB27FAB3D5}"/>
+              </a:ext>
+            </a:extLst>
+          </p:cNvPr>
+          <p:cNvPicPr>
+            <a:picLocks noChangeAspect="1"/>
+          </p:cNvPicPr>
+          <p:nvPr/>
+        </p:nvPicPr>
+        <p:blipFill>
+          <a:blip r:embed="rId2"/>
+          <a:stretch>
+            <a:fillRect/>
+          </a:stretch>
+        </p:blipFill>
+        <p:spPr>
+          <a:xfrm>
+            <a:off x="0" y="1028819"/>
+            <a:ext cx="12192000" cy="4800361"/>
+          </a:xfrm>
+          <a:prstGeom prst="rect">
+            <a:avLst/>
+          </a:prstGeom>
+        </p:spPr>
+      </p:pic>
+      <p:sp>
+        <p:nvSpPr>
+          <p:cNvPr id="6" name="TextBox 5">
+            <a:extLst>
+              <a:ext uri="{FF2B5EF4-FFF2-40B4-BE49-F238E27FC236}">
+                <a16:creationId xmlns:a16="http://schemas.microsoft.com/office/drawing/2014/main" id="{E47A2409-9948-43E6-B188-467301D6D2F8}"/>
+              </a:ext>
+            </a:extLst>
+          </p:cNvPr>
+          <p:cNvSpPr txBox="1"/>
+          <p:nvPr/>
+        </p:nvSpPr>
+        <p:spPr>
+          <a:xfrm>
+            <a:off x="3129280" y="1378665"/>
+            <a:ext cx="636713" cy="369332"/>
+          </a:xfrm>
+          <a:prstGeom prst="rect">
+            <a:avLst/>
+          </a:prstGeom>
+          <a:noFill/>
+        </p:spPr>
+        <p:txBody>
+          <a:bodyPr wrap="none" rtlCol="0">
+            <a:spAutoFit/>
+          </a:bodyPr>
+          <a:lstStyle/>
+          <a:p>
+            <a:r>
+              <a:rPr lang="es-CO" dirty="0">
+                <a:solidFill>
+                  <a:srgbClr val="C00000"/>
+                </a:solidFill>
+              </a:rPr>
+              <a:t>36 %</a:t>
+            </a:r>
+          </a:p>
+        </p:txBody>
+      </p:sp>
+      <p:sp>
+        <p:nvSpPr>
+          <p:cNvPr id="7" name="TextBox 6">
+            <a:extLst>
+              <a:ext uri="{FF2B5EF4-FFF2-40B4-BE49-F238E27FC236}">
+                <a16:creationId xmlns:a16="http://schemas.microsoft.com/office/drawing/2014/main" id="{0736899F-A10F-48EE-B2F4-5FA66D92BAE7}"/>
+              </a:ext>
+            </a:extLst>
+          </p:cNvPr>
+          <p:cNvSpPr txBox="1"/>
+          <p:nvPr/>
+        </p:nvSpPr>
+        <p:spPr>
+          <a:xfrm>
+            <a:off x="4561840" y="1378665"/>
+            <a:ext cx="636713" cy="369332"/>
+          </a:xfrm>
+          <a:prstGeom prst="rect">
+            <a:avLst/>
+          </a:prstGeom>
+          <a:noFill/>
+        </p:spPr>
+        <p:txBody>
+          <a:bodyPr wrap="none" rtlCol="0">
+            <a:spAutoFit/>
+          </a:bodyPr>
+          <a:lstStyle/>
+          <a:p>
+            <a:r>
+              <a:rPr lang="es-CO" dirty="0">
+                <a:solidFill>
+                  <a:srgbClr val="C00000"/>
+                </a:solidFill>
+              </a:rPr>
+              <a:t>33 %</a:t>
+            </a:r>
+          </a:p>
+        </p:txBody>
+      </p:sp>
+      <p:sp>
+        <p:nvSpPr>
+          <p:cNvPr id="8" name="TextBox 7">
+            <a:extLst>
+              <a:ext uri="{FF2B5EF4-FFF2-40B4-BE49-F238E27FC236}">
+                <a16:creationId xmlns:a16="http://schemas.microsoft.com/office/drawing/2014/main" id="{C60CDFDD-0F66-4F37-8D89-CECBE60F1287}"/>
+              </a:ext>
+            </a:extLst>
+          </p:cNvPr>
+          <p:cNvSpPr txBox="1"/>
+          <p:nvPr/>
+        </p:nvSpPr>
+        <p:spPr>
+          <a:xfrm>
+            <a:off x="5950393" y="1378665"/>
+            <a:ext cx="636713" cy="369332"/>
+          </a:xfrm>
+          <a:prstGeom prst="rect">
+            <a:avLst/>
+          </a:prstGeom>
+          <a:noFill/>
+        </p:spPr>
+        <p:txBody>
+          <a:bodyPr wrap="none" rtlCol="0">
+            <a:spAutoFit/>
+          </a:bodyPr>
+          <a:lstStyle/>
+          <a:p>
+            <a:r>
+              <a:rPr lang="es-CO" dirty="0">
+                <a:solidFill>
+                  <a:srgbClr val="C00000"/>
+                </a:solidFill>
+              </a:rPr>
+              <a:t>50 %</a:t>
+            </a:r>
+          </a:p>
+        </p:txBody>
+      </p:sp>
+      <p:sp>
+        <p:nvSpPr>
+          <p:cNvPr id="9" name="TextBox 8">
+            <a:extLst>
+              <a:ext uri="{FF2B5EF4-FFF2-40B4-BE49-F238E27FC236}">
+                <a16:creationId xmlns:a16="http://schemas.microsoft.com/office/drawing/2014/main" id="{B3B8000B-018A-421B-B5B4-0DD37E1488DD}"/>
+              </a:ext>
+            </a:extLst>
+          </p:cNvPr>
+          <p:cNvSpPr txBox="1"/>
+          <p:nvPr/>
+        </p:nvSpPr>
+        <p:spPr>
+          <a:xfrm>
+            <a:off x="7464233" y="1378665"/>
+            <a:ext cx="636713" cy="369332"/>
+          </a:xfrm>
+          <a:prstGeom prst="rect">
+            <a:avLst/>
+          </a:prstGeom>
+          <a:noFill/>
+        </p:spPr>
+        <p:txBody>
+          <a:bodyPr wrap="none" rtlCol="0">
+            <a:spAutoFit/>
+          </a:bodyPr>
+          <a:lstStyle/>
+          <a:p>
+            <a:r>
+              <a:rPr lang="es-CO" dirty="0">
+                <a:solidFill>
+                  <a:srgbClr val="C00000"/>
+                </a:solidFill>
+              </a:rPr>
+              <a:t>25 %</a:t>
+            </a:r>
+          </a:p>
+        </p:txBody>
+      </p:sp>
+      <p:sp>
+        <p:nvSpPr>
+          <p:cNvPr id="10" name="TextBox 9">
+            <a:extLst>
+              <a:ext uri="{FF2B5EF4-FFF2-40B4-BE49-F238E27FC236}">
+                <a16:creationId xmlns:a16="http://schemas.microsoft.com/office/drawing/2014/main" id="{97629FB2-F4F2-4152-A513-DA217B18A3D4}"/>
+              </a:ext>
+            </a:extLst>
+          </p:cNvPr>
+          <p:cNvSpPr txBox="1"/>
+          <p:nvPr/>
+        </p:nvSpPr>
+        <p:spPr>
+          <a:xfrm>
+            <a:off x="9049193" y="1378665"/>
+            <a:ext cx="636713" cy="369332"/>
+          </a:xfrm>
+          <a:prstGeom prst="rect">
+            <a:avLst/>
+          </a:prstGeom>
+          <a:noFill/>
+        </p:spPr>
+        <p:txBody>
+          <a:bodyPr wrap="none" rtlCol="0">
+            <a:spAutoFit/>
+          </a:bodyPr>
+          <a:lstStyle/>
+          <a:p>
+            <a:r>
+              <a:rPr lang="es-CO" dirty="0">
+                <a:solidFill>
+                  <a:srgbClr val="C00000"/>
+                </a:solidFill>
+              </a:rPr>
+              <a:t>33 %</a:t>
+            </a:r>
+          </a:p>
+        </p:txBody>
+      </p:sp>
+      <p:sp>
+        <p:nvSpPr>
+          <p:cNvPr id="16" name="TextBox 15">
+            <a:extLst>
+              <a:ext uri="{FF2B5EF4-FFF2-40B4-BE49-F238E27FC236}">
+                <a16:creationId xmlns:a16="http://schemas.microsoft.com/office/drawing/2014/main" id="{49F2F1F1-9750-422D-B3A8-06BA5CA811F6}"/>
+              </a:ext>
+            </a:extLst>
+          </p:cNvPr>
+          <p:cNvSpPr txBox="1"/>
+          <p:nvPr/>
+        </p:nvSpPr>
+        <p:spPr>
+          <a:xfrm>
+            <a:off x="3129280" y="3624025"/>
+            <a:ext cx="636713" cy="369332"/>
+          </a:xfrm>
+          <a:prstGeom prst="rect">
+            <a:avLst/>
+          </a:prstGeom>
+          <a:noFill/>
+        </p:spPr>
+        <p:txBody>
+          <a:bodyPr wrap="none" rtlCol="0">
+            <a:spAutoFit/>
+          </a:bodyPr>
+          <a:lstStyle/>
+          <a:p>
+            <a:r>
+              <a:rPr lang="es-CO" dirty="0">
+                <a:solidFill>
+                  <a:srgbClr val="C00000"/>
+                </a:solidFill>
+              </a:rPr>
+              <a:t>34 %</a:t>
+            </a:r>
+          </a:p>
+        </p:txBody>
+      </p:sp>
+      <p:sp>
+        <p:nvSpPr>
+          <p:cNvPr id="17" name="TextBox 16">
+            <a:extLst>
+              <a:ext uri="{FF2B5EF4-FFF2-40B4-BE49-F238E27FC236}">
+                <a16:creationId xmlns:a16="http://schemas.microsoft.com/office/drawing/2014/main" id="{08876110-7277-4D1C-83E7-83956538411A}"/>
+              </a:ext>
+            </a:extLst>
+          </p:cNvPr>
+          <p:cNvSpPr txBox="1"/>
+          <p:nvPr/>
+        </p:nvSpPr>
+        <p:spPr>
+          <a:xfrm>
+            <a:off x="4561840" y="3624025"/>
+            <a:ext cx="636713" cy="369332"/>
+          </a:xfrm>
+          <a:prstGeom prst="rect">
+            <a:avLst/>
+          </a:prstGeom>
+          <a:noFill/>
+        </p:spPr>
+        <p:txBody>
+          <a:bodyPr wrap="none" rtlCol="0">
+            <a:spAutoFit/>
+          </a:bodyPr>
+          <a:lstStyle/>
+          <a:p>
+            <a:r>
+              <a:rPr lang="es-CO" dirty="0">
+                <a:solidFill>
+                  <a:srgbClr val="C00000"/>
+                </a:solidFill>
+              </a:rPr>
+              <a:t>40 %</a:t>
+            </a:r>
+          </a:p>
+        </p:txBody>
+      </p:sp>
+      <p:sp>
+        <p:nvSpPr>
+          <p:cNvPr id="18" name="TextBox 17">
+            <a:extLst>
+              <a:ext uri="{FF2B5EF4-FFF2-40B4-BE49-F238E27FC236}">
+                <a16:creationId xmlns:a16="http://schemas.microsoft.com/office/drawing/2014/main" id="{B674591E-3D28-43B3-83F8-B17242203F45}"/>
+              </a:ext>
+            </a:extLst>
+          </p:cNvPr>
+          <p:cNvSpPr txBox="1"/>
+          <p:nvPr/>
+        </p:nvSpPr>
+        <p:spPr>
+          <a:xfrm>
+            <a:off x="5950393" y="3624025"/>
+            <a:ext cx="636713" cy="369332"/>
+          </a:xfrm>
+          <a:prstGeom prst="rect">
+            <a:avLst/>
+          </a:prstGeom>
+          <a:noFill/>
+        </p:spPr>
+        <p:txBody>
+          <a:bodyPr wrap="none" rtlCol="0">
+            <a:spAutoFit/>
+          </a:bodyPr>
+          <a:lstStyle/>
+          <a:p>
+            <a:r>
+              <a:rPr lang="es-CO" dirty="0">
+                <a:solidFill>
+                  <a:srgbClr val="C00000"/>
+                </a:solidFill>
+              </a:rPr>
+              <a:t>24 %</a:t>
+            </a:r>
+          </a:p>
+        </p:txBody>
+      </p:sp>
+      <p:sp>
+        <p:nvSpPr>
+          <p:cNvPr id="19" name="TextBox 18">
+            <a:extLst>
+              <a:ext uri="{FF2B5EF4-FFF2-40B4-BE49-F238E27FC236}">
+                <a16:creationId xmlns:a16="http://schemas.microsoft.com/office/drawing/2014/main" id="{12BE5F95-CBA9-482D-8ED5-CB0D5466BC20}"/>
+              </a:ext>
+            </a:extLst>
+          </p:cNvPr>
+          <p:cNvSpPr txBox="1"/>
+          <p:nvPr/>
+        </p:nvSpPr>
+        <p:spPr>
+          <a:xfrm>
+            <a:off x="7464233" y="3624025"/>
+            <a:ext cx="636713" cy="369332"/>
+          </a:xfrm>
+          <a:prstGeom prst="rect">
+            <a:avLst/>
+          </a:prstGeom>
+          <a:noFill/>
+        </p:spPr>
+        <p:txBody>
+          <a:bodyPr wrap="none" rtlCol="0">
+            <a:spAutoFit/>
+          </a:bodyPr>
+          <a:lstStyle/>
+          <a:p>
+            <a:r>
+              <a:rPr lang="es-CO" dirty="0">
+                <a:solidFill>
+                  <a:srgbClr val="C00000"/>
+                </a:solidFill>
+              </a:rPr>
+              <a:t>51 %</a:t>
+            </a:r>
+          </a:p>
+        </p:txBody>
+      </p:sp>
+      <p:sp>
+        <p:nvSpPr>
+          <p:cNvPr id="20" name="TextBox 19">
+            <a:extLst>
+              <a:ext uri="{FF2B5EF4-FFF2-40B4-BE49-F238E27FC236}">
+                <a16:creationId xmlns:a16="http://schemas.microsoft.com/office/drawing/2014/main" id="{AC1F4DEC-C4D9-4395-9577-0EBF302EFD66}"/>
+              </a:ext>
+            </a:extLst>
+          </p:cNvPr>
+          <p:cNvSpPr txBox="1"/>
+          <p:nvPr/>
+        </p:nvSpPr>
+        <p:spPr>
+          <a:xfrm>
+            <a:off x="9049193" y="3624025"/>
+            <a:ext cx="636713" cy="369332"/>
+          </a:xfrm>
+          <a:prstGeom prst="rect">
+            <a:avLst/>
+          </a:prstGeom>
+          <a:noFill/>
+        </p:spPr>
+        <p:txBody>
+          <a:bodyPr wrap="none" rtlCol="0">
+            <a:spAutoFit/>
+          </a:bodyPr>
+          <a:lstStyle/>
+          <a:p>
+            <a:r>
+              <a:rPr lang="es-CO" dirty="0">
+                <a:solidFill>
+                  <a:srgbClr val="C00000"/>
+                </a:solidFill>
+              </a:rPr>
+              <a:t>48 %</a:t>
+            </a:r>
+          </a:p>
+        </p:txBody>
+      </p:sp>
+    </p:spTree>
+    <p:extLst>
+      <p:ext uri="{BB962C8B-B14F-4D97-AF65-F5344CB8AC3E}">
+        <p14:creationId xmlns:p14="http://schemas.microsoft.com/office/powerpoint/2010/main" val="84903879"/>
+      </p:ext>
+    </p:extLst>
+  </p:cSld>
+  <p:clrMapOvr>
+    <a:masterClrMapping/>
+  </p:clrMapOvr>
+</p:sld>
+</file>
+
+<file path=ppt/slides/slide31.xml><?xml version="1.0" encoding="utf-8"?>
+<p:sld xmlns:a="http://schemas.openxmlformats.org/drawingml/2006/main" xmlns:r="http://schemas.openxmlformats.org/officeDocument/2006/relationships" xmlns:p="http://schemas.openxmlformats.org/presentationml/2006/main">
+  <p:cSld>
+    <p:spTree>
+      <p:nvGrpSpPr>
+        <p:cNvPr id="1" name=""/>
+        <p:cNvGrpSpPr/>
+        <p:nvPr/>
+      </p:nvGrpSpPr>
+      <p:grpSpPr>
+        <a:xfrm>
+          <a:off x="0" y="0"/>
+          <a:ext cx="0" cy="0"/>
+          <a:chOff x="0" y="0"/>
+          <a:chExt cx="0" cy="0"/>
+        </a:xfrm>
+      </p:grpSpPr>
+      <p:sp>
+        <p:nvSpPr>
+          <p:cNvPr id="2" name="Title 1">
+            <a:extLst>
+              <a:ext uri="{FF2B5EF4-FFF2-40B4-BE49-F238E27FC236}">
+                <a16:creationId xmlns:a16="http://schemas.microsoft.com/office/drawing/2014/main" id="{012732A5-CA64-438D-8D68-CB017C748861}"/>
+              </a:ext>
+            </a:extLst>
+          </p:cNvPr>
+          <p:cNvSpPr>
+            <a:spLocks noGrp="1"/>
+          </p:cNvSpPr>
+          <p:nvPr>
+            <p:ph type="title"/>
+          </p:nvPr>
+        </p:nvSpPr>
+        <p:spPr/>
+        <p:txBody>
+          <a:bodyPr/>
+          <a:lstStyle/>
+          <a:p>
+            <a:endParaRPr lang="es-CO" dirty="0"/>
+          </a:p>
+        </p:txBody>
+      </p:sp>
+    </p:spTree>
+    <p:extLst>
+      <p:ext uri="{BB962C8B-B14F-4D97-AF65-F5344CB8AC3E}">
+        <p14:creationId xmlns:p14="http://schemas.microsoft.com/office/powerpoint/2010/main" val="1266626328"/>
+      </p:ext>
+    </p:extLst>
+  </p:cSld>
+  <p:clrMapOvr>
+    <a:masterClrMapping/>
+  </p:clrMapOvr>
+</p:sld>
+</file>
+
+<file path=ppt/slides/slide32.xml><?xml version="1.0" encoding="utf-8"?>
+<p:sld xmlns:a="http://schemas.openxmlformats.org/drawingml/2006/main" xmlns:r="http://schemas.openxmlformats.org/officeDocument/2006/relationships" xmlns:p="http://schemas.openxmlformats.org/presentationml/2006/main">
+  <p:cSld>
+    <p:spTree>
+      <p:nvGrpSpPr>
+        <p:cNvPr id="1" name=""/>
+        <p:cNvGrpSpPr/>
+        <p:nvPr/>
+      </p:nvGrpSpPr>
+      <p:grpSpPr>
+        <a:xfrm>
+          <a:off x="0" y="0"/>
+          <a:ext cx="0" cy="0"/>
+          <a:chOff x="0" y="0"/>
+          <a:chExt cx="0" cy="0"/>
+        </a:xfrm>
+      </p:grpSpPr>
+      <p:sp>
+        <p:nvSpPr>
+          <p:cNvPr id="2" name="Title 1">
+            <a:extLst>
+              <a:ext uri="{FF2B5EF4-FFF2-40B4-BE49-F238E27FC236}">
+                <a16:creationId xmlns:a16="http://schemas.microsoft.com/office/drawing/2014/main" id="{4D6A95E2-243D-44BC-9A3C-7FE9C3354226}"/>
+              </a:ext>
+            </a:extLst>
+          </p:cNvPr>
+          <p:cNvSpPr>
+            <a:spLocks noGrp="1"/>
+          </p:cNvSpPr>
+          <p:nvPr>
+            <p:ph type="title"/>
+          </p:nvPr>
+        </p:nvSpPr>
+        <p:spPr/>
+        <p:txBody>
+          <a:bodyPr/>
+          <a:lstStyle/>
+          <a:p>
+            <a:r>
+              <a:rPr lang="es-CO" dirty="0"/>
+              <a:t>Consumo de la red</a:t>
+            </a:r>
+          </a:p>
+        </p:txBody>
+      </p:sp>
+      <p:sp>
+        <p:nvSpPr>
+          <p:cNvPr id="3" name="Content Placeholder 2">
+            <a:extLst>
+              <a:ext uri="{FF2B5EF4-FFF2-40B4-BE49-F238E27FC236}">
+                <a16:creationId xmlns:a16="http://schemas.microsoft.com/office/drawing/2014/main" id="{ABFA090F-323E-4818-991D-5020CE8361DF}"/>
+              </a:ext>
+            </a:extLst>
+          </p:cNvPr>
+          <p:cNvSpPr>
+            <a:spLocks noGrp="1"/>
+          </p:cNvSpPr>
+          <p:nvPr>
+            <p:ph idx="1"/>
+          </p:nvPr>
+        </p:nvSpPr>
+        <p:spPr>
+          <a:xfrm>
+            <a:off x="838200" y="1825625"/>
+            <a:ext cx="2967182" cy="4351338"/>
+          </a:xfrm>
+        </p:spPr>
+        <p:txBody>
+          <a:bodyPr>
+            <a:normAutofit/>
+          </a:bodyPr>
+          <a:lstStyle/>
+          <a:p>
+            <a:r>
+              <a:rPr lang="es-CO" sz="1400" dirty="0"/>
+              <a:t>Correlación negativa del consumo/km con las velocidades: velocidad en movimiento y velocidad comercial (incluye paradas)</a:t>
+            </a:r>
+          </a:p>
+          <a:p>
+            <a:r>
+              <a:rPr lang="es-CO" sz="1400" dirty="0"/>
+              <a:t>Rutas en pendientes, H629 y L613 con evidente mayor consumo (casi el doble) que las demás.</a:t>
+            </a:r>
+          </a:p>
+          <a:p>
+            <a:r>
+              <a:rPr lang="es-CO" sz="1400" dirty="0">
+                <a:solidFill>
+                  <a:srgbClr val="FF0000"/>
+                </a:solidFill>
+              </a:rPr>
+              <a:t>Importante agregar la energía regenerada para estimar el consumo completo.</a:t>
+            </a:r>
+          </a:p>
+        </p:txBody>
+      </p:sp>
+      <p:pic>
+        <p:nvPicPr>
+          <p:cNvPr id="5" name="Picture 4">
+            <a:extLst>
+              <a:ext uri="{FF2B5EF4-FFF2-40B4-BE49-F238E27FC236}">
+                <a16:creationId xmlns:a16="http://schemas.microsoft.com/office/drawing/2014/main" id="{68735796-E0AD-4AB0-BFB9-82A829BA6EA9}"/>
+              </a:ext>
+            </a:extLst>
+          </p:cNvPr>
+          <p:cNvPicPr>
+            <a:picLocks noChangeAspect="1"/>
+          </p:cNvPicPr>
+          <p:nvPr/>
+        </p:nvPicPr>
+        <p:blipFill rotWithShape="1">
+          <a:blip r:embed="rId2"/>
+          <a:srcRect l="8881"/>
+          <a:stretch/>
+        </p:blipFill>
+        <p:spPr>
+          <a:xfrm>
+            <a:off x="3805382" y="1368802"/>
+            <a:ext cx="8238836" cy="4120395"/>
+          </a:xfrm>
+          <a:prstGeom prst="rect">
+            <a:avLst/>
+          </a:prstGeom>
+        </p:spPr>
+      </p:pic>
+    </p:spTree>
+    <p:extLst>
+      <p:ext uri="{BB962C8B-B14F-4D97-AF65-F5344CB8AC3E}">
+        <p14:creationId xmlns:p14="http://schemas.microsoft.com/office/powerpoint/2010/main" val="2548587813"/>
+      </p:ext>
+    </p:extLst>
+  </p:cSld>
+  <p:clrMapOvr>
+    <a:masterClrMapping/>
+  </p:clrMapOvr>
+</p:sld>
+</file>
+
+<file path=ppt/slides/slide33.xml><?xml version="1.0" encoding="utf-8"?>
+<p:sld xmlns:a="http://schemas.openxmlformats.org/drawingml/2006/main" xmlns:r="http://schemas.openxmlformats.org/officeDocument/2006/relationships" xmlns:p="http://schemas.openxmlformats.org/presentationml/2006/main">
+  <p:cSld>
+    <p:spTree>
+      <p:nvGrpSpPr>
+        <p:cNvPr id="1" name=""/>
+        <p:cNvGrpSpPr/>
+        <p:nvPr/>
+      </p:nvGrpSpPr>
+      <p:grpSpPr>
+        <a:xfrm>
+          <a:off x="0" y="0"/>
+          <a:ext cx="0" cy="0"/>
+          <a:chOff x="0" y="0"/>
+          <a:chExt cx="0" cy="0"/>
+        </a:xfrm>
+      </p:grpSpPr>
+      <p:sp>
+        <p:nvSpPr>
+          <p:cNvPr id="2" name="Title 1">
+            <a:extLst>
+              <a:ext uri="{FF2B5EF4-FFF2-40B4-BE49-F238E27FC236}">
+                <a16:creationId xmlns:a16="http://schemas.microsoft.com/office/drawing/2014/main" id="{012732A5-CA64-438D-8D68-CB017C748861}"/>
+              </a:ext>
+            </a:extLst>
+          </p:cNvPr>
+          <p:cNvSpPr>
+            <a:spLocks noGrp="1"/>
+          </p:cNvSpPr>
+          <p:nvPr>
+            <p:ph type="title"/>
+          </p:nvPr>
+        </p:nvSpPr>
+        <p:spPr/>
+        <p:txBody>
+          <a:bodyPr/>
+          <a:lstStyle/>
+          <a:p>
+            <a:r>
+              <a:rPr lang="es-CO" dirty="0"/>
+              <a:t>Consumo</a:t>
+            </a:r>
+          </a:p>
+        </p:txBody>
+      </p:sp>
+      <p:sp>
+        <p:nvSpPr>
+          <p:cNvPr id="3" name="Content Placeholder 2">
+            <a:extLst>
+              <a:ext uri="{FF2B5EF4-FFF2-40B4-BE49-F238E27FC236}">
+                <a16:creationId xmlns:a16="http://schemas.microsoft.com/office/drawing/2014/main" id="{83DF4FFA-FB2B-4E37-9402-0BBE66287E54}"/>
+              </a:ext>
+            </a:extLst>
+          </p:cNvPr>
+          <p:cNvSpPr>
+            <a:spLocks noGrp="1"/>
+          </p:cNvSpPr>
+          <p:nvPr>
+            <p:ph idx="1"/>
+          </p:nvPr>
+        </p:nvSpPr>
+        <p:spPr>
+          <a:xfrm>
+            <a:off x="838200" y="1825625"/>
+            <a:ext cx="3078018" cy="4351338"/>
+          </a:xfrm>
+        </p:spPr>
+        <p:txBody>
+          <a:bodyPr>
+            <a:normAutofit/>
+          </a:bodyPr>
+          <a:lstStyle/>
+          <a:p>
+            <a:r>
+              <a:rPr lang="es-CO" sz="1800" dirty="0"/>
+              <a:t>Todas las rutas muestran correlación positiva entre consumo y </a:t>
+            </a:r>
+            <a:r>
+              <a:rPr lang="es-CO" sz="1800" dirty="0" err="1"/>
+              <a:t>acc</a:t>
+            </a:r>
+            <a:r>
+              <a:rPr lang="es-CO" sz="1800" dirty="0"/>
+              <a:t>+/km</a:t>
+            </a:r>
+          </a:p>
+          <a:p>
+            <a:r>
+              <a:rPr lang="es-CO" sz="1800" dirty="0"/>
+              <a:t>Las rutas con fuertes pendientes (H629 y L613) aumentan el consumo, pero mantiene correlaciones similares</a:t>
+            </a:r>
+          </a:p>
+          <a:p>
+            <a:r>
+              <a:rPr lang="es-CO" sz="1800" dirty="0">
+                <a:solidFill>
+                  <a:srgbClr val="FF0000"/>
+                </a:solidFill>
+              </a:rPr>
+              <a:t>Importante agregar la energía regenerada para estimar el consumo completo.</a:t>
+            </a:r>
+          </a:p>
+          <a:p>
+            <a:endParaRPr lang="es-CO" sz="1800" dirty="0"/>
+          </a:p>
+        </p:txBody>
+      </p:sp>
+      <p:pic>
+        <p:nvPicPr>
+          <p:cNvPr id="5" name="Picture 4">
+            <a:extLst>
+              <a:ext uri="{FF2B5EF4-FFF2-40B4-BE49-F238E27FC236}">
+                <a16:creationId xmlns:a16="http://schemas.microsoft.com/office/drawing/2014/main" id="{A6E82763-C78D-435B-842E-57F38A4E8A27}"/>
+              </a:ext>
+            </a:extLst>
+          </p:cNvPr>
+          <p:cNvPicPr>
+            <a:picLocks noChangeAspect="1"/>
+          </p:cNvPicPr>
+          <p:nvPr/>
+        </p:nvPicPr>
+        <p:blipFill rotWithShape="1">
+          <a:blip r:embed="rId2"/>
+          <a:srcRect l="7468" r="5751"/>
+          <a:stretch/>
+        </p:blipFill>
+        <p:spPr>
+          <a:xfrm>
+            <a:off x="3971632" y="1825625"/>
+            <a:ext cx="7943277" cy="4171182"/>
+          </a:xfrm>
+          <a:prstGeom prst="rect">
+            <a:avLst/>
+          </a:prstGeom>
+        </p:spPr>
+      </p:pic>
+    </p:spTree>
+    <p:extLst>
+      <p:ext uri="{BB962C8B-B14F-4D97-AF65-F5344CB8AC3E}">
+        <p14:creationId xmlns:p14="http://schemas.microsoft.com/office/powerpoint/2010/main" val="4264388794"/>
+      </p:ext>
+    </p:extLst>
+  </p:cSld>
+  <p:clrMapOvr>
+    <a:masterClrMapping/>
+  </p:clrMapOvr>
+</p:sld>
+</file>
+
+<file path=ppt/slides/slide34.xml><?xml version="1.0" encoding="utf-8"?>
+<p:sld xmlns:a="http://schemas.openxmlformats.org/drawingml/2006/main" xmlns:r="http://schemas.openxmlformats.org/officeDocument/2006/relationships" xmlns:p="http://schemas.openxmlformats.org/presentationml/2006/main">
+  <p:cSld>
+    <p:spTree>
+      <p:nvGrpSpPr>
+        <p:cNvPr id="1" name=""/>
+        <p:cNvGrpSpPr/>
+        <p:nvPr/>
+      </p:nvGrpSpPr>
+      <p:grpSpPr>
+        <a:xfrm>
+          <a:off x="0" y="0"/>
+          <a:ext cx="0" cy="0"/>
+          <a:chOff x="0" y="0"/>
+          <a:chExt cx="0" cy="0"/>
+        </a:xfrm>
+      </p:grpSpPr>
+      <p:sp>
+        <p:nvSpPr>
+          <p:cNvPr id="2" name="Title 1">
+            <a:extLst>
+              <a:ext uri="{FF2B5EF4-FFF2-40B4-BE49-F238E27FC236}">
+                <a16:creationId xmlns:a16="http://schemas.microsoft.com/office/drawing/2014/main" id="{9C8D38EE-3BB3-486B-8027-C43433CDC185}"/>
+              </a:ext>
+            </a:extLst>
+          </p:cNvPr>
+          <p:cNvSpPr>
+            <a:spLocks noGrp="1"/>
+          </p:cNvSpPr>
+          <p:nvPr>
+            <p:ph type="title"/>
+          </p:nvPr>
+        </p:nvSpPr>
+        <p:spPr/>
+        <p:txBody>
+          <a:bodyPr/>
+          <a:lstStyle/>
+          <a:p>
+            <a:r>
+              <a:rPr lang="es-CO" dirty="0"/>
+              <a:t>Consumo</a:t>
+            </a:r>
+          </a:p>
+        </p:txBody>
+      </p:sp>
+      <p:sp>
+        <p:nvSpPr>
+          <p:cNvPr id="3" name="Content Placeholder 2">
+            <a:extLst>
+              <a:ext uri="{FF2B5EF4-FFF2-40B4-BE49-F238E27FC236}">
+                <a16:creationId xmlns:a16="http://schemas.microsoft.com/office/drawing/2014/main" id="{40A161F4-4AB6-441C-B84F-77873884F7B4}"/>
+              </a:ext>
+            </a:extLst>
+          </p:cNvPr>
+          <p:cNvSpPr>
+            <a:spLocks noGrp="1"/>
+          </p:cNvSpPr>
+          <p:nvPr>
+            <p:ph idx="1"/>
+          </p:nvPr>
+        </p:nvSpPr>
+        <p:spPr>
+          <a:xfrm>
+            <a:off x="838200" y="1825625"/>
+            <a:ext cx="2886508" cy="4351338"/>
+          </a:xfrm>
+        </p:spPr>
+        <p:txBody>
+          <a:bodyPr>
+            <a:normAutofit/>
+          </a:bodyPr>
+          <a:lstStyle/>
+          <a:p>
+            <a:r>
+              <a:rPr lang="es-CO" sz="1800" dirty="0"/>
+              <a:t>No hay diferencias significativas en el consumo por sexo</a:t>
+            </a:r>
+          </a:p>
+        </p:txBody>
+      </p:sp>
+      <p:pic>
+        <p:nvPicPr>
+          <p:cNvPr id="5" name="Picture 4">
+            <a:extLst>
+              <a:ext uri="{FF2B5EF4-FFF2-40B4-BE49-F238E27FC236}">
+                <a16:creationId xmlns:a16="http://schemas.microsoft.com/office/drawing/2014/main" id="{A112B960-ACFE-4E2E-8275-FC0FA22A1B20}"/>
+              </a:ext>
+            </a:extLst>
+          </p:cNvPr>
+          <p:cNvPicPr>
+            <a:picLocks noChangeAspect="1"/>
+          </p:cNvPicPr>
+          <p:nvPr/>
+        </p:nvPicPr>
+        <p:blipFill rotWithShape="1">
+          <a:blip r:embed="rId2"/>
+          <a:srcRect l="9167" r="8333"/>
+          <a:stretch/>
+        </p:blipFill>
+        <p:spPr>
+          <a:xfrm>
+            <a:off x="3724708" y="1690688"/>
+            <a:ext cx="8153255" cy="4754779"/>
+          </a:xfrm>
+          <a:prstGeom prst="rect">
+            <a:avLst/>
+          </a:prstGeom>
+        </p:spPr>
+      </p:pic>
+    </p:spTree>
+    <p:extLst>
+      <p:ext uri="{BB962C8B-B14F-4D97-AF65-F5344CB8AC3E}">
+        <p14:creationId xmlns:p14="http://schemas.microsoft.com/office/powerpoint/2010/main" val="422390354"/>
+      </p:ext>
+    </p:extLst>
+  </p:cSld>
+  <p:clrMapOvr>
+    <a:masterClrMapping/>
+  </p:clrMapOvr>
+</p:sld>
+</file>
+
+<file path=ppt/slides/slide35.xml><?xml version="1.0" encoding="utf-8"?>
+<p:sld xmlns:a="http://schemas.openxmlformats.org/drawingml/2006/main" xmlns:r="http://schemas.openxmlformats.org/officeDocument/2006/relationships" xmlns:p="http://schemas.openxmlformats.org/presentationml/2006/main">
+  <p:cSld>
+    <p:spTree>
+      <p:nvGrpSpPr>
+        <p:cNvPr id="1" name=""/>
+        <p:cNvGrpSpPr/>
+        <p:nvPr/>
+      </p:nvGrpSpPr>
+      <p:grpSpPr>
+        <a:xfrm>
+          <a:off x="0" y="0"/>
+          <a:ext cx="0" cy="0"/>
+          <a:chOff x="0" y="0"/>
+          <a:chExt cx="0" cy="0"/>
+        </a:xfrm>
+      </p:grpSpPr>
+      <p:sp>
+        <p:nvSpPr>
+          <p:cNvPr id="2" name="Title 1">
+            <a:extLst>
+              <a:ext uri="{FF2B5EF4-FFF2-40B4-BE49-F238E27FC236}">
+                <a16:creationId xmlns:a16="http://schemas.microsoft.com/office/drawing/2014/main" id="{58C94CFA-E0C5-4665-877C-9E0A5A2A6C92}"/>
+              </a:ext>
+            </a:extLst>
+          </p:cNvPr>
+          <p:cNvSpPr>
+            <a:spLocks noGrp="1"/>
+          </p:cNvSpPr>
+          <p:nvPr>
+            <p:ph type="title"/>
+          </p:nvPr>
+        </p:nvSpPr>
+        <p:spPr/>
+        <p:txBody>
+          <a:bodyPr/>
+          <a:lstStyle/>
+          <a:p>
+            <a:r>
+              <a:rPr lang="es-CO" dirty="0"/>
+              <a:t>Regeneración</a:t>
+            </a:r>
+          </a:p>
+        </p:txBody>
+      </p:sp>
+      <p:sp>
+        <p:nvSpPr>
+          <p:cNvPr id="3" name="Content Placeholder 2">
+            <a:extLst>
+              <a:ext uri="{FF2B5EF4-FFF2-40B4-BE49-F238E27FC236}">
+                <a16:creationId xmlns:a16="http://schemas.microsoft.com/office/drawing/2014/main" id="{AFC7E9D3-0264-44C2-94C1-30CDAFD03CC2}"/>
+              </a:ext>
+            </a:extLst>
+          </p:cNvPr>
+          <p:cNvSpPr>
+            <a:spLocks noGrp="1"/>
+          </p:cNvSpPr>
+          <p:nvPr>
+            <p:ph idx="1"/>
+          </p:nvPr>
+        </p:nvSpPr>
+        <p:spPr>
+          <a:xfrm>
+            <a:off x="838200" y="1825625"/>
+            <a:ext cx="2474343" cy="4351338"/>
+          </a:xfrm>
+        </p:spPr>
+        <p:txBody>
+          <a:bodyPr>
+            <a:normAutofit/>
+          </a:bodyPr>
+          <a:lstStyle/>
+          <a:p>
+            <a:r>
+              <a:rPr lang="es-CO" sz="1800" dirty="0"/>
+              <a:t>Los hombres regeneran un poquito más, en 5 de 6 rutas.</a:t>
+            </a:r>
+          </a:p>
+          <a:p>
+            <a:r>
+              <a:rPr lang="es-CO" sz="1800" dirty="0"/>
+              <a:t>En la ruta de bajada, los hombres regeneran 9% más!</a:t>
+            </a:r>
+          </a:p>
+        </p:txBody>
+      </p:sp>
+      <p:pic>
+        <p:nvPicPr>
+          <p:cNvPr id="5" name="Picture 4">
+            <a:extLst>
+              <a:ext uri="{FF2B5EF4-FFF2-40B4-BE49-F238E27FC236}">
+                <a16:creationId xmlns:a16="http://schemas.microsoft.com/office/drawing/2014/main" id="{6ACB86B9-4E3C-4CE4-A2A0-D5AFCF99DC86}"/>
+              </a:ext>
+            </a:extLst>
+          </p:cNvPr>
+          <p:cNvPicPr>
+            <a:picLocks noChangeAspect="1"/>
+          </p:cNvPicPr>
+          <p:nvPr/>
+        </p:nvPicPr>
+        <p:blipFill rotWithShape="1">
+          <a:blip r:embed="rId2"/>
+          <a:srcRect l="8262" r="8628"/>
+          <a:stretch/>
+        </p:blipFill>
+        <p:spPr>
+          <a:xfrm>
+            <a:off x="3312543" y="1433602"/>
+            <a:ext cx="8462513" cy="4629150"/>
+          </a:xfrm>
+          <a:prstGeom prst="rect">
+            <a:avLst/>
+          </a:prstGeom>
+        </p:spPr>
+      </p:pic>
+    </p:spTree>
+    <p:extLst>
+      <p:ext uri="{BB962C8B-B14F-4D97-AF65-F5344CB8AC3E}">
+        <p14:creationId xmlns:p14="http://schemas.microsoft.com/office/powerpoint/2010/main" val="1964312091"/>
+      </p:ext>
+    </p:extLst>
+  </p:cSld>
+  <p:clrMapOvr>
+    <a:masterClrMapping/>
+  </p:clrMapOvr>
+</p:sld>
+</file>
+
+<file path=ppt/slides/slide36.xml><?xml version="1.0" encoding="utf-8"?>
+<p:sld xmlns:a="http://schemas.openxmlformats.org/drawingml/2006/main" xmlns:r="http://schemas.openxmlformats.org/officeDocument/2006/relationships" xmlns:p="http://schemas.openxmlformats.org/presentationml/2006/main">
+  <p:cSld>
+    <p:spTree>
+      <p:nvGrpSpPr>
+        <p:cNvPr id="1" name=""/>
+        <p:cNvGrpSpPr/>
+        <p:nvPr/>
+      </p:nvGrpSpPr>
+      <p:grpSpPr>
+        <a:xfrm>
+          <a:off x="0" y="0"/>
+          <a:ext cx="0" cy="0"/>
+          <a:chOff x="0" y="0"/>
+          <a:chExt cx="0" cy="0"/>
+        </a:xfrm>
+      </p:grpSpPr>
+      <p:sp>
+        <p:nvSpPr>
+          <p:cNvPr id="2" name="Title 1">
+            <a:extLst>
+              <a:ext uri="{FF2B5EF4-FFF2-40B4-BE49-F238E27FC236}">
+                <a16:creationId xmlns:a16="http://schemas.microsoft.com/office/drawing/2014/main" id="{8988749B-7486-4842-8A1C-899970AF3027}"/>
+              </a:ext>
+            </a:extLst>
+          </p:cNvPr>
+          <p:cNvSpPr>
+            <a:spLocks noGrp="1"/>
+          </p:cNvSpPr>
+          <p:nvPr>
+            <p:ph type="title"/>
+          </p:nvPr>
+        </p:nvSpPr>
+        <p:spPr/>
+        <p:txBody>
+          <a:bodyPr/>
+          <a:lstStyle/>
+          <a:p>
+            <a:endParaRPr lang="es-CO"/>
+          </a:p>
+        </p:txBody>
+      </p:sp>
+      <p:sp>
+        <p:nvSpPr>
+          <p:cNvPr id="3" name="Content Placeholder 2">
+            <a:extLst>
+              <a:ext uri="{FF2B5EF4-FFF2-40B4-BE49-F238E27FC236}">
+                <a16:creationId xmlns:a16="http://schemas.microsoft.com/office/drawing/2014/main" id="{CF3F9270-7D54-4DA2-A41F-9C647B32A8F1}"/>
+              </a:ext>
+            </a:extLst>
+          </p:cNvPr>
+          <p:cNvSpPr>
+            <a:spLocks noGrp="1"/>
+          </p:cNvSpPr>
+          <p:nvPr>
+            <p:ph idx="1"/>
+          </p:nvPr>
+        </p:nvSpPr>
+        <p:spPr/>
+        <p:txBody>
+          <a:bodyPr/>
+          <a:lstStyle/>
+          <a:p>
+            <a:endParaRPr lang="es-CO"/>
+          </a:p>
+        </p:txBody>
+      </p:sp>
+      <p:pic>
+        <p:nvPicPr>
+          <p:cNvPr id="1026" name="Picture 2">
+            <a:extLst>
+              <a:ext uri="{FF2B5EF4-FFF2-40B4-BE49-F238E27FC236}">
+                <a16:creationId xmlns:a16="http://schemas.microsoft.com/office/drawing/2014/main" id="{EA9AD86C-A06C-419F-8E7A-B02E8B902591}"/>
+              </a:ext>
+            </a:extLst>
+          </p:cNvPr>
+          <p:cNvPicPr>
+            <a:picLocks noChangeAspect="1" noChangeArrowheads="1"/>
+          </p:cNvPicPr>
+          <p:nvPr/>
+        </p:nvPicPr>
+        <p:blipFill>
+          <a:blip r:embed="rId2">
+            <a:extLst>
+              <a:ext uri="{28A0092B-C50C-407E-A947-70E740481C1C}">
+                <a14:useLocalDpi xmlns:a14="http://schemas.microsoft.com/office/drawing/2010/main" val="0"/>
+              </a:ext>
+            </a:extLst>
+          </a:blip>
+          <a:srcRect/>
+          <a:stretch>
+            <a:fillRect/>
+          </a:stretch>
+        </p:blipFill>
+        <p:spPr bwMode="auto">
+          <a:xfrm>
+            <a:off x="494436" y="43699"/>
+            <a:ext cx="5328514" cy="3448050"/>
+          </a:xfrm>
+          <a:prstGeom prst="rect">
+            <a:avLst/>
+          </a:prstGeom>
+          <a:noFill/>
+          <a:extLst>
+            <a:ext uri="{909E8E84-426E-40DD-AFC4-6F175D3DCCD1}">
+              <a14:hiddenFill xmlns:a14="http://schemas.microsoft.com/office/drawing/2010/main">
+                <a:solidFill>
+                  <a:srgbClr val="FFFFFF"/>
+                </a:solidFill>
+              </a14:hiddenFill>
+            </a:ext>
+          </a:extLst>
+        </p:spPr>
+      </p:pic>
+      <p:pic>
+        <p:nvPicPr>
+          <p:cNvPr id="1028" name="Picture 4">
+            <a:extLst>
+              <a:ext uri="{FF2B5EF4-FFF2-40B4-BE49-F238E27FC236}">
+                <a16:creationId xmlns:a16="http://schemas.microsoft.com/office/drawing/2014/main" id="{A7457FA1-AC54-47BC-B050-39021494714D}"/>
+              </a:ext>
+            </a:extLst>
+          </p:cNvPr>
+          <p:cNvPicPr>
+            <a:picLocks noChangeAspect="1" noChangeArrowheads="1"/>
+          </p:cNvPicPr>
+          <p:nvPr/>
+        </p:nvPicPr>
+        <p:blipFill>
+          <a:blip r:embed="rId3">
+            <a:extLst>
+              <a:ext uri="{28A0092B-C50C-407E-A947-70E740481C1C}">
+                <a14:useLocalDpi xmlns:a14="http://schemas.microsoft.com/office/drawing/2010/main" val="0"/>
+              </a:ext>
+            </a:extLst>
+          </a:blip>
+          <a:srcRect/>
+          <a:stretch>
+            <a:fillRect/>
+          </a:stretch>
+        </p:blipFill>
+        <p:spPr bwMode="auto">
+          <a:xfrm>
+            <a:off x="6166714" y="43699"/>
+            <a:ext cx="5328514" cy="3448050"/>
+          </a:xfrm>
+          <a:prstGeom prst="rect">
+            <a:avLst/>
+          </a:prstGeom>
+          <a:noFill/>
+          <a:extLst>
+            <a:ext uri="{909E8E84-426E-40DD-AFC4-6F175D3DCCD1}">
+              <a14:hiddenFill xmlns:a14="http://schemas.microsoft.com/office/drawing/2010/main">
+                <a:solidFill>
+                  <a:srgbClr val="FFFFFF"/>
+                </a:solidFill>
+              </a14:hiddenFill>
+            </a:ext>
+          </a:extLst>
+        </p:spPr>
+      </p:pic>
+      <p:pic>
+        <p:nvPicPr>
+          <p:cNvPr id="6" name="Picture 5">
+            <a:extLst>
+              <a:ext uri="{FF2B5EF4-FFF2-40B4-BE49-F238E27FC236}">
+                <a16:creationId xmlns:a16="http://schemas.microsoft.com/office/drawing/2014/main" id="{43A6B986-2E4C-46F9-B212-E30B2D1E2330}"/>
+              </a:ext>
+            </a:extLst>
+          </p:cNvPr>
+          <p:cNvPicPr>
+            <a:picLocks noChangeAspect="1"/>
+          </p:cNvPicPr>
+          <p:nvPr/>
+        </p:nvPicPr>
+        <p:blipFill>
+          <a:blip r:embed="rId4"/>
+          <a:stretch>
+            <a:fillRect/>
+          </a:stretch>
+        </p:blipFill>
+        <p:spPr>
+          <a:xfrm>
+            <a:off x="6166714" y="3429000"/>
+            <a:ext cx="5328804" cy="3448050"/>
+          </a:xfrm>
+          <a:prstGeom prst="rect">
+            <a:avLst/>
+          </a:prstGeom>
+        </p:spPr>
+      </p:pic>
+      <p:pic>
+        <p:nvPicPr>
+          <p:cNvPr id="5" name="Picture 4">
+            <a:extLst>
+              <a:ext uri="{FF2B5EF4-FFF2-40B4-BE49-F238E27FC236}">
+                <a16:creationId xmlns:a16="http://schemas.microsoft.com/office/drawing/2014/main" id="{5C087763-FB24-45D9-ADD1-B5EDD4B9941C}"/>
+              </a:ext>
+            </a:extLst>
+          </p:cNvPr>
+          <p:cNvPicPr>
+            <a:picLocks noChangeAspect="1" noChangeArrowheads="1"/>
+          </p:cNvPicPr>
+          <p:nvPr/>
+        </p:nvPicPr>
+        <p:blipFill>
+          <a:blip r:embed="rId5">
+            <a:extLst>
+              <a:ext uri="{28A0092B-C50C-407E-A947-70E740481C1C}">
+                <a14:useLocalDpi xmlns:a14="http://schemas.microsoft.com/office/drawing/2010/main" val="0"/>
+              </a:ext>
+            </a:extLst>
+          </a:blip>
+          <a:srcRect/>
+          <a:stretch>
+            <a:fillRect/>
+          </a:stretch>
+        </p:blipFill>
+        <p:spPr bwMode="auto">
+          <a:xfrm>
+            <a:off x="1135613" y="3822164"/>
+            <a:ext cx="4451897" cy="2880796"/>
+          </a:xfrm>
+          <a:prstGeom prst="rect">
+            <a:avLst/>
+          </a:prstGeom>
+          <a:noFill/>
+          <a:extLst>
+            <a:ext uri="{909E8E84-426E-40DD-AFC4-6F175D3DCCD1}">
+              <a14:hiddenFill xmlns:a14="http://schemas.microsoft.com/office/drawing/2010/main">
+                <a:solidFill>
+                  <a:srgbClr val="FFFFFF"/>
+                </a:solidFill>
+              </a14:hiddenFill>
+            </a:ext>
+          </a:extLst>
+        </p:spPr>
+      </p:pic>
+      <p:pic>
+        <p:nvPicPr>
+          <p:cNvPr id="2050" name="Picture 2" descr="Servicio zonal L636 - H636 extiende su recorrido y cambia su nombre">
+            <a:extLst>
+              <a:ext uri="{FF2B5EF4-FFF2-40B4-BE49-F238E27FC236}">
+                <a16:creationId xmlns:a16="http://schemas.microsoft.com/office/drawing/2014/main" id="{F1E727E3-C30D-4C15-850F-53DCC9953DA4}"/>
+              </a:ext>
+            </a:extLst>
+          </p:cNvPr>
+          <p:cNvPicPr>
+            <a:picLocks noChangeAspect="1" noChangeArrowheads="1"/>
+          </p:cNvPicPr>
+          <p:nvPr/>
+        </p:nvPicPr>
+        <p:blipFill>
+          <a:blip r:embed="rId6">
+            <a:extLst>
+              <a:ext uri="{28A0092B-C50C-407E-A947-70E740481C1C}">
+                <a14:useLocalDpi xmlns:a14="http://schemas.microsoft.com/office/drawing/2010/main" val="0"/>
+              </a:ext>
+            </a:extLst>
+          </a:blip>
+          <a:srcRect/>
+          <a:stretch>
+            <a:fillRect/>
+          </a:stretch>
+        </p:blipFill>
+        <p:spPr bwMode="auto">
+          <a:xfrm>
+            <a:off x="-771799" y="1601014"/>
+            <a:ext cx="3930492" cy="6006269"/>
+          </a:xfrm>
+          <a:prstGeom prst="rect">
+            <a:avLst/>
+          </a:prstGeom>
+          <a:noFill/>
+          <a:extLst>
+            <a:ext uri="{909E8E84-426E-40DD-AFC4-6F175D3DCCD1}">
+              <a14:hiddenFill xmlns:a14="http://schemas.microsoft.com/office/drawing/2010/main">
+                <a:solidFill>
+                  <a:srgbClr val="FFFFFF"/>
+                </a:solidFill>
+              </a14:hiddenFill>
+            </a:ext>
+          </a:extLst>
+        </p:spPr>
+      </p:pic>
+    </p:spTree>
+    <p:extLst>
+      <p:ext uri="{BB962C8B-B14F-4D97-AF65-F5344CB8AC3E}">
+        <p14:creationId xmlns:p14="http://schemas.microsoft.com/office/powerpoint/2010/main" val="3813866145"/>
       </p:ext>
     </p:extLst>
   </p:cSld>
@@ -7729,7 +10706,7 @@
           <p:cNvPr id="2" name="Title 1">
             <a:extLst>
               <a:ext uri="{FF2B5EF4-FFF2-40B4-BE49-F238E27FC236}">
-                <a16:creationId xmlns:a16="http://schemas.microsoft.com/office/drawing/2014/main" id="{0FEACF23-9419-4BD7-A5D8-FE14AE03A236}"/>
+                <a16:creationId xmlns:a16="http://schemas.microsoft.com/office/drawing/2014/main" id="{A07B20E0-0687-41CD-8E84-F5772D9E58ED}"/>
               </a:ext>
             </a:extLst>
           </p:cNvPr>
@@ -7747,201 +10724,43 @@
           <a:p>
             <a:r>
               <a:rPr lang="es-CO" dirty="0"/>
-              <a:t>Velocidad</a:t>
-            </a:r>
-          </a:p>
-        </p:txBody>
-      </p:sp>
-      <p:sp>
-        <p:nvSpPr>
-          <p:cNvPr id="3" name="Content Placeholder 2">
-            <a:extLst>
-              <a:ext uri="{FF2B5EF4-FFF2-40B4-BE49-F238E27FC236}">
-                <a16:creationId xmlns:a16="http://schemas.microsoft.com/office/drawing/2014/main" id="{2F1D2351-E553-4B80-A6CB-A01B91474961}"/>
-              </a:ext>
-            </a:extLst>
-          </p:cNvPr>
-          <p:cNvSpPr>
-            <a:spLocks noGrp="1"/>
-          </p:cNvSpPr>
-          <p:nvPr>
-            <p:ph idx="1"/>
-          </p:nvPr>
-        </p:nvSpPr>
-        <p:spPr>
-          <a:xfrm>
-            <a:off x="838200" y="1825624"/>
-            <a:ext cx="4433047" cy="4351338"/>
-          </a:xfrm>
-        </p:spPr>
-        <p:txBody>
-          <a:bodyPr>
-            <a:normAutofit/>
-          </a:bodyPr>
-          <a:lstStyle/>
-          <a:p>
-            <a:r>
-              <a:rPr lang="es-CO" sz="2000" dirty="0"/>
-              <a:t>La velocidad está fuertemente limitada por la congestión de la ciudad.</a:t>
-            </a:r>
-          </a:p>
-          <a:p>
-            <a:r>
-              <a:rPr lang="es-CO" sz="2000" dirty="0"/>
-              <a:t>Horario: CASI TODO EL DÍA ES HORA PICO</a:t>
-            </a:r>
-          </a:p>
-          <a:p>
-            <a:r>
-              <a:rPr lang="es-CO" sz="2000" dirty="0"/>
-              <a:t>Por ruta: ligeras diferencias, especialmente </a:t>
-            </a:r>
-            <a:r>
-              <a:rPr lang="es-CO" sz="2000" dirty="0" err="1"/>
-              <a:t>inbound</a:t>
-            </a:r>
-            <a:r>
-              <a:rPr lang="es-CO" sz="2000" dirty="0"/>
-              <a:t>/</a:t>
-            </a:r>
-            <a:r>
-              <a:rPr lang="es-CO" sz="2000" dirty="0" err="1"/>
-              <a:t>outbound</a:t>
-            </a:r>
-            <a:endParaRPr lang="es-CO" sz="2000" dirty="0"/>
-          </a:p>
-          <a:p>
-            <a:r>
-              <a:rPr lang="es-CO" sz="2000" dirty="0"/>
-              <a:t>En las peores rutas, hora de inicio entre las 16 y 17, la velocidad puede estar entre 13 y 14 km/h</a:t>
-            </a:r>
-          </a:p>
-        </p:txBody>
-      </p:sp>
-      <p:pic>
-        <p:nvPicPr>
-          <p:cNvPr id="5" name="Picture 4">
-            <a:extLst>
-              <a:ext uri="{FF2B5EF4-FFF2-40B4-BE49-F238E27FC236}">
-                <a16:creationId xmlns:a16="http://schemas.microsoft.com/office/drawing/2014/main" id="{E9923E01-D5EA-4EE5-BA45-126AAC42CA41}"/>
-              </a:ext>
-            </a:extLst>
-          </p:cNvPr>
-          <p:cNvPicPr>
-            <a:picLocks noChangeAspect="1"/>
-          </p:cNvPicPr>
-          <p:nvPr/>
-        </p:nvPicPr>
-        <p:blipFill>
-          <a:blip r:embed="rId2"/>
-          <a:stretch>
-            <a:fillRect/>
-          </a:stretch>
-        </p:blipFill>
-        <p:spPr>
-          <a:xfrm>
-            <a:off x="6096000" y="4276163"/>
-            <a:ext cx="5042647" cy="3781986"/>
-          </a:xfrm>
-          <a:prstGeom prst="rect">
-            <a:avLst/>
-          </a:prstGeom>
-        </p:spPr>
-      </p:pic>
-      <p:pic>
-        <p:nvPicPr>
-          <p:cNvPr id="15" name="Picture 14">
-            <a:extLst>
-              <a:ext uri="{FF2B5EF4-FFF2-40B4-BE49-F238E27FC236}">
-                <a16:creationId xmlns:a16="http://schemas.microsoft.com/office/drawing/2014/main" id="{A06CFCF9-24CE-4588-907B-4378F2A95886}"/>
-              </a:ext>
-            </a:extLst>
-          </p:cNvPr>
-          <p:cNvPicPr>
-            <a:picLocks noChangeAspect="1"/>
-          </p:cNvPicPr>
-          <p:nvPr/>
-        </p:nvPicPr>
-        <p:blipFill>
-          <a:blip r:embed="rId3"/>
-          <a:stretch>
-            <a:fillRect/>
-          </a:stretch>
-        </p:blipFill>
-        <p:spPr>
-          <a:xfrm>
-            <a:off x="5767151" y="0"/>
-            <a:ext cx="5267325" cy="2177836"/>
-          </a:xfrm>
-          <a:prstGeom prst="rect">
-            <a:avLst/>
-          </a:prstGeom>
-        </p:spPr>
-      </p:pic>
-      <p:pic>
-        <p:nvPicPr>
-          <p:cNvPr id="21" name="Picture 20">
-            <a:extLst>
-              <a:ext uri="{FF2B5EF4-FFF2-40B4-BE49-F238E27FC236}">
-                <a16:creationId xmlns:a16="http://schemas.microsoft.com/office/drawing/2014/main" id="{7E60C4BE-DFA1-4B8C-A985-349ED1B6ECDB}"/>
-              </a:ext>
-            </a:extLst>
-          </p:cNvPr>
-          <p:cNvPicPr>
-            <a:picLocks noChangeAspect="1"/>
-          </p:cNvPicPr>
-          <p:nvPr/>
-        </p:nvPicPr>
-        <p:blipFill>
-          <a:blip r:embed="rId4"/>
-          <a:stretch>
-            <a:fillRect/>
-          </a:stretch>
-        </p:blipFill>
-        <p:spPr>
-          <a:xfrm>
-            <a:off x="8400813" y="2242358"/>
-            <a:ext cx="3400425" cy="1969283"/>
-          </a:xfrm>
-          <a:prstGeom prst="rect">
-            <a:avLst/>
-          </a:prstGeom>
-        </p:spPr>
-      </p:pic>
-      <p:pic>
-        <p:nvPicPr>
-          <p:cNvPr id="23" name="Picture 22">
-            <a:extLst>
-              <a:ext uri="{FF2B5EF4-FFF2-40B4-BE49-F238E27FC236}">
-                <a16:creationId xmlns:a16="http://schemas.microsoft.com/office/drawing/2014/main" id="{7699D1EA-E0D7-47E4-81E0-D6A994EFDE3A}"/>
-              </a:ext>
-            </a:extLst>
-          </p:cNvPr>
-          <p:cNvPicPr>
-            <a:picLocks noChangeAspect="1"/>
-          </p:cNvPicPr>
-          <p:nvPr/>
-        </p:nvPicPr>
-        <p:blipFill>
-          <a:blip r:embed="rId5"/>
-          <a:stretch>
-            <a:fillRect/>
-          </a:stretch>
-        </p:blipFill>
-        <p:spPr>
-          <a:xfrm>
-            <a:off x="5199692" y="2242358"/>
-            <a:ext cx="3400425" cy="1969283"/>
-          </a:xfrm>
-          <a:prstGeom prst="rect">
-            <a:avLst/>
-          </a:prstGeom>
-        </p:spPr>
-      </p:pic>
+              <a:t>Resultados ‘nuevos’</a:t>
+            </a:r>
+          </a:p>
+        </p:txBody>
+      </p:sp>
+      <p:sp>
+        <p:nvSpPr>
+          <p:cNvPr id="3" name="Text Placeholder 2">
+            <a:extLst>
+              <a:ext uri="{FF2B5EF4-FFF2-40B4-BE49-F238E27FC236}">
+                <a16:creationId xmlns:a16="http://schemas.microsoft.com/office/drawing/2014/main" id="{16C8FF78-876F-4928-8E5C-5112CD32348C}"/>
+              </a:ext>
+            </a:extLst>
+          </p:cNvPr>
+          <p:cNvSpPr>
+            <a:spLocks noGrp="1"/>
+          </p:cNvSpPr>
+          <p:nvPr>
+            <p:ph type="body" idx="1"/>
+          </p:nvPr>
+        </p:nvSpPr>
+        <p:spPr/>
+        <p:txBody>
+          <a:bodyPr/>
+          <a:lstStyle/>
+          <a:p>
+            <a:r>
+              <a:rPr lang="es-CO" dirty="0"/>
+              <a:t>Velocidad, Aceleración, Riesgo, Consumo</a:t>
+            </a:r>
+          </a:p>
+        </p:txBody>
+      </p:sp>
     </p:spTree>
     <p:extLst>
       <p:ext uri="{BB962C8B-B14F-4D97-AF65-F5344CB8AC3E}">
-        <p14:creationId xmlns:p14="http://schemas.microsoft.com/office/powerpoint/2010/main" val="2634935461"/>
+        <p14:creationId xmlns:p14="http://schemas.microsoft.com/office/powerpoint/2010/main" val="1770880778"/>
       </p:ext>
     </p:extLst>
   </p:cSld>
@@ -8015,7 +10834,7 @@
         <p:spPr>
           <a:xfrm>
             <a:off x="838200" y="1825624"/>
-            <a:ext cx="3336758" cy="4351338"/>
+            <a:ext cx="4433047" cy="4351338"/>
           </a:xfrm>
         </p:spPr>
         <p:txBody>
@@ -8025,100 +10844,61 @@
           <a:lstStyle/>
           <a:p>
             <a:r>
-              <a:rPr lang="es-CO" sz="1600" dirty="0"/>
-              <a:t>Cada ruta se divide en 9 segmento (misma longitud, casi 2 km cada uno). </a:t>
-            </a:r>
-          </a:p>
-          <a:p>
-            <a:r>
-              <a:rPr lang="es-CO" sz="1600" dirty="0"/>
-              <a:t>En cada segmento se hace normalización de rango min = 0, </a:t>
-            </a:r>
-            <a:r>
-              <a:rPr lang="es-CO" sz="1600" dirty="0" err="1"/>
-              <a:t>max</a:t>
-            </a:r>
-            <a:r>
-              <a:rPr lang="es-CO" sz="1600" dirty="0"/>
-              <a:t> = 1.</a:t>
-            </a:r>
-          </a:p>
-          <a:p>
-            <a:r>
-              <a:rPr lang="es-CO" sz="1600" dirty="0"/>
-              <a:t>El </a:t>
-            </a:r>
-            <a:r>
-              <a:rPr lang="es-CO" sz="1600" dirty="0" err="1"/>
-              <a:t>speed</a:t>
-            </a:r>
-            <a:r>
-              <a:rPr lang="es-CO" sz="1600" dirty="0"/>
-              <a:t> score es el promedio de las </a:t>
-            </a:r>
-            <a:r>
-              <a:rPr lang="es-CO" sz="1600" dirty="0" err="1"/>
-              <a:t>vel</a:t>
-            </a:r>
-            <a:r>
-              <a:rPr lang="es-CO" sz="1600" dirty="0"/>
-              <a:t> </a:t>
-            </a:r>
-            <a:r>
-              <a:rPr lang="es-CO" sz="1600" dirty="0" err="1"/>
-              <a:t>norm</a:t>
-            </a:r>
-            <a:r>
-              <a:rPr lang="es-CO" sz="1600" dirty="0"/>
-              <a:t> por rango de cada segmento.</a:t>
-            </a:r>
-          </a:p>
-          <a:p>
-            <a:r>
-              <a:rPr lang="es-CO" sz="1600" dirty="0"/>
-              <a:t>Luego calculamos la desviación de cada recorrido vs la media del </a:t>
-            </a:r>
-            <a:r>
-              <a:rPr lang="es-CO" sz="1600" dirty="0" err="1"/>
-              <a:t>speed_score</a:t>
-            </a:r>
-            <a:r>
-              <a:rPr lang="es-CO" sz="1600" dirty="0"/>
-              <a:t> en cada hora.</a:t>
-            </a:r>
-          </a:p>
-          <a:p>
-            <a:r>
-              <a:rPr lang="es-CO" sz="1600" dirty="0"/>
-              <a:t>El </a:t>
-            </a:r>
-            <a:r>
-              <a:rPr lang="es-CO" sz="1600" dirty="0" err="1"/>
-              <a:t>Speed_score</a:t>
-            </a:r>
-            <a:r>
-              <a:rPr lang="es-CO" sz="1600" dirty="0"/>
-              <a:t> permite comparar entre rutas y entre horarios.</a:t>
-            </a:r>
-          </a:p>
-          <a:p>
-            <a:r>
-              <a:rPr lang="es-CO" sz="1600" dirty="0" err="1"/>
-              <a:t>Des_speed_Score</a:t>
-            </a:r>
-            <a:r>
-              <a:rPr lang="es-CO" sz="1600" dirty="0"/>
-              <a:t>: Ligera desviación mayor en hombres.</a:t>
+              <a:rPr lang="es-CO" sz="2000" dirty="0"/>
+              <a:t>La velocidad está fuertemente limitada por la congestión de la ciudad.</a:t>
+            </a:r>
+          </a:p>
+          <a:p>
+            <a:r>
+              <a:rPr lang="es-CO" sz="2000" dirty="0"/>
+              <a:t>Horario: CASI TODO EL DÍA ES HORA PICO</a:t>
+            </a:r>
+          </a:p>
+          <a:p>
+            <a:r>
+              <a:rPr lang="es-CO" sz="2000" dirty="0"/>
+              <a:t>Por ruta: ligeras diferencias, especialmente </a:t>
+            </a:r>
+            <a:r>
+              <a:rPr lang="es-CO" sz="2000" dirty="0" err="1"/>
+              <a:t>inbound</a:t>
+            </a:r>
+            <a:r>
+              <a:rPr lang="es-CO" sz="2000" dirty="0"/>
+              <a:t>/</a:t>
+            </a:r>
+            <a:r>
+              <a:rPr lang="es-CO" sz="2000" dirty="0" err="1"/>
+              <a:t>outbound</a:t>
+            </a:r>
+            <a:endParaRPr lang="es-CO" sz="2000" dirty="0"/>
+          </a:p>
+          <a:p>
+            <a:r>
+              <a:rPr lang="es-CO" sz="2000" dirty="0"/>
+              <a:t>En las peores rutas, hora de inicio entre las 16 y 17, la velocidad* </a:t>
+            </a:r>
+            <a:r>
+              <a:rPr lang="es-CO" sz="2000" dirty="0">
+                <a:solidFill>
+                  <a:srgbClr val="FF0000"/>
+                </a:solidFill>
+              </a:rPr>
+              <a:t>(en movimiento, falta la velocidad comercial)</a:t>
+            </a:r>
+            <a:r>
+              <a:rPr lang="es-CO" sz="2000" dirty="0"/>
+              <a:t> puede estar entre 13 y 14 km/h</a:t>
             </a:r>
           </a:p>
         </p:txBody>
       </p:sp>
       <p:pic>
         <p:nvPicPr>
-          <p:cNvPr id="6" name="Picture 5">
-            <a:extLst>
-              <a:ext uri="{FF2B5EF4-FFF2-40B4-BE49-F238E27FC236}">
-                <a16:creationId xmlns:a16="http://schemas.microsoft.com/office/drawing/2014/main" id="{BD14C9A2-9278-4335-A272-72CD95BEC236}"/>
+          <p:cNvPr id="5" name="Picture 4">
+            <a:extLst>
+              <a:ext uri="{FF2B5EF4-FFF2-40B4-BE49-F238E27FC236}">
+                <a16:creationId xmlns:a16="http://schemas.microsoft.com/office/drawing/2014/main" id="{E9923E01-D5EA-4EE5-BA45-126AAC42CA41}"/>
               </a:ext>
             </a:extLst>
           </p:cNvPr>
@@ -8128,73 +10908,27 @@
           <p:nvPr/>
         </p:nvPicPr>
         <p:blipFill>
-          <a:blip r:embed="rId2">
-            <a:clrChange>
-              <a:clrFrom>
-                <a:srgbClr val="FFFFFF"/>
-              </a:clrFrom>
-              <a:clrTo>
-                <a:srgbClr val="FFFFFF">
-                  <a:alpha val="0"/>
-                </a:srgbClr>
-              </a:clrTo>
-            </a:clrChange>
-          </a:blip>
+          <a:blip r:embed="rId2"/>
           <a:stretch>
             <a:fillRect/>
           </a:stretch>
         </p:blipFill>
         <p:spPr>
           <a:xfrm>
-            <a:off x="3727786" y="-94166"/>
-            <a:ext cx="8578515" cy="3338500"/>
+            <a:off x="6096000" y="4276163"/>
+            <a:ext cx="5042647" cy="3781986"/>
           </a:xfrm>
           <a:prstGeom prst="rect">
             <a:avLst/>
           </a:prstGeom>
         </p:spPr>
       </p:pic>
-      <p:sp>
-        <p:nvSpPr>
-          <p:cNvPr id="7" name="TextBox 6">
-            <a:extLst>
-              <a:ext uri="{FF2B5EF4-FFF2-40B4-BE49-F238E27FC236}">
-                <a16:creationId xmlns:a16="http://schemas.microsoft.com/office/drawing/2014/main" id="{F3257E4D-E186-4B2C-837F-92964FED0A61}"/>
-              </a:ext>
-            </a:extLst>
-          </p:cNvPr>
-          <p:cNvSpPr txBox="1"/>
-          <p:nvPr/>
-        </p:nvSpPr>
-        <p:spPr>
-          <a:xfrm>
-            <a:off x="5149912" y="201934"/>
-            <a:ext cx="6123279" cy="369332"/>
-          </a:xfrm>
-          <a:prstGeom prst="rect">
-            <a:avLst/>
-          </a:prstGeom>
-          <a:noFill/>
-        </p:spPr>
-        <p:txBody>
-          <a:bodyPr wrap="none" rtlCol="0">
-            <a:spAutoFit/>
-          </a:bodyPr>
-          <a:lstStyle/>
-          <a:p>
-            <a:r>
-              <a:rPr lang="es-CO" dirty="0"/>
-              <a:t>En las velocidades no se ve ninguna diferencia clara entre sexos</a:t>
-            </a:r>
-          </a:p>
-        </p:txBody>
-      </p:sp>
       <p:pic>
         <p:nvPicPr>
-          <p:cNvPr id="9" name="Picture 8">
-            <a:extLst>
-              <a:ext uri="{FF2B5EF4-FFF2-40B4-BE49-F238E27FC236}">
-                <a16:creationId xmlns:a16="http://schemas.microsoft.com/office/drawing/2014/main" id="{2965EAA7-64E2-47E7-9CBB-1641729FA9AE}"/>
+          <p:cNvPr id="15" name="Picture 14">
+            <a:extLst>
+              <a:ext uri="{FF2B5EF4-FFF2-40B4-BE49-F238E27FC236}">
+                <a16:creationId xmlns:a16="http://schemas.microsoft.com/office/drawing/2014/main" id="{A06CFCF9-24CE-4588-907B-4378F2A95886}"/>
               </a:ext>
             </a:extLst>
           </p:cNvPr>
@@ -8204,85 +10938,85 @@
           <p:nvPr/>
         </p:nvPicPr>
         <p:blipFill>
-          <a:blip r:embed="rId3">
-            <a:clrChange>
-              <a:clrFrom>
-                <a:srgbClr val="FFFFFF"/>
-              </a:clrFrom>
-              <a:clrTo>
-                <a:srgbClr val="FFFFFF">
-                  <a:alpha val="0"/>
-                </a:srgbClr>
-              </a:clrTo>
-            </a:clrChange>
-          </a:blip>
+          <a:blip r:embed="rId3"/>
           <a:stretch>
             <a:fillRect/>
           </a:stretch>
         </p:blipFill>
         <p:spPr>
           <a:xfrm>
-            <a:off x="3475122" y="2976921"/>
-            <a:ext cx="9083842" cy="3334977"/>
+            <a:off x="5767151" y="0"/>
+            <a:ext cx="5267325" cy="2177836"/>
           </a:xfrm>
           <a:prstGeom prst="rect">
             <a:avLst/>
           </a:prstGeom>
         </p:spPr>
       </p:pic>
-      <p:sp>
-        <p:nvSpPr>
-          <p:cNvPr id="13" name="TextBox 12">
-            <a:extLst>
-              <a:ext uri="{FF2B5EF4-FFF2-40B4-BE49-F238E27FC236}">
-                <a16:creationId xmlns:a16="http://schemas.microsoft.com/office/drawing/2014/main" id="{5558117F-46C6-4CA4-AC28-E6EFAFF55E1F}"/>
-              </a:ext>
-            </a:extLst>
-          </p:cNvPr>
-          <p:cNvSpPr txBox="1"/>
+      <p:pic>
+        <p:nvPicPr>
+          <p:cNvPr id="21" name="Picture 20">
+            <a:extLst>
+              <a:ext uri="{FF2B5EF4-FFF2-40B4-BE49-F238E27FC236}">
+                <a16:creationId xmlns:a16="http://schemas.microsoft.com/office/drawing/2014/main" id="{7E60C4BE-DFA1-4B8C-A985-349ED1B6ECDB}"/>
+              </a:ext>
+            </a:extLst>
+          </p:cNvPr>
+          <p:cNvPicPr>
+            <a:picLocks noChangeAspect="1"/>
+          </p:cNvPicPr>
           <p:nvPr/>
-        </p:nvSpPr>
-        <p:spPr>
-          <a:xfrm>
-            <a:off x="4174958" y="6172281"/>
-            <a:ext cx="7844589" cy="646331"/>
+        </p:nvPicPr>
+        <p:blipFill>
+          <a:blip r:embed="rId4"/>
+          <a:stretch>
+            <a:fillRect/>
+          </a:stretch>
+        </p:blipFill>
+        <p:spPr>
+          <a:xfrm>
+            <a:off x="8400813" y="2242358"/>
+            <a:ext cx="3400425" cy="1969283"/>
           </a:xfrm>
           <a:prstGeom prst="rect">
             <a:avLst/>
           </a:prstGeom>
-          <a:noFill/>
-        </p:spPr>
-        <p:txBody>
-          <a:bodyPr wrap="square" rtlCol="0">
-            <a:spAutoFit/>
-          </a:bodyPr>
-          <a:lstStyle/>
-          <a:p>
-            <a:r>
-              <a:rPr lang="es-CO" sz="1200" dirty="0"/>
-              <a:t>En la desviación del </a:t>
-            </a:r>
-            <a:r>
-              <a:rPr lang="es-CO" sz="1200" dirty="0" err="1"/>
-              <a:t>speed</a:t>
-            </a:r>
-            <a:r>
-              <a:rPr lang="es-CO" sz="1200" dirty="0"/>
-              <a:t> score, en todas las rutas que tienen suficientes datos, la media (y la mediana) de los hombres es mayor que la de las mujeres.</a:t>
-            </a:r>
-          </a:p>
-          <a:p>
-            <a:r>
-              <a:rPr lang="es-CO" sz="1200" dirty="0"/>
-              <a:t>En promedio entre las 5 rutas, de la diferencia de las medias, equivale a 0,41 km/h</a:t>
-            </a:r>
-          </a:p>
-        </p:txBody>
-      </p:sp>
+        </p:spPr>
+      </p:pic>
+      <p:pic>
+        <p:nvPicPr>
+          <p:cNvPr id="23" name="Picture 22">
+            <a:extLst>
+              <a:ext uri="{FF2B5EF4-FFF2-40B4-BE49-F238E27FC236}">
+                <a16:creationId xmlns:a16="http://schemas.microsoft.com/office/drawing/2014/main" id="{7699D1EA-E0D7-47E4-81E0-D6A994EFDE3A}"/>
+              </a:ext>
+            </a:extLst>
+          </p:cNvPr>
+          <p:cNvPicPr>
+            <a:picLocks noChangeAspect="1"/>
+          </p:cNvPicPr>
+          <p:nvPr/>
+        </p:nvPicPr>
+        <p:blipFill>
+          <a:blip r:embed="rId5"/>
+          <a:stretch>
+            <a:fillRect/>
+          </a:stretch>
+        </p:blipFill>
+        <p:spPr>
+          <a:xfrm>
+            <a:off x="5199692" y="2242358"/>
+            <a:ext cx="3400425" cy="1969283"/>
+          </a:xfrm>
+          <a:prstGeom prst="rect">
+            <a:avLst/>
+          </a:prstGeom>
+        </p:spPr>
+      </p:pic>
     </p:spTree>
     <p:extLst>
       <p:ext uri="{BB962C8B-B14F-4D97-AF65-F5344CB8AC3E}">
-        <p14:creationId xmlns:p14="http://schemas.microsoft.com/office/powerpoint/2010/main" val="10453794"/>
+        <p14:creationId xmlns:p14="http://schemas.microsoft.com/office/powerpoint/2010/main" val="2634935461"/>
       </p:ext>
     </p:extLst>
   </p:cSld>
@@ -8314,7 +11048,7 @@
           <p:cNvPr id="2" name="Title 1">
             <a:extLst>
               <a:ext uri="{FF2B5EF4-FFF2-40B4-BE49-F238E27FC236}">
-                <a16:creationId xmlns:a16="http://schemas.microsoft.com/office/drawing/2014/main" id="{76F0FA71-38A6-4528-80B8-BC5776FB6DBC}"/>
+                <a16:creationId xmlns:a16="http://schemas.microsoft.com/office/drawing/2014/main" id="{0FEACF23-9419-4BD7-A5D8-FE14AE03A236}"/>
               </a:ext>
             </a:extLst>
           </p:cNvPr>
@@ -8332,7 +11066,7 @@
           <a:p>
             <a:r>
               <a:rPr lang="es-CO" dirty="0"/>
-              <a:t>Aceleración </a:t>
+              <a:t>Velocidad</a:t>
             </a:r>
           </a:p>
         </p:txBody>
@@ -8342,7 +11076,7 @@
           <p:cNvPr id="3" name="Content Placeholder 2">
             <a:extLst>
               <a:ext uri="{FF2B5EF4-FFF2-40B4-BE49-F238E27FC236}">
-                <a16:creationId xmlns:a16="http://schemas.microsoft.com/office/drawing/2014/main" id="{944BA5BE-F5FA-49A6-AED3-A53E50347295}"/>
+                <a16:creationId xmlns:a16="http://schemas.microsoft.com/office/drawing/2014/main" id="{2F1D2351-E553-4B80-A6CB-A01B91474961}"/>
               </a:ext>
             </a:extLst>
           </p:cNvPr>
@@ -8353,29 +11087,113 @@
             <p:ph idx="1"/>
           </p:nvPr>
         </p:nvSpPr>
-        <p:spPr/>
-        <p:txBody>
-          <a:bodyPr/>
-          <a:lstStyle/>
-          <a:p>
-            <a:r>
-              <a:rPr lang="es-CO" sz="1800" b="1" dirty="0"/>
-              <a:t>Se acelera por decisión, se frena por necesidad</a:t>
-            </a:r>
-            <a:r>
-              <a:rPr lang="es-CO" sz="1800" dirty="0"/>
-              <a:t>: En promedio, las frenadas son ligeramente más fuertes y más largas, tanto en el 4012 como en los otros.</a:t>
-            </a:r>
-            <a:endParaRPr lang="es-CO" dirty="0"/>
+        <p:spPr>
+          <a:xfrm>
+            <a:off x="838200" y="1825624"/>
+            <a:ext cx="3336758" cy="4351338"/>
+          </a:xfrm>
+        </p:spPr>
+        <p:txBody>
+          <a:bodyPr>
+            <a:normAutofit/>
+          </a:bodyPr>
+          <a:lstStyle/>
+          <a:p>
+            <a:r>
+              <a:rPr lang="es-CO" sz="1600" dirty="0"/>
+              <a:t>Cada ruta se divide en 9 segmentos (misma longitud, casi 2 km cada uno). </a:t>
+            </a:r>
+          </a:p>
+          <a:p>
+            <a:r>
+              <a:rPr lang="es-CO" sz="1600" dirty="0"/>
+              <a:t>En cada segmento se hace normalización de rango min = 0, </a:t>
+            </a:r>
+            <a:r>
+              <a:rPr lang="es-CO" sz="1600" dirty="0" err="1"/>
+              <a:t>max</a:t>
+            </a:r>
+            <a:r>
+              <a:rPr lang="es-CO" sz="1600" dirty="0"/>
+              <a:t> = 1.</a:t>
+            </a:r>
+          </a:p>
+          <a:p>
+            <a:r>
+              <a:rPr lang="es-CO" sz="1600" dirty="0"/>
+              <a:t>El </a:t>
+            </a:r>
+            <a:r>
+              <a:rPr lang="es-CO" sz="1600" dirty="0" err="1"/>
+              <a:t>speed</a:t>
+            </a:r>
+            <a:r>
+              <a:rPr lang="es-CO" sz="1600" dirty="0"/>
+              <a:t> score es el promedio de las </a:t>
+            </a:r>
+            <a:r>
+              <a:rPr lang="es-CO" sz="1600" dirty="0" err="1"/>
+              <a:t>vel</a:t>
+            </a:r>
+            <a:r>
+              <a:rPr lang="es-CO" sz="1600" dirty="0"/>
+              <a:t> </a:t>
+            </a:r>
+            <a:r>
+              <a:rPr lang="es-CO" sz="1600" dirty="0" err="1"/>
+              <a:t>norm</a:t>
+            </a:r>
+            <a:r>
+              <a:rPr lang="es-CO" sz="1600" dirty="0"/>
+              <a:t> por rango de cada segmento.</a:t>
+            </a:r>
+          </a:p>
+          <a:p>
+            <a:r>
+              <a:rPr lang="es-CO" sz="1600" dirty="0"/>
+              <a:t>Luego calculamos la desviación de cada recorrido vs la media del </a:t>
+            </a:r>
+            <a:r>
+              <a:rPr lang="es-CO" sz="1600" dirty="0" err="1"/>
+              <a:t>speed_score</a:t>
+            </a:r>
+            <a:r>
+              <a:rPr lang="es-CO" sz="1600" dirty="0"/>
+              <a:t> en cada hora.</a:t>
+            </a:r>
+          </a:p>
+          <a:p>
+            <a:r>
+              <a:rPr lang="es-CO" sz="1600" dirty="0"/>
+              <a:t>El </a:t>
+            </a:r>
+            <a:r>
+              <a:rPr lang="es-CO" sz="1600" dirty="0" err="1"/>
+              <a:t>Speed_score</a:t>
+            </a:r>
+            <a:r>
+              <a:rPr lang="es-CO" sz="1600" dirty="0"/>
+              <a:t> permite comparar entre rutas y entre horarios.</a:t>
+            </a:r>
+          </a:p>
+          <a:p>
+            <a:r>
+              <a:rPr lang="es-CO" sz="1600" dirty="0" err="1"/>
+              <a:t>Des_speed_Score</a:t>
+            </a:r>
+            <a:r>
+              <a:rPr lang="es-CO" sz="1600" dirty="0"/>
+              <a:t>: Ligera desviación mayor en hombres.</a:t>
+            </a:r>
           </a:p>
         </p:txBody>
       </p:sp>
       <p:pic>
         <p:nvPicPr>
-          <p:cNvPr id="4" name="Picture 3">
-            <a:extLst>
-              <a:ext uri="{FF2B5EF4-FFF2-40B4-BE49-F238E27FC236}">
-                <a16:creationId xmlns:a16="http://schemas.microsoft.com/office/drawing/2014/main" id="{8EB4B903-2E21-4485-8101-4D3C884DA82F}"/>
+          <p:cNvPr id="6" name="Picture 5">
+            <a:extLst>
+              <a:ext uri="{FF2B5EF4-FFF2-40B4-BE49-F238E27FC236}">
+                <a16:creationId xmlns:a16="http://schemas.microsoft.com/office/drawing/2014/main" id="{BD14C9A2-9278-4335-A272-72CD95BEC236}"/>
               </a:ext>
             </a:extLst>
           </p:cNvPr>
@@ -8403,18 +11221,143 @@
         </p:blipFill>
         <p:spPr>
           <a:xfrm>
-            <a:off x="979209" y="2459422"/>
-            <a:ext cx="8959743" cy="3577084"/>
+            <a:off x="3727786" y="-94166"/>
+            <a:ext cx="8578515" cy="3338500"/>
           </a:xfrm>
           <a:prstGeom prst="rect">
             <a:avLst/>
           </a:prstGeom>
         </p:spPr>
       </p:pic>
+      <p:sp>
+        <p:nvSpPr>
+          <p:cNvPr id="7" name="TextBox 6">
+            <a:extLst>
+              <a:ext uri="{FF2B5EF4-FFF2-40B4-BE49-F238E27FC236}">
+                <a16:creationId xmlns:a16="http://schemas.microsoft.com/office/drawing/2014/main" id="{F3257E4D-E186-4B2C-837F-92964FED0A61}"/>
+              </a:ext>
+            </a:extLst>
+          </p:cNvPr>
+          <p:cNvSpPr txBox="1"/>
+          <p:nvPr/>
+        </p:nvSpPr>
+        <p:spPr>
+          <a:xfrm>
+            <a:off x="5149912" y="201934"/>
+            <a:ext cx="6123279" cy="369332"/>
+          </a:xfrm>
+          <a:prstGeom prst="rect">
+            <a:avLst/>
+          </a:prstGeom>
+          <a:noFill/>
+        </p:spPr>
+        <p:txBody>
+          <a:bodyPr wrap="none" rtlCol="0">
+            <a:spAutoFit/>
+          </a:bodyPr>
+          <a:lstStyle/>
+          <a:p>
+            <a:r>
+              <a:rPr lang="es-CO" dirty="0"/>
+              <a:t>En las velocidades no se ve ninguna diferencia clara entre sexos</a:t>
+            </a:r>
+          </a:p>
+        </p:txBody>
+      </p:sp>
+      <p:pic>
+        <p:nvPicPr>
+          <p:cNvPr id="9" name="Picture 8">
+            <a:extLst>
+              <a:ext uri="{FF2B5EF4-FFF2-40B4-BE49-F238E27FC236}">
+                <a16:creationId xmlns:a16="http://schemas.microsoft.com/office/drawing/2014/main" id="{2965EAA7-64E2-47E7-9CBB-1641729FA9AE}"/>
+              </a:ext>
+            </a:extLst>
+          </p:cNvPr>
+          <p:cNvPicPr>
+            <a:picLocks noChangeAspect="1"/>
+          </p:cNvPicPr>
+          <p:nvPr/>
+        </p:nvPicPr>
+        <p:blipFill>
+          <a:blip r:embed="rId3">
+            <a:clrChange>
+              <a:clrFrom>
+                <a:srgbClr val="FFFFFF"/>
+              </a:clrFrom>
+              <a:clrTo>
+                <a:srgbClr val="FFFFFF">
+                  <a:alpha val="0"/>
+                </a:srgbClr>
+              </a:clrTo>
+            </a:clrChange>
+          </a:blip>
+          <a:stretch>
+            <a:fillRect/>
+          </a:stretch>
+        </p:blipFill>
+        <p:spPr>
+          <a:xfrm>
+            <a:off x="3475122" y="2976921"/>
+            <a:ext cx="9083842" cy="3334977"/>
+          </a:xfrm>
+          <a:prstGeom prst="rect">
+            <a:avLst/>
+          </a:prstGeom>
+        </p:spPr>
+      </p:pic>
+      <p:sp>
+        <p:nvSpPr>
+          <p:cNvPr id="13" name="TextBox 12">
+            <a:extLst>
+              <a:ext uri="{FF2B5EF4-FFF2-40B4-BE49-F238E27FC236}">
+                <a16:creationId xmlns:a16="http://schemas.microsoft.com/office/drawing/2014/main" id="{5558117F-46C6-4CA4-AC28-E6EFAFF55E1F}"/>
+              </a:ext>
+            </a:extLst>
+          </p:cNvPr>
+          <p:cNvSpPr txBox="1"/>
+          <p:nvPr/>
+        </p:nvSpPr>
+        <p:spPr>
+          <a:xfrm>
+            <a:off x="4174958" y="6172281"/>
+            <a:ext cx="7844589" cy="646331"/>
+          </a:xfrm>
+          <a:prstGeom prst="rect">
+            <a:avLst/>
+          </a:prstGeom>
+          <a:noFill/>
+        </p:spPr>
+        <p:txBody>
+          <a:bodyPr wrap="square" rtlCol="0">
+            <a:spAutoFit/>
+          </a:bodyPr>
+          <a:lstStyle/>
+          <a:p>
+            <a:r>
+              <a:rPr lang="es-CO" sz="1200" dirty="0"/>
+              <a:t>En la desviación del </a:t>
+            </a:r>
+            <a:r>
+              <a:rPr lang="es-CO" sz="1200" dirty="0" err="1"/>
+              <a:t>speed</a:t>
+            </a:r>
+            <a:r>
+              <a:rPr lang="es-CO" sz="1200" dirty="0"/>
+              <a:t> score, en todas las rutas que tienen suficientes datos, la media (y la mediana) de los hombres es mayor que la de las mujeres.</a:t>
+            </a:r>
+          </a:p>
+          <a:p>
+            <a:r>
+              <a:rPr lang="es-CO" sz="1200" dirty="0"/>
+              <a:t>En promedio entre las 5 rutas, de la diferencia de las medias, equivale a 0,41 km/h</a:t>
+            </a:r>
+          </a:p>
+        </p:txBody>
+      </p:sp>
     </p:spTree>
     <p:extLst>
       <p:ext uri="{BB962C8B-B14F-4D97-AF65-F5344CB8AC3E}">
-        <p14:creationId xmlns:p14="http://schemas.microsoft.com/office/powerpoint/2010/main" val="2177463488"/>
+        <p14:creationId xmlns:p14="http://schemas.microsoft.com/office/powerpoint/2010/main" val="10453794"/>
       </p:ext>
     </p:extLst>
   </p:cSld>
@@ -8446,7 +11389,7 @@
           <p:cNvPr id="2" name="Title 1">
             <a:extLst>
               <a:ext uri="{FF2B5EF4-FFF2-40B4-BE49-F238E27FC236}">
-                <a16:creationId xmlns:a16="http://schemas.microsoft.com/office/drawing/2014/main" id="{44B0B01B-E3CB-4E36-9AE6-45CFD6ABC120}"/>
+                <a16:creationId xmlns:a16="http://schemas.microsoft.com/office/drawing/2014/main" id="{FED49C78-C666-4E37-967E-B3E385AFC989}"/>
               </a:ext>
             </a:extLst>
           </p:cNvPr>
@@ -8464,7 +11407,7 @@
           <a:p>
             <a:r>
               <a:rPr lang="es-CO" dirty="0"/>
-              <a:t>Aceleración</a:t>
+              <a:t>Velocidad picos</a:t>
             </a:r>
           </a:p>
         </p:txBody>
@@ -8474,7 +11417,7 @@
           <p:cNvPr id="3" name="Content Placeholder 2">
             <a:extLst>
               <a:ext uri="{FF2B5EF4-FFF2-40B4-BE49-F238E27FC236}">
-                <a16:creationId xmlns:a16="http://schemas.microsoft.com/office/drawing/2014/main" id="{6128163C-3E79-4C3C-907B-95DA07EBE134}"/>
+                <a16:creationId xmlns:a16="http://schemas.microsoft.com/office/drawing/2014/main" id="{3CA946F0-BD7A-4A00-B2E0-ADEBAD562150}"/>
               </a:ext>
             </a:extLst>
           </p:cNvPr>
@@ -8487,165 +11430,160 @@
         </p:nvSpPr>
         <p:spPr>
           <a:xfrm>
-            <a:off x="838200" y="1825625"/>
-            <a:ext cx="2559424" cy="4351338"/>
+            <a:off x="869069" y="5034651"/>
+            <a:ext cx="2794000" cy="1603375"/>
           </a:xfrm>
         </p:spPr>
         <p:txBody>
           <a:bodyPr>
-            <a:normAutofit fontScale="92500"/>
+            <a:normAutofit fontScale="47500" lnSpcReduction="20000"/>
           </a:bodyPr>
           <a:lstStyle/>
           <a:p>
-            <a:r>
-              <a:rPr lang="es-CO" sz="1400" dirty="0"/>
-              <a:t>Hay 6 indicadores sobre las (des)aceleraciones para cada recorrido:</a:t>
-            </a:r>
-          </a:p>
-          <a:p>
-            <a:pPr lvl="1"/>
+            <a:pPr marL="0" indent="0">
+              <a:buNone/>
+            </a:pPr>
+            <a:r>
+              <a:rPr lang="es-CO" sz="1000" dirty="0" err="1"/>
+              <a:t>for</a:t>
+            </a:r>
             <a:r>
               <a:rPr lang="es-CO" sz="1000" dirty="0"/>
-              <a:t>% </a:t>
+              <a:t> i = 1:size(TablaLast,1)</a:t>
+            </a:r>
+          </a:p>
+          <a:p>
+            <a:pPr marL="0" indent="0">
+              <a:buNone/>
+            </a:pPr>
+            <a:r>
+              <a:rPr lang="es-CO" sz="1000" dirty="0"/>
+              <a:t>x = 3.6*</a:t>
             </a:r>
             <a:r>
               <a:rPr lang="es-CO" sz="1000" dirty="0" err="1"/>
-              <a:t>Mag</a:t>
+              <a:t>TablaLast.Velocidad</a:t>
             </a:r>
             <a:r>
               <a:rPr lang="es-CO" sz="1000" dirty="0"/>
-              <a:t> &gt; 1 m/s2 (porcentaje de ace fuertes)</a:t>
-            </a:r>
-          </a:p>
-          <a:p>
-            <a:pPr lvl="1"/>
+              <a:t>{i};</a:t>
+            </a:r>
+          </a:p>
+          <a:p>
+            <a:pPr marL="0" indent="0">
+              <a:buNone/>
+            </a:pPr>
             <a:r>
               <a:rPr lang="es-CO" sz="1000" dirty="0"/>
-              <a:t>% </a:t>
+              <a:t>x(x&gt;70) = [];</a:t>
+            </a:r>
+          </a:p>
+          <a:p>
+            <a:pPr marL="0" indent="0">
+              <a:buNone/>
+            </a:pPr>
+            <a:r>
+              <a:rPr lang="es-CO" sz="1000" dirty="0"/>
+              <a:t>x(x==0) = [];</a:t>
+            </a:r>
+          </a:p>
+          <a:p>
+            <a:pPr marL="0" indent="0">
+              <a:buNone/>
+            </a:pPr>
+            <a:r>
+              <a:rPr lang="es-CO" sz="1000" dirty="0"/>
+              <a:t>TablaLast.P50{i} = sum(x &gt; 50)/</a:t>
             </a:r>
             <a:r>
               <a:rPr lang="es-CO" sz="1000" dirty="0" err="1"/>
-              <a:t>Mag</a:t>
+              <a:t>numel</a:t>
             </a:r>
             <a:r>
               <a:rPr lang="es-CO" sz="1000" dirty="0"/>
-              <a:t> &gt; 2 m/s2 (porcentaje de ace muy fuertes)</a:t>
-            </a:r>
-          </a:p>
-          <a:p>
-            <a:pPr lvl="1"/>
+              <a:t>(x);</a:t>
+            </a:r>
+          </a:p>
+          <a:p>
+            <a:pPr marL="0" indent="0">
+              <a:buNone/>
+            </a:pPr>
+            <a:r>
+              <a:rPr lang="es-CO" sz="1000" dirty="0" err="1"/>
+              <a:t>end</a:t>
+            </a:r>
+            <a:endParaRPr lang="es-CO" sz="1000" dirty="0"/>
+          </a:p>
+          <a:p>
+            <a:pPr marL="0" indent="0">
+              <a:buNone/>
+            </a:pPr>
             <a:r>
               <a:rPr lang="es-CO" sz="1000" dirty="0"/>
-              <a:t>% </a:t>
+              <a:t>figure, </a:t>
             </a:r>
             <a:r>
               <a:rPr lang="es-CO" sz="1000" dirty="0" err="1"/>
-              <a:t>Mag</a:t>
+              <a:t>histogram</a:t>
             </a:r>
             <a:r>
               <a:rPr lang="es-CO" sz="1000" dirty="0"/>
-              <a:t> &lt; -1 m/s2 (porcentaje de </a:t>
+              <a:t>(cell2mat(TablaLast.P50(</a:t>
             </a:r>
             <a:r>
               <a:rPr lang="es-CO" sz="1000" dirty="0" err="1"/>
-              <a:t>fre</a:t>
+              <a:t>TablaLast.Sexo</a:t>
             </a:r>
             <a:r>
               <a:rPr lang="es-CO" sz="1000" dirty="0"/>
-              <a:t> fuertes)</a:t>
-            </a:r>
-          </a:p>
-          <a:p>
-            <a:pPr lvl="1"/>
+              <a:t>=='H')),20,'Normalization','probability')</a:t>
+            </a:r>
+          </a:p>
+          <a:p>
+            <a:pPr marL="0" indent="0">
+              <a:buNone/>
+            </a:pPr>
+            <a:r>
+              <a:rPr lang="es-CO" sz="1000" dirty="0" err="1"/>
+              <a:t>hold</a:t>
+            </a:r>
             <a:r>
               <a:rPr lang="es-CO" sz="1000" dirty="0"/>
-              <a:t>% </a:t>
+              <a:t> </a:t>
             </a:r>
             <a:r>
               <a:rPr lang="es-CO" sz="1000" dirty="0" err="1"/>
-              <a:t>Mag</a:t>
+              <a:t>on</a:t>
             </a:r>
             <a:r>
               <a:rPr lang="es-CO" sz="1000" dirty="0"/>
-              <a:t> &lt; -2 m/s2 (porcentaje de </a:t>
+              <a:t>, </a:t>
             </a:r>
             <a:r>
               <a:rPr lang="es-CO" sz="1000" dirty="0" err="1"/>
-              <a:t>fre</a:t>
+              <a:t>histogram</a:t>
             </a:r>
             <a:r>
               <a:rPr lang="es-CO" sz="1000" dirty="0"/>
-              <a:t> muy fuertes)</a:t>
-            </a:r>
-          </a:p>
-          <a:p>
-            <a:pPr lvl="1"/>
+              <a:t>(cell2mat(TablaLast.P50(</a:t>
+            </a:r>
+            <a:r>
+              <a:rPr lang="es-CO" sz="1000" dirty="0" err="1"/>
+              <a:t>TablaLast.Sexo</a:t>
+            </a:r>
             <a:r>
               <a:rPr lang="es-CO" sz="1000" dirty="0"/>
-              <a:t>Duración de las aceleraciones</a:t>
-            </a:r>
-          </a:p>
-          <a:p>
-            <a:pPr lvl="1"/>
-            <a:r>
-              <a:rPr lang="es-CO" sz="1000" dirty="0"/>
-              <a:t>Duración de las frenadas</a:t>
-            </a:r>
-          </a:p>
-          <a:p>
-            <a:r>
-              <a:rPr lang="es-CO" sz="1400" dirty="0"/>
-              <a:t>Además, en los patrones de conducción hay 2 indicadores</a:t>
-            </a:r>
-          </a:p>
-          <a:p>
-            <a:pPr lvl="1"/>
-            <a:r>
-              <a:rPr lang="es-CO" sz="1000" dirty="0"/>
-              <a:t># Aceleraciones por km</a:t>
-            </a:r>
-          </a:p>
-          <a:p>
-            <a:pPr lvl="1"/>
-            <a:r>
-              <a:rPr lang="es-CO" sz="1000" dirty="0"/>
-              <a:t># frenadas por km</a:t>
-            </a:r>
-          </a:p>
-          <a:p>
-            <a:pPr lvl="1"/>
-            <a:endParaRPr lang="es-CO" sz="1000" dirty="0"/>
-          </a:p>
-          <a:p>
-            <a:r>
-              <a:rPr lang="es-CO" sz="1400" dirty="0"/>
-              <a:t>En los primeros 6 indicadores, el bus 4012 (</a:t>
-            </a:r>
-            <a:r>
-              <a:rPr lang="es-CO" sz="1400" dirty="0" err="1"/>
-              <a:t>cyan</a:t>
-            </a:r>
-            <a:r>
-              <a:rPr lang="es-CO" sz="1400" dirty="0"/>
-              <a:t>) se distingue inmediatamente. Lo llamamos el “bus brusco”, </a:t>
-            </a:r>
-            <a:r>
-              <a:rPr lang="es-CO" sz="1400" b="1" dirty="0"/>
-              <a:t>frena y acelera más fuerte y en menos tiempo.</a:t>
-            </a:r>
-          </a:p>
-          <a:p>
-            <a:pPr lvl="1"/>
-            <a:endParaRPr lang="es-CO" sz="1000" dirty="0"/>
+              <a:t>=='M')),20,'Normalization','probability')</a:t>
+            </a:r>
           </a:p>
         </p:txBody>
       </p:sp>
       <p:pic>
         <p:nvPicPr>
-          <p:cNvPr id="5" name="Picture 4">
-            <a:extLst>
-              <a:ext uri="{FF2B5EF4-FFF2-40B4-BE49-F238E27FC236}">
-                <a16:creationId xmlns:a16="http://schemas.microsoft.com/office/drawing/2014/main" id="{57A2BCBA-5D7D-403A-A8A4-D416FA0400E2}"/>
+          <p:cNvPr id="7" name="Picture 6">
+            <a:extLst>
+              <a:ext uri="{FF2B5EF4-FFF2-40B4-BE49-F238E27FC236}">
+                <a16:creationId xmlns:a16="http://schemas.microsoft.com/office/drawing/2014/main" id="{3BF7BB1E-0F31-4975-87BB-FB149EBD2E6B}"/>
               </a:ext>
             </a:extLst>
           </p:cNvPr>
@@ -8662,18 +11600,113 @@
         </p:blipFill>
         <p:spPr>
           <a:xfrm>
-            <a:off x="3973886" y="157162"/>
-            <a:ext cx="9820275" cy="6543675"/>
+            <a:off x="5249333" y="2389713"/>
+            <a:ext cx="3310467" cy="2482850"/>
           </a:xfrm>
           <a:prstGeom prst="rect">
             <a:avLst/>
           </a:prstGeom>
         </p:spPr>
       </p:pic>
+      <p:pic>
+        <p:nvPicPr>
+          <p:cNvPr id="9" name="Picture 8">
+            <a:extLst>
+              <a:ext uri="{FF2B5EF4-FFF2-40B4-BE49-F238E27FC236}">
+                <a16:creationId xmlns:a16="http://schemas.microsoft.com/office/drawing/2014/main" id="{4BFF331A-AFF7-4FB0-B81C-65705F65E5C1}"/>
+              </a:ext>
+            </a:extLst>
+          </p:cNvPr>
+          <p:cNvPicPr>
+            <a:picLocks noChangeAspect="1"/>
+          </p:cNvPicPr>
+          <p:nvPr/>
+        </p:nvPicPr>
+        <p:blipFill>
+          <a:blip r:embed="rId3"/>
+          <a:stretch>
+            <a:fillRect/>
+          </a:stretch>
+        </p:blipFill>
+        <p:spPr>
+          <a:xfrm>
+            <a:off x="2266069" y="2386271"/>
+            <a:ext cx="3310468" cy="2482851"/>
+          </a:xfrm>
+          <a:prstGeom prst="rect">
+            <a:avLst/>
+          </a:prstGeom>
+        </p:spPr>
+      </p:pic>
+      <p:pic>
+        <p:nvPicPr>
+          <p:cNvPr id="11" name="Picture 10">
+            <a:extLst>
+              <a:ext uri="{FF2B5EF4-FFF2-40B4-BE49-F238E27FC236}">
+                <a16:creationId xmlns:a16="http://schemas.microsoft.com/office/drawing/2014/main" id="{321DB341-6001-4B5D-9B8D-7237C7CC5DE0}"/>
+              </a:ext>
+            </a:extLst>
+          </p:cNvPr>
+          <p:cNvPicPr>
+            <a:picLocks noChangeAspect="1"/>
+          </p:cNvPicPr>
+          <p:nvPr/>
+        </p:nvPicPr>
+        <p:blipFill>
+          <a:blip r:embed="rId4"/>
+          <a:stretch>
+            <a:fillRect/>
+          </a:stretch>
+        </p:blipFill>
+        <p:spPr>
+          <a:xfrm>
+            <a:off x="8270697" y="2382829"/>
+            <a:ext cx="3310467" cy="2482850"/>
+          </a:xfrm>
+          <a:prstGeom prst="rect">
+            <a:avLst/>
+          </a:prstGeom>
+        </p:spPr>
+      </p:pic>
+      <p:sp>
+        <p:nvSpPr>
+          <p:cNvPr id="12" name="TextBox 11">
+            <a:extLst>
+              <a:ext uri="{FF2B5EF4-FFF2-40B4-BE49-F238E27FC236}">
+                <a16:creationId xmlns:a16="http://schemas.microsoft.com/office/drawing/2014/main" id="{3720C7B5-7CAE-431F-B534-82842A3C21B9}"/>
+              </a:ext>
+            </a:extLst>
+          </p:cNvPr>
+          <p:cNvSpPr txBox="1"/>
+          <p:nvPr/>
+        </p:nvSpPr>
+        <p:spPr>
+          <a:xfrm>
+            <a:off x="2611885" y="2013497"/>
+            <a:ext cx="8775287" cy="369332"/>
+          </a:xfrm>
+          <a:prstGeom prst="rect">
+            <a:avLst/>
+          </a:prstGeom>
+          <a:noFill/>
+        </p:spPr>
+        <p:txBody>
+          <a:bodyPr wrap="none" rtlCol="0">
+            <a:spAutoFit/>
+          </a:bodyPr>
+          <a:lstStyle/>
+          <a:p>
+            <a:r>
+              <a:rPr lang="es-CO" dirty="0"/>
+              <a:t>No se ven diferencias significativas, en valores de velocidad por encima de 30, 40 o 50 km/h</a:t>
+            </a:r>
+          </a:p>
+        </p:txBody>
+      </p:sp>
     </p:spTree>
     <p:extLst>
       <p:ext uri="{BB962C8B-B14F-4D97-AF65-F5344CB8AC3E}">
-        <p14:creationId xmlns:p14="http://schemas.microsoft.com/office/powerpoint/2010/main" val="1758016994"/>
+        <p14:creationId xmlns:p14="http://schemas.microsoft.com/office/powerpoint/2010/main" val="1640048184"/>
       </p:ext>
     </p:extLst>
   </p:cSld>
